--- a/crypto_09_defi.pptx
+++ b/crypto_09_defi.pptx
@@ -5,10 +5,11 @@
     <p:sldMasterId id="2147483834" r:id="rId1"/>
   </p:sldMasterIdLst>
   <p:notesMasterIdLst>
-    <p:notesMasterId r:id="rId3"/>
+    <p:notesMasterId r:id="rId4"/>
   </p:notesMasterIdLst>
   <p:sldIdLst>
     <p:sldId id="326" r:id="rId2"/>
+    <p:sldId id="327" r:id="rId3"/>
   </p:sldIdLst>
   <p:sldSz cx="12192000" cy="6858000"/>
   <p:notesSz cx="6858000" cy="9144000"/>
@@ -685,7 +686,7 @@
           <a:p>
             <a:fld id="{EB1FAE4C-5332-014D-8E1B-BB8DA73EF81D}" type="datetimeFigureOut">
               <a:rPr lang="en-US"/>
-              <a:t>4/29/22</a:t>
+              <a:t>5/3/22</a:t>
             </a:fld>
             <a:endParaRPr lang="en-US"/>
           </a:p>
@@ -855,7 +856,7 @@
           <a:p>
             <a:fld id="{EB1FAE4C-5332-014D-8E1B-BB8DA73EF81D}" type="datetimeFigureOut">
               <a:rPr lang="en-US"/>
-              <a:t>4/29/22</a:t>
+              <a:t>5/3/22</a:t>
             </a:fld>
             <a:endParaRPr lang="en-US"/>
           </a:p>
@@ -1035,7 +1036,7 @@
           <a:p>
             <a:fld id="{EB1FAE4C-5332-014D-8E1B-BB8DA73EF81D}" type="datetimeFigureOut">
               <a:rPr lang="en-US"/>
-              <a:t>4/29/22</a:t>
+              <a:t>5/3/22</a:t>
             </a:fld>
             <a:endParaRPr lang="en-US"/>
           </a:p>
@@ -1205,7 +1206,7 @@
           <a:p>
             <a:fld id="{EB1FAE4C-5332-014D-8E1B-BB8DA73EF81D}" type="datetimeFigureOut">
               <a:rPr lang="en-US"/>
-              <a:t>4/29/22</a:t>
+              <a:t>5/3/22</a:t>
             </a:fld>
             <a:endParaRPr lang="en-US"/>
           </a:p>
@@ -1452,7 +1453,7 @@
           <a:p>
             <a:fld id="{EB1FAE4C-5332-014D-8E1B-BB8DA73EF81D}" type="datetimeFigureOut">
               <a:rPr lang="en-US"/>
-              <a:t>4/29/22</a:t>
+              <a:t>5/3/22</a:t>
             </a:fld>
             <a:endParaRPr lang="en-US"/>
           </a:p>
@@ -1683,7 +1684,7 @@
           <a:p>
             <a:fld id="{EB1FAE4C-5332-014D-8E1B-BB8DA73EF81D}" type="datetimeFigureOut">
               <a:rPr lang="en-US"/>
-              <a:t>4/29/22</a:t>
+              <a:t>5/3/22</a:t>
             </a:fld>
             <a:endParaRPr lang="en-US"/>
           </a:p>
@@ -2049,7 +2050,7 @@
           <a:p>
             <a:fld id="{EB1FAE4C-5332-014D-8E1B-BB8DA73EF81D}" type="datetimeFigureOut">
               <a:rPr lang="en-US"/>
-              <a:t>4/29/22</a:t>
+              <a:t>5/3/22</a:t>
             </a:fld>
             <a:endParaRPr lang="en-US"/>
           </a:p>
@@ -2168,7 +2169,7 @@
           <a:p>
             <a:fld id="{EB1FAE4C-5332-014D-8E1B-BB8DA73EF81D}" type="datetimeFigureOut">
               <a:rPr lang="en-US"/>
-              <a:t>4/29/22</a:t>
+              <a:t>5/3/22</a:t>
             </a:fld>
             <a:endParaRPr lang="en-US"/>
           </a:p>
@@ -2265,7 +2266,7 @@
           <a:p>
             <a:fld id="{EB1FAE4C-5332-014D-8E1B-BB8DA73EF81D}" type="datetimeFigureOut">
               <a:rPr lang="en-US"/>
-              <a:t>4/29/22</a:t>
+              <a:t>5/3/22</a:t>
             </a:fld>
             <a:endParaRPr lang="en-US"/>
           </a:p>
@@ -2541,7 +2542,7 @@
           <a:p>
             <a:fld id="{EB1FAE4C-5332-014D-8E1B-BB8DA73EF81D}" type="datetimeFigureOut">
               <a:rPr lang="en-US"/>
-              <a:t>4/29/22</a:t>
+              <a:t>5/3/22</a:t>
             </a:fld>
             <a:endParaRPr lang="en-US"/>
           </a:p>
@@ -2798,7 +2799,7 @@
           <a:p>
             <a:fld id="{EB1FAE4C-5332-014D-8E1B-BB8DA73EF81D}" type="datetimeFigureOut">
               <a:rPr lang="en-US"/>
-              <a:t>4/29/22</a:t>
+              <a:t>5/3/22</a:t>
             </a:fld>
             <a:endParaRPr lang="en-US"/>
           </a:p>
@@ -3011,7 +3012,7 @@
           <a:p>
             <a:fld id="{EB1FAE4C-5332-014D-8E1B-BB8DA73EF81D}" type="datetimeFigureOut">
               <a:rPr lang="en-US"/>
-              <a:t>4/29/22</a:t>
+              <a:t>5/3/22</a:t>
             </a:fld>
             <a:endParaRPr lang="en-US"/>
           </a:p>
@@ -4151,6 +4152,220 @@
     <p:extLst>
       <p:ext uri="{BB962C8B-B14F-4D97-AF65-F5344CB8AC3E}">
         <p14:creationId xmlns:p14="http://schemas.microsoft.com/office/powerpoint/2010/main" val="614671572"/>
+      </p:ext>
+    </p:extLst>
+  </p:cSld>
+  <p:clrMapOvr>
+    <a:masterClrMapping/>
+  </p:clrMapOvr>
+</p:sld>
+</file>
+
+<file path=ppt/slides/slide2.xml><?xml version="1.0" encoding="utf-8"?>
+<p:sld xmlns:a="http://schemas.openxmlformats.org/drawingml/2006/main" xmlns:r="http://schemas.openxmlformats.org/officeDocument/2006/relationships" xmlns:p="http://schemas.openxmlformats.org/presentationml/2006/main">
+  <p:cSld>
+    <p:spTree>
+      <p:nvGrpSpPr>
+        <p:cNvPr id="1" name=""/>
+        <p:cNvGrpSpPr/>
+        <p:nvPr/>
+      </p:nvGrpSpPr>
+      <p:grpSpPr>
+        <a:xfrm>
+          <a:off x="0" y="0"/>
+          <a:ext cx="0" cy="0"/>
+          <a:chOff x="0" y="0"/>
+          <a:chExt cx="0" cy="0"/>
+        </a:xfrm>
+      </p:grpSpPr>
+      <p:sp>
+        <p:nvSpPr>
+          <p:cNvPr id="2" name="TextBox 1">
+            <a:extLst>
+              <a:ext uri="{FF2B5EF4-FFF2-40B4-BE49-F238E27FC236}">
+                <a16:creationId xmlns:a16="http://schemas.microsoft.com/office/drawing/2014/main" id="{D074509F-C3EE-E627-156A-D239BA689CE4}"/>
+              </a:ext>
+            </a:extLst>
+          </p:cNvPr>
+          <p:cNvSpPr txBox="1"/>
+          <p:nvPr/>
+        </p:nvSpPr>
+        <p:spPr>
+          <a:xfrm>
+            <a:off x="278295" y="474345"/>
+            <a:ext cx="5516113" cy="3539430"/>
+          </a:xfrm>
+          <a:prstGeom prst="rect">
+            <a:avLst/>
+          </a:prstGeom>
+          <a:noFill/>
+        </p:spPr>
+        <p:txBody>
+          <a:bodyPr wrap="square" rtlCol="0">
+            <a:spAutoFit/>
+          </a:bodyPr>
+          <a:lstStyle/>
+          <a:p>
+            <a:r>
+              <a:rPr lang="en-US" sz="1400"/>
+              <a:t>Finance</a:t>
+            </a:r>
+          </a:p>
+          <a:p>
+            <a:r>
+              <a:rPr lang="en-US" sz="1400"/>
+              <a:t>1970 – computers</a:t>
+            </a:r>
+          </a:p>
+          <a:p>
+            <a:r>
+              <a:rPr lang="en-US" sz="1400"/>
+              <a:t>1990 – online operations</a:t>
+            </a:r>
+          </a:p>
+          <a:p>
+            <a:r>
+              <a:rPr lang="en-US" sz="1400"/>
+              <a:t>paypal, iintech, ...</a:t>
+            </a:r>
+          </a:p>
+          <a:p>
+            <a:endParaRPr lang="en-US" sz="1400"/>
+          </a:p>
+          <a:p>
+            <a:r>
+              <a:rPr lang="en-US" sz="1400"/>
+              <a:t>Standard finance is still inefficient - done by humans, behind closed doors, etc.</a:t>
+            </a:r>
+          </a:p>
+          <a:p>
+            <a:endParaRPr lang="en-US" sz="1400"/>
+          </a:p>
+          <a:p>
+            <a:r>
+              <a:rPr lang="en-US" sz="1400"/>
+              <a:t>new – cryptography, decentralization, blockchain</a:t>
+            </a:r>
+          </a:p>
+          <a:p>
+            <a:r>
+              <a:rPr lang="en-US" sz="1400"/>
+              <a:t>   payments, lending, borrowing, lending</a:t>
+            </a:r>
+          </a:p>
+          <a:p>
+            <a:r>
+              <a:rPr lang="en-US" sz="1400"/>
+              <a:t>   fast settlement – even between different countries</a:t>
+            </a:r>
+          </a:p>
+          <a:p>
+            <a:r>
+              <a:rPr lang="en-US" sz="1400"/>
+              <a:t>   no human involvement</a:t>
+            </a:r>
+          </a:p>
+          <a:p>
+            <a:r>
+              <a:rPr lang="en-US" sz="1400"/>
+              <a:t>   no permissions needed, no need to provide income statements, nationality, race, etc.</a:t>
+            </a:r>
+          </a:p>
+          <a:p>
+            <a:r>
+              <a:rPr lang="en-US" sz="1400"/>
+              <a:t>   open software, open protocols</a:t>
+            </a:r>
+          </a:p>
+          <a:p>
+            <a:r>
+              <a:rPr lang="en-US" sz="1400"/>
+              <a:t>   transparent, visible, ...</a:t>
+            </a:r>
+          </a:p>
+        </p:txBody>
+      </p:sp>
+      <p:sp>
+        <p:nvSpPr>
+          <p:cNvPr id="3" name="TextBox 2">
+            <a:extLst>
+              <a:ext uri="{FF2B5EF4-FFF2-40B4-BE49-F238E27FC236}">
+                <a16:creationId xmlns:a16="http://schemas.microsoft.com/office/drawing/2014/main" id="{79EC1A47-C971-C6FC-A6E9-B75E6CE97753}"/>
+              </a:ext>
+            </a:extLst>
+          </p:cNvPr>
+          <p:cNvSpPr txBox="1"/>
+          <p:nvPr/>
+        </p:nvSpPr>
+        <p:spPr>
+          <a:xfrm>
+            <a:off x="6096001" y="750771"/>
+            <a:ext cx="5550568" cy="2031325"/>
+          </a:xfrm>
+          <a:prstGeom prst="rect">
+            <a:avLst/>
+          </a:prstGeom>
+          <a:noFill/>
+        </p:spPr>
+        <p:txBody>
+          <a:bodyPr wrap="square" rtlCol="0">
+            <a:spAutoFit/>
+          </a:bodyPr>
+          <a:lstStyle/>
+          <a:p>
+            <a:r>
+              <a:rPr lang="en-US" sz="1400"/>
+              <a:t>TVL = Total Value Locked in DeFi</a:t>
+            </a:r>
+          </a:p>
+          <a:p>
+            <a:r>
+              <a:rPr lang="en-US" sz="1400"/>
+              <a:t>in lending protocols, decentralized exchanges, or derivative protocols</a:t>
+            </a:r>
+          </a:p>
+          <a:p>
+            <a:r>
+              <a:rPr lang="en-US" sz="1400"/>
+              <a:t>has grown from $1 Bln in 2020 to $32 Bln in Feb 2021</a:t>
+            </a:r>
+          </a:p>
+          <a:p>
+            <a:endParaRPr lang="en-US" sz="1400"/>
+          </a:p>
+          <a:p>
+            <a:r>
+              <a:rPr lang="en-US" sz="1400"/>
+              <a:t>Trading Volume:  $0.5 Bln =&gt; $50+ Bln in Jan 2021</a:t>
+            </a:r>
+          </a:p>
+          <a:p>
+            <a:endParaRPr lang="en-US" sz="1400"/>
+          </a:p>
+          <a:p>
+            <a:r>
+              <a:rPr lang="en-US" sz="1400"/>
+              <a:t>Stable coins – tremendous growth</a:t>
+            </a:r>
+          </a:p>
+          <a:p>
+            <a:r>
+              <a:rPr lang="en-US" sz="1400"/>
+              <a:t>   USDC</a:t>
+            </a:r>
+          </a:p>
+          <a:p>
+            <a:r>
+              <a:rPr lang="en-US" sz="1400"/>
+              <a:t>   Dai</a:t>
+            </a:r>
+          </a:p>
+        </p:txBody>
+      </p:sp>
+    </p:spTree>
+    <p:extLst>
+      <p:ext uri="{BB962C8B-B14F-4D97-AF65-F5344CB8AC3E}">
+        <p14:creationId xmlns:p14="http://schemas.microsoft.com/office/powerpoint/2010/main" val="502333622"/>
       </p:ext>
     </p:extLst>
   </p:cSld>

--- a/crypto_09_defi.pptx
+++ b/crypto_09_defi.pptx
@@ -4300,7 +4300,7 @@
         <p:spPr>
           <a:xfrm>
             <a:off x="6096001" y="750771"/>
-            <a:ext cx="5550568" cy="2031325"/>
+            <a:ext cx="5550568" cy="4832092"/>
           </a:xfrm>
           <a:prstGeom prst="rect">
             <a:avLst/>
@@ -4358,6 +4358,73 @@
             <a:r>
               <a:rPr lang="en-US" sz="1400"/>
               <a:t>   Dai</a:t>
+            </a:r>
+          </a:p>
+          <a:p>
+            <a:endParaRPr lang="en-US" sz="1400"/>
+          </a:p>
+          <a:p>
+            <a:r>
+              <a:rPr lang="en-US" sz="1400"/>
+              <a:t>decentralized decisions</a:t>
+            </a:r>
+          </a:p>
+          <a:p>
+            <a:r>
+              <a:rPr lang="en-US" sz="1400"/>
+              <a:t>governments can not change rules</a:t>
+            </a:r>
+          </a:p>
+          <a:p>
+            <a:r>
+              <a:rPr lang="en-US" sz="1400"/>
+              <a:t>fast speed and low cost</a:t>
+            </a:r>
+          </a:p>
+          <a:p>
+            <a:r>
+              <a:rPr lang="en-US" sz="1400"/>
+              <a:t>huge scaling</a:t>
+            </a:r>
+          </a:p>
+          <a:p>
+            <a:r>
+              <a:rPr lang="en-US" sz="1400"/>
+              <a:t>risks (hacking)</a:t>
+            </a:r>
+          </a:p>
+          <a:p>
+            <a:endParaRPr lang="en-US" sz="1400"/>
+          </a:p>
+          <a:p>
+            <a:r>
+              <a:rPr lang="en-US" sz="1400"/>
+              <a:t>AAVE - https://aave.com – open source liquidity protocol</a:t>
+            </a:r>
+            <a:br>
+              <a:rPr lang="en-US" sz="1400"/>
+            </a:br>
+            <a:r>
+              <a:rPr lang="en-US" sz="1400"/>
+              <a:t>( credit delegation, tokenized mortgages, ...)</a:t>
+            </a:r>
+          </a:p>
+          <a:p>
+            <a:endParaRPr lang="en-US" sz="1400"/>
+          </a:p>
+          <a:p>
+            <a:r>
+              <a:rPr lang="en-US" sz="1400"/>
+              <a:t>DeFi will make banks irrelevant</a:t>
+            </a:r>
+          </a:p>
+          <a:p>
+            <a:endParaRPr lang="en-US" sz="1400"/>
+          </a:p>
+          <a:p>
+            <a:r>
+              <a:rPr lang="en-US" sz="1400"/>
+              <a:t>Instead of going public on stock market – issue security tokens</a:t>
             </a:r>
           </a:p>
         </p:txBody>

--- a/crypto_09_defi.pptx
+++ b/crypto_09_defi.pptx
@@ -5,11 +5,12 @@
     <p:sldMasterId id="2147483834" r:id="rId1"/>
   </p:sldMasterIdLst>
   <p:notesMasterIdLst>
-    <p:notesMasterId r:id="rId4"/>
+    <p:notesMasterId r:id="rId5"/>
   </p:notesMasterIdLst>
   <p:sldIdLst>
-    <p:sldId id="326" r:id="rId2"/>
+    <p:sldId id="328" r:id="rId2"/>
     <p:sldId id="327" r:id="rId3"/>
+    <p:sldId id="326" r:id="rId4"/>
   </p:sldIdLst>
   <p:sldSz cx="12192000" cy="6858000"/>
   <p:notesSz cx="6858000" cy="9144000"/>
@@ -686,7 +687,7 @@
           <a:p>
             <a:fld id="{EB1FAE4C-5332-014D-8E1B-BB8DA73EF81D}" type="datetimeFigureOut">
               <a:rPr lang="en-US"/>
-              <a:t>5/3/22</a:t>
+              <a:t>5/5/22</a:t>
             </a:fld>
             <a:endParaRPr lang="en-US"/>
           </a:p>
@@ -856,7 +857,7 @@
           <a:p>
             <a:fld id="{EB1FAE4C-5332-014D-8E1B-BB8DA73EF81D}" type="datetimeFigureOut">
               <a:rPr lang="en-US"/>
-              <a:t>5/3/22</a:t>
+              <a:t>5/5/22</a:t>
             </a:fld>
             <a:endParaRPr lang="en-US"/>
           </a:p>
@@ -1036,7 +1037,7 @@
           <a:p>
             <a:fld id="{EB1FAE4C-5332-014D-8E1B-BB8DA73EF81D}" type="datetimeFigureOut">
               <a:rPr lang="en-US"/>
-              <a:t>5/3/22</a:t>
+              <a:t>5/5/22</a:t>
             </a:fld>
             <a:endParaRPr lang="en-US"/>
           </a:p>
@@ -1206,7 +1207,7 @@
           <a:p>
             <a:fld id="{EB1FAE4C-5332-014D-8E1B-BB8DA73EF81D}" type="datetimeFigureOut">
               <a:rPr lang="en-US"/>
-              <a:t>5/3/22</a:t>
+              <a:t>5/5/22</a:t>
             </a:fld>
             <a:endParaRPr lang="en-US"/>
           </a:p>
@@ -1453,7 +1454,7 @@
           <a:p>
             <a:fld id="{EB1FAE4C-5332-014D-8E1B-BB8DA73EF81D}" type="datetimeFigureOut">
               <a:rPr lang="en-US"/>
-              <a:t>5/3/22</a:t>
+              <a:t>5/5/22</a:t>
             </a:fld>
             <a:endParaRPr lang="en-US"/>
           </a:p>
@@ -1684,7 +1685,7 @@
           <a:p>
             <a:fld id="{EB1FAE4C-5332-014D-8E1B-BB8DA73EF81D}" type="datetimeFigureOut">
               <a:rPr lang="en-US"/>
-              <a:t>5/3/22</a:t>
+              <a:t>5/5/22</a:t>
             </a:fld>
             <a:endParaRPr lang="en-US"/>
           </a:p>
@@ -2050,7 +2051,7 @@
           <a:p>
             <a:fld id="{EB1FAE4C-5332-014D-8E1B-BB8DA73EF81D}" type="datetimeFigureOut">
               <a:rPr lang="en-US"/>
-              <a:t>5/3/22</a:t>
+              <a:t>5/5/22</a:t>
             </a:fld>
             <a:endParaRPr lang="en-US"/>
           </a:p>
@@ -2169,7 +2170,7 @@
           <a:p>
             <a:fld id="{EB1FAE4C-5332-014D-8E1B-BB8DA73EF81D}" type="datetimeFigureOut">
               <a:rPr lang="en-US"/>
-              <a:t>5/3/22</a:t>
+              <a:t>5/5/22</a:t>
             </a:fld>
             <a:endParaRPr lang="en-US"/>
           </a:p>
@@ -2266,7 +2267,7 @@
           <a:p>
             <a:fld id="{EB1FAE4C-5332-014D-8E1B-BB8DA73EF81D}" type="datetimeFigureOut">
               <a:rPr lang="en-US"/>
-              <a:t>5/3/22</a:t>
+              <a:t>5/5/22</a:t>
             </a:fld>
             <a:endParaRPr lang="en-US"/>
           </a:p>
@@ -2542,7 +2543,7 @@
           <a:p>
             <a:fld id="{EB1FAE4C-5332-014D-8E1B-BB8DA73EF81D}" type="datetimeFigureOut">
               <a:rPr lang="en-US"/>
-              <a:t>5/3/22</a:t>
+              <a:t>5/5/22</a:t>
             </a:fld>
             <a:endParaRPr lang="en-US"/>
           </a:p>
@@ -2799,7 +2800,7 @@
           <a:p>
             <a:fld id="{EB1FAE4C-5332-014D-8E1B-BB8DA73EF81D}" type="datetimeFigureOut">
               <a:rPr lang="en-US"/>
-              <a:t>5/3/22</a:t>
+              <a:t>5/5/22</a:t>
             </a:fld>
             <a:endParaRPr lang="en-US"/>
           </a:p>
@@ -3012,7 +3013,7 @@
           <a:p>
             <a:fld id="{EB1FAE4C-5332-014D-8E1B-BB8DA73EF81D}" type="datetimeFigureOut">
               <a:rPr lang="en-US"/>
-              <a:t>5/3/22</a:t>
+              <a:t>5/5/22</a:t>
             </a:fld>
             <a:endParaRPr lang="en-US"/>
           </a:p>
@@ -3429,7 +3430,7 @@
           <p:cNvPr id="2" name="TextBox 1">
             <a:extLst>
               <a:ext uri="{FF2B5EF4-FFF2-40B4-BE49-F238E27FC236}">
-                <a16:creationId xmlns:a16="http://schemas.microsoft.com/office/drawing/2014/main" id="{DE4BED06-02E4-18DE-E9B4-6D76B33E3204}"/>
+                <a16:creationId xmlns:a16="http://schemas.microsoft.com/office/drawing/2014/main" id="{CF10B7CF-96C3-8699-CB74-D7D680F1FCD2}"/>
               </a:ext>
             </a:extLst>
           </p:cNvPr>
@@ -3438,8 +3439,8 @@
         </p:nvSpPr>
         <p:spPr>
           <a:xfrm>
-            <a:off x="71942" y="3040025"/>
-            <a:ext cx="9830341" cy="3754874"/>
+            <a:off x="2943225" y="1485900"/>
+            <a:ext cx="2314575" cy="646331"/>
           </a:xfrm>
           <a:prstGeom prst="rect">
             <a:avLst/>
@@ -3452,698 +3453,15 @@
           </a:bodyPr>
           <a:lstStyle/>
           <a:p>
-            <a:pPr marL="285750" indent="-285750">
-              <a:buFont typeface="Arial" panose="020B0604020202020204" pitchFamily="34" charset="0"/>
-              <a:buChar char="•"/>
-            </a:pPr>
-            <a:r>
-              <a:rPr lang="en-US" sz="1400" b="1">
-                <a:solidFill>
-                  <a:srgbClr val="FF0000"/>
-                </a:solidFill>
-              </a:rPr>
-              <a:t>LP</a:t>
-            </a:r>
-            <a:r>
-              <a:rPr lang="en-US" sz="1400"/>
-              <a:t> – Liquidity Providers; </a:t>
-            </a:r>
-            <a:r>
-              <a:rPr lang="en-US" sz="1400" b="1">
-                <a:solidFill>
-                  <a:srgbClr val="FF0000"/>
-                </a:solidFill>
-              </a:rPr>
-              <a:t>AMM</a:t>
-            </a:r>
-            <a:r>
-              <a:rPr lang="en-US" sz="1400"/>
-              <a:t> (Automatic Market maker); </a:t>
-            </a:r>
-            <a:r>
-              <a:rPr lang="en-US" sz="1400" b="1">
-                <a:solidFill>
-                  <a:srgbClr val="FF0000"/>
-                </a:solidFill>
-              </a:rPr>
-              <a:t>TVL</a:t>
-            </a:r>
-            <a:r>
-              <a:rPr lang="en-US" sz="1400"/>
-              <a:t> – Total Value Locked</a:t>
-            </a:r>
-          </a:p>
-          <a:p>
-            <a:pPr marL="285750" indent="-285750">
-              <a:buFont typeface="Arial" panose="020B0604020202020204" pitchFamily="34" charset="0"/>
-              <a:buChar char="•"/>
-            </a:pPr>
-            <a:r>
-              <a:rPr lang="en-US" sz="1400" b="1">
-                <a:solidFill>
-                  <a:srgbClr val="FF0000"/>
-                </a:solidFill>
-              </a:rPr>
-              <a:t>IOTA</a:t>
-            </a:r>
-            <a:r>
-              <a:rPr lang="en-US" sz="1400"/>
-              <a:t> - open-source distributed ledger and cryptocurrency designed for the Internet of things (IoT)</a:t>
-            </a:r>
-          </a:p>
-          <a:p>
-            <a:pPr marL="285750" indent="-285750">
-              <a:buFont typeface="Arial" panose="020B0604020202020204" pitchFamily="34" charset="0"/>
-              <a:buChar char="•"/>
-            </a:pPr>
-            <a:r>
-              <a:rPr lang="en-US" sz="1400" b="1">
-                <a:solidFill>
-                  <a:srgbClr val="FF0000"/>
-                </a:solidFill>
-              </a:rPr>
-              <a:t>MoonPay</a:t>
-            </a:r>
-            <a:r>
-              <a:rPr lang="en-US" sz="1400"/>
-              <a:t> - https://www.moonpay.com - fast and simple way to buy and sell crypto</a:t>
-            </a:r>
-            <a:endParaRPr lang="en-US" sz="1400" b="1">
-              <a:solidFill>
-                <a:srgbClr val="FF0000"/>
-              </a:solidFill>
-            </a:endParaRPr>
-          </a:p>
-          <a:p>
-            <a:pPr marL="285750" indent="-285750">
-              <a:buFont typeface="Arial" panose="020B0604020202020204" pitchFamily="34" charset="0"/>
-              <a:buChar char="•"/>
-            </a:pPr>
-            <a:r>
-              <a:rPr lang="en-US" sz="1400" b="1">
-                <a:solidFill>
-                  <a:srgbClr val="FF0000"/>
-                </a:solidFill>
-              </a:rPr>
-              <a:t>Yeti finance</a:t>
-            </a:r>
-            <a:r>
-              <a:rPr lang="en-US" sz="1400"/>
-              <a:t> - https://yetifinance.co - Borrow against your entire Avalanche portfolio interest-free</a:t>
-            </a:r>
-          </a:p>
-          <a:p>
-            <a:pPr marL="285750" indent="-285750">
-              <a:buFont typeface="Arial" panose="020B0604020202020204" pitchFamily="34" charset="0"/>
-              <a:buChar char="•"/>
-            </a:pPr>
-            <a:r>
-              <a:rPr lang="en-US" sz="1400" b="1">
-                <a:solidFill>
-                  <a:srgbClr val="FF0000"/>
-                </a:solidFill>
-              </a:rPr>
-              <a:t>stargate</a:t>
-            </a:r>
-            <a:r>
-              <a:rPr lang="en-US" sz="1400"/>
-              <a:t> - https://stargate.finance/ - A fully composable native asset bridge with unified liquidity and instant guaranteed finality built on top of LayerZero</a:t>
-            </a:r>
-          </a:p>
-          <a:p>
-            <a:pPr marL="285750" indent="-285750">
-              <a:buFont typeface="Arial" panose="020B0604020202020204" pitchFamily="34" charset="0"/>
-              <a:buChar char="•"/>
-            </a:pPr>
-            <a:r>
-              <a:rPr lang="en-US" sz="1400" b="1">
-                <a:solidFill>
-                  <a:srgbClr val="FF0000"/>
-                </a:solidFill>
-              </a:rPr>
-              <a:t>Convex Finance</a:t>
-            </a:r>
-            <a:r>
-              <a:rPr lang="en-US" sz="1400"/>
-              <a:t> - https://www.convexfinance.com – deposit liquidity, earn boosted CRV and rewards</a:t>
-            </a:r>
-          </a:p>
-          <a:p>
-            <a:pPr marL="285750" indent="-285750">
-              <a:buFont typeface="Arial" panose="020B0604020202020204" pitchFamily="34" charset="0"/>
-              <a:buChar char="•"/>
-            </a:pPr>
-            <a:r>
-              <a:rPr lang="en-US" sz="1400" b="1">
-                <a:solidFill>
-                  <a:srgbClr val="FF0000"/>
-                </a:solidFill>
-              </a:rPr>
-              <a:t>Curve Finance (CRV token)</a:t>
-            </a:r>
-            <a:r>
-              <a:rPr lang="en-US" sz="1400"/>
-              <a:t> - https://resources.curve.fi – crypto swapping platform</a:t>
-            </a:r>
-          </a:p>
-          <a:p>
-            <a:pPr marL="285750" indent="-285750">
-              <a:buFont typeface="Arial" panose="020B0604020202020204" pitchFamily="34" charset="0"/>
-              <a:buChar char="•"/>
-            </a:pPr>
-            <a:r>
-              <a:rPr lang="en-US" sz="1400" b="1">
-                <a:solidFill>
-                  <a:srgbClr val="FF0000"/>
-                </a:solidFill>
-              </a:rPr>
-              <a:t>Uniswap</a:t>
-            </a:r>
-            <a:r>
-              <a:rPr lang="en-US" sz="1400"/>
-              <a:t> - - https://uniswap.org - cryptocurrency exchange which uses a decentralized network protocol</a:t>
-            </a:r>
-          </a:p>
-          <a:p>
-            <a:pPr marL="285750" indent="-285750">
-              <a:buFont typeface="Arial" panose="020B0604020202020204" pitchFamily="34" charset="0"/>
-              <a:buChar char="•"/>
-            </a:pPr>
-            <a:r>
-              <a:rPr lang="en-US" sz="1400" b="1">
-                <a:solidFill>
-                  <a:srgbClr val="FF0000"/>
-                </a:solidFill>
-              </a:rPr>
-              <a:t>Balancer</a:t>
-            </a:r>
-            <a:r>
-              <a:rPr lang="en-US" sz="1400"/>
-              <a:t> - https://balancer.fi - Automated portfolio manager and trading platform</a:t>
-            </a:r>
-            <a:endParaRPr lang="en-US" sz="1400" b="1">
-              <a:solidFill>
-                <a:srgbClr val="FF0000"/>
-              </a:solidFill>
-            </a:endParaRPr>
-          </a:p>
-          <a:p>
-            <a:pPr marL="285750" indent="-285750">
-              <a:buFont typeface="Arial" panose="020B0604020202020204" pitchFamily="34" charset="0"/>
-              <a:buChar char="•"/>
-            </a:pPr>
-            <a:r>
-              <a:rPr lang="en-US" sz="1400" b="1">
-                <a:solidFill>
-                  <a:srgbClr val="FF0000"/>
-                </a:solidFill>
-              </a:rPr>
-              <a:t>Fantom (wFTM)</a:t>
-            </a:r>
-            <a:r>
-              <a:rPr lang="en-US" sz="1400"/>
-              <a:t> - https://fantom.foundation - fast, high-throughput open-source smart contract platform for digital assets and dApps</a:t>
-            </a:r>
-          </a:p>
-          <a:p>
-            <a:pPr marL="285750" indent="-285750">
-              <a:buFont typeface="Arial" panose="020B0604020202020204" pitchFamily="34" charset="0"/>
-              <a:buChar char="•"/>
-            </a:pPr>
-            <a:r>
-              <a:rPr lang="en-US" sz="1400" b="1">
-                <a:solidFill>
-                  <a:srgbClr val="FF0000"/>
-                </a:solidFill>
-              </a:rPr>
-              <a:t>Vector</a:t>
-            </a:r>
-            <a:r>
-              <a:rPr lang="en-US" sz="1400"/>
-              <a:t> - https://vectorfinance.io/ - Deposit on Vector, the best yield booster on Avalanche</a:t>
-            </a:r>
-          </a:p>
-          <a:p>
-            <a:pPr marL="285750" indent="-285750">
-              <a:buFont typeface="Arial" panose="020B0604020202020204" pitchFamily="34" charset="0"/>
-              <a:buChar char="•"/>
-            </a:pPr>
-            <a:r>
-              <a:rPr lang="en-US" sz="1400" b="1">
-                <a:solidFill>
-                  <a:srgbClr val="FF0000"/>
-                </a:solidFill>
-              </a:rPr>
-              <a:t>Platypus finance</a:t>
-            </a:r>
-            <a:r>
-              <a:rPr lang="en-US" sz="1400"/>
-              <a:t> - https://platypus.finance – decentralized exchange, AMM for stableswap. Lower Slippage. Simpler UX.</a:t>
-            </a:r>
-          </a:p>
-          <a:p>
-            <a:pPr marL="285750" indent="-285750">
-              <a:buFont typeface="Arial" panose="020B0604020202020204" pitchFamily="34" charset="0"/>
-              <a:buChar char="•"/>
-            </a:pPr>
-            <a:r>
-              <a:rPr lang="en-US" sz="1400" b="1">
-                <a:solidFill>
-                  <a:srgbClr val="FF0000"/>
-                </a:solidFill>
-              </a:rPr>
-              <a:t>ACryptoS</a:t>
-            </a:r>
-            <a:r>
-              <a:rPr lang="en-US" sz="1400"/>
-              <a:t> - https://docs.acryptos.com - a yield farming optimizer on the Binance Smart Chain (BSC)</a:t>
-            </a:r>
-          </a:p>
-          <a:p>
-            <a:pPr marL="285750" indent="-285750">
-              <a:buFont typeface="Arial" panose="020B0604020202020204" pitchFamily="34" charset="0"/>
-              <a:buChar char="•"/>
-            </a:pPr>
-            <a:r>
-              <a:rPr lang="en-US" sz="1400" b="1">
-                <a:solidFill>
-                  <a:srgbClr val="FF0000"/>
-                </a:solidFill>
-              </a:rPr>
-              <a:t>Defi Llama</a:t>
-            </a:r>
-            <a:r>
-              <a:rPr lang="en-US" sz="1400"/>
-              <a:t> - https://defillama.com - a multi-chain TVL stats dashboard, where data connectors are contributed by a community</a:t>
-            </a:r>
-          </a:p>
-          <a:p>
-            <a:pPr marL="285750" indent="-285750">
-              <a:buFont typeface="Arial" panose="020B0604020202020204" pitchFamily="34" charset="0"/>
-              <a:buChar char="•"/>
-            </a:pPr>
-            <a:r>
-              <a:rPr lang="en-US" sz="1400" b="1">
-                <a:solidFill>
-                  <a:srgbClr val="FF0000"/>
-                </a:solidFill>
-              </a:rPr>
-              <a:t>Arrakis Finance</a:t>
-            </a:r>
-            <a:r>
-              <a:rPr lang="en-US" sz="1400"/>
-              <a:t> - https://www.arrakis.finance/ - web3 liquidity layer (automated community-owned protocol)</a:t>
-            </a:r>
-          </a:p>
-        </p:txBody>
-      </p:sp>
-      <p:sp>
-        <p:nvSpPr>
-          <p:cNvPr id="5" name="TextBox 4">
-            <a:extLst>
-              <a:ext uri="{FF2B5EF4-FFF2-40B4-BE49-F238E27FC236}">
-                <a16:creationId xmlns:a16="http://schemas.microsoft.com/office/drawing/2014/main" id="{6B9469CD-F847-CC08-33A0-C589F68CED74}"/>
-              </a:ext>
-            </a:extLst>
-          </p:cNvPr>
-          <p:cNvSpPr txBox="1"/>
-          <p:nvPr/>
-        </p:nvSpPr>
-        <p:spPr>
-          <a:xfrm>
-            <a:off x="0" y="0"/>
-            <a:ext cx="5393932" cy="523220"/>
-          </a:xfrm>
-          <a:prstGeom prst="rect">
-            <a:avLst/>
-          </a:prstGeom>
-          <a:noFill/>
-        </p:spPr>
-        <p:txBody>
-          <a:bodyPr wrap="square" rtlCol="0">
-            <a:spAutoFit/>
-          </a:bodyPr>
-          <a:lstStyle/>
-          <a:p>
-            <a:r>
-              <a:rPr lang="en-US" sz="2800" b="1"/>
-              <a:t>Decentralized finance (DeFi)</a:t>
-            </a:r>
-          </a:p>
-        </p:txBody>
-      </p:sp>
-      <p:sp>
-        <p:nvSpPr>
-          <p:cNvPr id="6" name="TextBox 5">
-            <a:extLst>
-              <a:ext uri="{FF2B5EF4-FFF2-40B4-BE49-F238E27FC236}">
-                <a16:creationId xmlns:a16="http://schemas.microsoft.com/office/drawing/2014/main" id="{2A631DBA-9ADF-E8AB-AE40-57957357B6DD}"/>
-              </a:ext>
-            </a:extLst>
-          </p:cNvPr>
-          <p:cNvSpPr txBox="1"/>
-          <p:nvPr/>
-        </p:nvSpPr>
-        <p:spPr>
-          <a:xfrm>
-            <a:off x="27338" y="603365"/>
-            <a:ext cx="7828908" cy="2031325"/>
-          </a:xfrm>
-          <a:prstGeom prst="rect">
-            <a:avLst/>
-          </a:prstGeom>
-          <a:noFill/>
-        </p:spPr>
-        <p:txBody>
-          <a:bodyPr wrap="square" rtlCol="0">
-            <a:spAutoFit/>
-          </a:bodyPr>
-          <a:lstStyle/>
-          <a:p>
-            <a:pPr marL="285750" indent="-285750">
-              <a:buFont typeface="Arial" panose="020B0604020202020204" pitchFamily="34" charset="0"/>
-              <a:buChar char="•"/>
-            </a:pPr>
-            <a:r>
-              <a:rPr lang="en-US" sz="1400" b="1">
-                <a:solidFill>
-                  <a:srgbClr val="FF0000"/>
-                </a:solidFill>
-              </a:rPr>
-              <a:t>DeFi</a:t>
-            </a:r>
-            <a:r>
-              <a:rPr lang="en-US" sz="1400"/>
-              <a:t> - allows you to </a:t>
-            </a:r>
-            <a:r>
-              <a:rPr lang="en-US" sz="1400" b="1">
-                <a:solidFill>
-                  <a:srgbClr val="00B050"/>
-                </a:solidFill>
-              </a:rPr>
-              <a:t>stake, lend, borrow and trade</a:t>
-            </a:r>
-            <a:r>
-              <a:rPr lang="en-US" sz="1400"/>
-              <a:t> cryptocurrencies (similar how banks do that)</a:t>
-            </a:r>
-          </a:p>
-          <a:p>
-            <a:pPr marL="285750" indent="-285750">
-              <a:buFont typeface="Arial" panose="020B0604020202020204" pitchFamily="34" charset="0"/>
-              <a:buChar char="•"/>
-            </a:pPr>
-            <a:r>
-              <a:rPr lang="en-US" sz="1400"/>
-              <a:t>You can </a:t>
-            </a:r>
-            <a:r>
-              <a:rPr lang="en-US" sz="1400" b="1">
-                <a:solidFill>
-                  <a:srgbClr val="00B050"/>
-                </a:solidFill>
-              </a:rPr>
-              <a:t>deposit</a:t>
-            </a:r>
-            <a:r>
-              <a:rPr lang="en-US" sz="1400"/>
-              <a:t> your cryptocurrency onto a </a:t>
-            </a:r>
-            <a:r>
-              <a:rPr lang="en-US" sz="1400" b="1">
-                <a:solidFill>
-                  <a:srgbClr val="00B050"/>
-                </a:solidFill>
-              </a:rPr>
-              <a:t>platform or protocol</a:t>
-            </a:r>
-            <a:r>
-              <a:rPr lang="en-US" sz="1400"/>
-              <a:t> that will pay you an APY (Annual Percentage Yield) for it. Most common deposits - Ethereum (ERC-20) token, or Ether (ETH), or a stablecoin like DAI or USDT</a:t>
-            </a:r>
-          </a:p>
-          <a:p>
-            <a:pPr marL="285750" indent="-285750">
-              <a:buFont typeface="Arial" panose="020B0604020202020204" pitchFamily="34" charset="0"/>
-              <a:buChar char="•"/>
-            </a:pPr>
-            <a:r>
-              <a:rPr lang="en-US" sz="1400"/>
-              <a:t>You can do</a:t>
-            </a:r>
-            <a:r>
-              <a:rPr lang="en-US" sz="1400" b="1">
-                <a:solidFill>
-                  <a:srgbClr val="00B050"/>
-                </a:solidFill>
-              </a:rPr>
-              <a:t> liquidity mining (yield farming)</a:t>
-            </a:r>
-            <a:r>
-              <a:rPr lang="en-US" sz="1400"/>
-              <a:t>. You can </a:t>
-            </a:r>
-            <a:r>
-              <a:rPr lang="en-US" sz="1400" b="1">
-                <a:solidFill>
-                  <a:srgbClr val="00B050"/>
-                </a:solidFill>
-              </a:rPr>
-              <a:t>stake or trade rewards</a:t>
-            </a:r>
-            <a:r>
-              <a:rPr lang="en-US" sz="1400"/>
-              <a:t> that you get for depositing your crypto. Typically you are paid in native tokens of protocols or platforms you use. You can re-invest them, or trade on exchanges (DEXs like Uniswap)</a:t>
-            </a:r>
-          </a:p>
-          <a:p>
-            <a:pPr marL="285750" indent="-285750">
-              <a:buFont typeface="Arial" panose="020B0604020202020204" pitchFamily="34" charset="0"/>
-              <a:buChar char="•"/>
-            </a:pPr>
-            <a:r>
-              <a:rPr lang="en-US" sz="1400"/>
-              <a:t>You can boost your returns with </a:t>
-            </a:r>
-            <a:r>
-              <a:rPr lang="en-US" sz="1400" b="1">
-                <a:solidFill>
-                  <a:srgbClr val="00B050"/>
-                </a:solidFill>
-              </a:rPr>
-              <a:t>borrowing and lending</a:t>
-            </a:r>
-            <a:r>
-              <a:rPr lang="en-US" sz="1400"/>
-              <a:t> (legal regulations apply !)</a:t>
-            </a:r>
-          </a:p>
-          <a:p>
-            <a:pPr marL="285750" indent="-285750">
-              <a:buFont typeface="Arial" panose="020B0604020202020204" pitchFamily="34" charset="0"/>
-              <a:buChar char="•"/>
-            </a:pPr>
-            <a:r>
-              <a:rPr lang="en-US" sz="1400"/>
-              <a:t>You can use</a:t>
-            </a:r>
-            <a:r>
-              <a:rPr lang="en-US" sz="1400" b="1">
-                <a:solidFill>
-                  <a:srgbClr val="00B050"/>
-                </a:solidFill>
-              </a:rPr>
-              <a:t> leverage/derivatives</a:t>
-            </a:r>
-            <a:r>
-              <a:rPr lang="en-US" sz="1400"/>
-              <a:t>, but this </a:t>
-            </a:r>
-            <a:r>
-              <a:rPr lang="en-US" sz="1400" b="1">
-                <a:solidFill>
-                  <a:srgbClr val="00B050"/>
-                </a:solidFill>
-              </a:rPr>
-              <a:t>multi-layered liquidity mining</a:t>
-            </a:r>
-            <a:r>
-              <a:rPr lang="en-US" sz="1400"/>
-              <a:t> increases the risk</a:t>
-            </a:r>
-          </a:p>
-        </p:txBody>
-      </p:sp>
-      <p:sp>
-        <p:nvSpPr>
-          <p:cNvPr id="4" name="TextBox 3">
-            <a:extLst>
-              <a:ext uri="{FF2B5EF4-FFF2-40B4-BE49-F238E27FC236}">
-                <a16:creationId xmlns:a16="http://schemas.microsoft.com/office/drawing/2014/main" id="{DDD382D3-306C-5323-6F4D-5BFD67207853}"/>
-              </a:ext>
-            </a:extLst>
-          </p:cNvPr>
-          <p:cNvSpPr txBox="1"/>
-          <p:nvPr/>
-        </p:nvSpPr>
-        <p:spPr>
-          <a:xfrm>
-            <a:off x="8501098" y="111280"/>
-            <a:ext cx="3599396" cy="3108543"/>
-          </a:xfrm>
-          <a:prstGeom prst="rect">
-            <a:avLst/>
-          </a:prstGeom>
-          <a:noFill/>
-          <a:ln>
-            <a:solidFill>
-              <a:schemeClr val="accent1"/>
-            </a:solidFill>
-          </a:ln>
-        </p:spPr>
-        <p:txBody>
-          <a:bodyPr wrap="square" rtlCol="0">
-            <a:spAutoFit/>
-          </a:bodyPr>
-          <a:lstStyle/>
-          <a:p>
-            <a:r>
-              <a:rPr lang="en-US" sz="1400"/>
-              <a:t>Traditional Exchanges - </a:t>
-            </a:r>
-            <a:r>
-              <a:rPr lang="en-US" sz="1400">
-                <a:solidFill>
-                  <a:srgbClr val="FF0000"/>
-                </a:solidFill>
-              </a:rPr>
-              <a:t>Order-Book model</a:t>
-            </a:r>
-            <a:r>
-              <a:rPr lang="en-US" sz="1400"/>
-              <a:t>:</a:t>
-            </a:r>
-          </a:p>
-          <a:p>
-            <a:pPr marL="285750" indent="-285750">
-              <a:buFont typeface="Arial" panose="020B0604020202020204" pitchFamily="34" charset="0"/>
-              <a:buChar char="•"/>
-            </a:pPr>
-            <a:r>
-              <a:rPr lang="en-US" sz="1400"/>
-              <a:t>Buyers &amp; Sellers</a:t>
-            </a:r>
-          </a:p>
-          <a:p>
-            <a:pPr marL="285750" indent="-285750">
-              <a:buFont typeface="Arial" panose="020B0604020202020204" pitchFamily="34" charset="0"/>
-              <a:buChar char="•"/>
-            </a:pPr>
-            <a:r>
-              <a:rPr lang="en-US" sz="1400"/>
-              <a:t>Market Makers (Dealers) provide liquidity</a:t>
-            </a:r>
-          </a:p>
-          <a:p>
-            <a:endParaRPr lang="en-US" sz="1400"/>
-          </a:p>
-          <a:p>
-            <a:r>
-              <a:rPr lang="en-US" sz="1400"/>
-              <a:t>DEFI – </a:t>
-            </a:r>
-            <a:r>
-              <a:rPr lang="en-US" sz="1400" b="1">
-                <a:solidFill>
-                  <a:srgbClr val="FF0000"/>
-                </a:solidFill>
-              </a:rPr>
-              <a:t>Liquidity Pools model</a:t>
-            </a:r>
-            <a:r>
-              <a:rPr lang="en-US" sz="1400"/>
-              <a:t> to facilitate swaps between coins</a:t>
-            </a:r>
-          </a:p>
-          <a:p>
-            <a:pPr marL="285750" indent="-285750">
-              <a:buFont typeface="Arial" panose="020B0604020202020204" pitchFamily="34" charset="0"/>
-              <a:buChar char="•"/>
-            </a:pPr>
-            <a:r>
-              <a:rPr lang="en-US" sz="1400" b="1">
-                <a:solidFill>
-                  <a:srgbClr val="FF0000"/>
-                </a:solidFill>
-              </a:rPr>
-              <a:t>LPs (Liquidity Providers)</a:t>
-            </a:r>
-            <a:r>
-              <a:rPr lang="en-US" sz="1400"/>
-              <a:t> are compensated</a:t>
-            </a:r>
-          </a:p>
-          <a:p>
-            <a:pPr marL="285750" indent="-285750">
-              <a:buFont typeface="Arial" panose="020B0604020202020204" pitchFamily="34" charset="0"/>
-              <a:buChar char="•"/>
-            </a:pPr>
-            <a:r>
-              <a:rPr lang="en-US" sz="1400" b="1">
-                <a:solidFill>
-                  <a:srgbClr val="FF0000"/>
-                </a:solidFill>
-              </a:rPr>
-              <a:t>Liquidity mining</a:t>
-            </a:r>
-            <a:r>
-              <a:rPr lang="en-US" sz="1400"/>
-              <a:t> - LPs are compensated more for providing liquidity where it is needed more</a:t>
-            </a:r>
-          </a:p>
-          <a:p>
-            <a:pPr marL="285750" indent="-285750">
-              <a:buFont typeface="Arial" panose="020B0604020202020204" pitchFamily="34" charset="0"/>
-              <a:buChar char="•"/>
-            </a:pPr>
-            <a:r>
-              <a:rPr lang="en-US" sz="1400"/>
-              <a:t>Prices are adjusted automatically (</a:t>
-            </a:r>
-            <a:r>
-              <a:rPr lang="en-US" sz="1400" b="1">
-                <a:solidFill>
-                  <a:srgbClr val="FF0000"/>
-                </a:solidFill>
-              </a:rPr>
-              <a:t>AMM = Automatic Market Maker</a:t>
-            </a:r>
-            <a:r>
-              <a:rPr lang="en-US" sz="1400"/>
-              <a:t> algorithms)</a:t>
-            </a:r>
-          </a:p>
-          <a:p>
-            <a:pPr marL="285750" indent="-285750">
-              <a:buFont typeface="Arial" panose="020B0604020202020204" pitchFamily="34" charset="0"/>
-              <a:buChar char="•"/>
-            </a:pPr>
-            <a:r>
-              <a:rPr lang="en-US" sz="1400"/>
-              <a:t>The larger the pool, the lesser </a:t>
-            </a:r>
-            <a:r>
-              <a:rPr lang="en-US" sz="1400" b="1">
-                <a:solidFill>
-                  <a:srgbClr val="FF0000"/>
-                </a:solidFill>
-              </a:rPr>
-              <a:t>slippage</a:t>
-            </a:r>
-            <a:r>
-              <a:rPr lang="en-US" sz="1400"/>
-              <a:t> (effect of a single trade on prices)</a:t>
+            <a:r>
+              <a:rPr lang="en-US"/>
+              <a:t>what is DeFi</a:t>
+            </a:r>
+          </a:p>
+          <a:p>
+            <a:r>
+              <a:rPr lang="en-US"/>
+              <a:t>History of DeFi</a:t>
             </a:r>
           </a:p>
         </p:txBody>
@@ -4151,7 +3469,7 @@
     </p:spTree>
     <p:extLst>
       <p:ext uri="{BB962C8B-B14F-4D97-AF65-F5344CB8AC3E}">
-        <p14:creationId xmlns:p14="http://schemas.microsoft.com/office/powerpoint/2010/main" val="614671572"/>
+        <p14:creationId xmlns:p14="http://schemas.microsoft.com/office/powerpoint/2010/main" val="305713760"/>
       </p:ext>
     </p:extLst>
   </p:cSld>
@@ -4433,6 +3751,760 @@
     <p:extLst>
       <p:ext uri="{BB962C8B-B14F-4D97-AF65-F5344CB8AC3E}">
         <p14:creationId xmlns:p14="http://schemas.microsoft.com/office/powerpoint/2010/main" val="502333622"/>
+      </p:ext>
+    </p:extLst>
+  </p:cSld>
+  <p:clrMapOvr>
+    <a:masterClrMapping/>
+  </p:clrMapOvr>
+</p:sld>
+</file>
+
+<file path=ppt/slides/slide3.xml><?xml version="1.0" encoding="utf-8"?>
+<p:sld xmlns:a="http://schemas.openxmlformats.org/drawingml/2006/main" xmlns:r="http://schemas.openxmlformats.org/officeDocument/2006/relationships" xmlns:p="http://schemas.openxmlformats.org/presentationml/2006/main">
+  <p:cSld>
+    <p:spTree>
+      <p:nvGrpSpPr>
+        <p:cNvPr id="1" name=""/>
+        <p:cNvGrpSpPr/>
+        <p:nvPr/>
+      </p:nvGrpSpPr>
+      <p:grpSpPr>
+        <a:xfrm>
+          <a:off x="0" y="0"/>
+          <a:ext cx="0" cy="0"/>
+          <a:chOff x="0" y="0"/>
+          <a:chExt cx="0" cy="0"/>
+        </a:xfrm>
+      </p:grpSpPr>
+      <p:sp>
+        <p:nvSpPr>
+          <p:cNvPr id="2" name="TextBox 1">
+            <a:extLst>
+              <a:ext uri="{FF2B5EF4-FFF2-40B4-BE49-F238E27FC236}">
+                <a16:creationId xmlns:a16="http://schemas.microsoft.com/office/drawing/2014/main" id="{DE4BED06-02E4-18DE-E9B4-6D76B33E3204}"/>
+              </a:ext>
+            </a:extLst>
+          </p:cNvPr>
+          <p:cNvSpPr txBox="1"/>
+          <p:nvPr/>
+        </p:nvSpPr>
+        <p:spPr>
+          <a:xfrm>
+            <a:off x="71942" y="3040025"/>
+            <a:ext cx="9830341" cy="3754874"/>
+          </a:xfrm>
+          <a:prstGeom prst="rect">
+            <a:avLst/>
+          </a:prstGeom>
+          <a:noFill/>
+        </p:spPr>
+        <p:txBody>
+          <a:bodyPr wrap="square" rtlCol="0">
+            <a:spAutoFit/>
+          </a:bodyPr>
+          <a:lstStyle/>
+          <a:p>
+            <a:pPr marL="285750" indent="-285750">
+              <a:buFont typeface="Arial" panose="020B0604020202020204" pitchFamily="34" charset="0"/>
+              <a:buChar char="•"/>
+            </a:pPr>
+            <a:r>
+              <a:rPr lang="en-US" sz="1400" b="1">
+                <a:solidFill>
+                  <a:srgbClr val="FF0000"/>
+                </a:solidFill>
+              </a:rPr>
+              <a:t>LP</a:t>
+            </a:r>
+            <a:r>
+              <a:rPr lang="en-US" sz="1400"/>
+              <a:t> – Liquidity Providers; </a:t>
+            </a:r>
+            <a:r>
+              <a:rPr lang="en-US" sz="1400" b="1">
+                <a:solidFill>
+                  <a:srgbClr val="FF0000"/>
+                </a:solidFill>
+              </a:rPr>
+              <a:t>AMM</a:t>
+            </a:r>
+            <a:r>
+              <a:rPr lang="en-US" sz="1400"/>
+              <a:t> (Automatic Market maker); </a:t>
+            </a:r>
+            <a:r>
+              <a:rPr lang="en-US" sz="1400" b="1">
+                <a:solidFill>
+                  <a:srgbClr val="FF0000"/>
+                </a:solidFill>
+              </a:rPr>
+              <a:t>TVL</a:t>
+            </a:r>
+            <a:r>
+              <a:rPr lang="en-US" sz="1400"/>
+              <a:t> – Total Value Locked</a:t>
+            </a:r>
+          </a:p>
+          <a:p>
+            <a:pPr marL="285750" indent="-285750">
+              <a:buFont typeface="Arial" panose="020B0604020202020204" pitchFamily="34" charset="0"/>
+              <a:buChar char="•"/>
+            </a:pPr>
+            <a:r>
+              <a:rPr lang="en-US" sz="1400" b="1">
+                <a:solidFill>
+                  <a:srgbClr val="FF0000"/>
+                </a:solidFill>
+              </a:rPr>
+              <a:t>IOTA</a:t>
+            </a:r>
+            <a:r>
+              <a:rPr lang="en-US" sz="1400"/>
+              <a:t> - open-source distributed ledger and cryptocurrency designed for the Internet of things (IoT)</a:t>
+            </a:r>
+          </a:p>
+          <a:p>
+            <a:pPr marL="285750" indent="-285750">
+              <a:buFont typeface="Arial" panose="020B0604020202020204" pitchFamily="34" charset="0"/>
+              <a:buChar char="•"/>
+            </a:pPr>
+            <a:r>
+              <a:rPr lang="en-US" sz="1400" b="1">
+                <a:solidFill>
+                  <a:srgbClr val="FF0000"/>
+                </a:solidFill>
+              </a:rPr>
+              <a:t>MoonPay</a:t>
+            </a:r>
+            <a:r>
+              <a:rPr lang="en-US" sz="1400"/>
+              <a:t> - https://www.moonpay.com - fast and simple way to buy and sell crypto</a:t>
+            </a:r>
+            <a:endParaRPr lang="en-US" sz="1400" b="1">
+              <a:solidFill>
+                <a:srgbClr val="FF0000"/>
+              </a:solidFill>
+            </a:endParaRPr>
+          </a:p>
+          <a:p>
+            <a:pPr marL="285750" indent="-285750">
+              <a:buFont typeface="Arial" panose="020B0604020202020204" pitchFamily="34" charset="0"/>
+              <a:buChar char="•"/>
+            </a:pPr>
+            <a:r>
+              <a:rPr lang="en-US" sz="1400" b="1">
+                <a:solidFill>
+                  <a:srgbClr val="FF0000"/>
+                </a:solidFill>
+              </a:rPr>
+              <a:t>Yeti finance</a:t>
+            </a:r>
+            <a:r>
+              <a:rPr lang="en-US" sz="1400"/>
+              <a:t> - https://yetifinance.co - Borrow against your entire Avalanche portfolio interest-free</a:t>
+            </a:r>
+          </a:p>
+          <a:p>
+            <a:pPr marL="285750" indent="-285750">
+              <a:buFont typeface="Arial" panose="020B0604020202020204" pitchFamily="34" charset="0"/>
+              <a:buChar char="•"/>
+            </a:pPr>
+            <a:r>
+              <a:rPr lang="en-US" sz="1400" b="1">
+                <a:solidFill>
+                  <a:srgbClr val="FF0000"/>
+                </a:solidFill>
+              </a:rPr>
+              <a:t>stargate</a:t>
+            </a:r>
+            <a:r>
+              <a:rPr lang="en-US" sz="1400"/>
+              <a:t> - https://stargate.finance/ - A fully composable native asset bridge with unified liquidity and instant guaranteed finality built on top of LayerZero</a:t>
+            </a:r>
+          </a:p>
+          <a:p>
+            <a:pPr marL="285750" indent="-285750">
+              <a:buFont typeface="Arial" panose="020B0604020202020204" pitchFamily="34" charset="0"/>
+              <a:buChar char="•"/>
+            </a:pPr>
+            <a:r>
+              <a:rPr lang="en-US" sz="1400" b="1">
+                <a:solidFill>
+                  <a:srgbClr val="FF0000"/>
+                </a:solidFill>
+              </a:rPr>
+              <a:t>Convex Finance</a:t>
+            </a:r>
+            <a:r>
+              <a:rPr lang="en-US" sz="1400"/>
+              <a:t> - https://www.convexfinance.com – deposit liquidity, earn boosted CRV and rewards</a:t>
+            </a:r>
+          </a:p>
+          <a:p>
+            <a:pPr marL="285750" indent="-285750">
+              <a:buFont typeface="Arial" panose="020B0604020202020204" pitchFamily="34" charset="0"/>
+              <a:buChar char="•"/>
+            </a:pPr>
+            <a:r>
+              <a:rPr lang="en-US" sz="1400" b="1">
+                <a:solidFill>
+                  <a:srgbClr val="FF0000"/>
+                </a:solidFill>
+              </a:rPr>
+              <a:t>Curve Finance (CRV token)</a:t>
+            </a:r>
+            <a:r>
+              <a:rPr lang="en-US" sz="1400"/>
+              <a:t> - https://resources.curve.fi – crypto swapping platform</a:t>
+            </a:r>
+          </a:p>
+          <a:p>
+            <a:pPr marL="285750" indent="-285750">
+              <a:buFont typeface="Arial" panose="020B0604020202020204" pitchFamily="34" charset="0"/>
+              <a:buChar char="•"/>
+            </a:pPr>
+            <a:r>
+              <a:rPr lang="en-US" sz="1400" b="1">
+                <a:solidFill>
+                  <a:srgbClr val="FF0000"/>
+                </a:solidFill>
+              </a:rPr>
+              <a:t>Uniswap</a:t>
+            </a:r>
+            <a:r>
+              <a:rPr lang="en-US" sz="1400"/>
+              <a:t> - - https://uniswap.org - cryptocurrency exchange which uses a decentralized network protocol</a:t>
+            </a:r>
+          </a:p>
+          <a:p>
+            <a:pPr marL="285750" indent="-285750">
+              <a:buFont typeface="Arial" panose="020B0604020202020204" pitchFamily="34" charset="0"/>
+              <a:buChar char="•"/>
+            </a:pPr>
+            <a:r>
+              <a:rPr lang="en-US" sz="1400" b="1">
+                <a:solidFill>
+                  <a:srgbClr val="FF0000"/>
+                </a:solidFill>
+              </a:rPr>
+              <a:t>Balancer</a:t>
+            </a:r>
+            <a:r>
+              <a:rPr lang="en-US" sz="1400"/>
+              <a:t> - https://balancer.fi - Automated portfolio manager and trading platform</a:t>
+            </a:r>
+            <a:endParaRPr lang="en-US" sz="1400" b="1">
+              <a:solidFill>
+                <a:srgbClr val="FF0000"/>
+              </a:solidFill>
+            </a:endParaRPr>
+          </a:p>
+          <a:p>
+            <a:pPr marL="285750" indent="-285750">
+              <a:buFont typeface="Arial" panose="020B0604020202020204" pitchFamily="34" charset="0"/>
+              <a:buChar char="•"/>
+            </a:pPr>
+            <a:r>
+              <a:rPr lang="en-US" sz="1400" b="1">
+                <a:solidFill>
+                  <a:srgbClr val="FF0000"/>
+                </a:solidFill>
+              </a:rPr>
+              <a:t>Fantom (wFTM)</a:t>
+            </a:r>
+            <a:r>
+              <a:rPr lang="en-US" sz="1400"/>
+              <a:t> - https://fantom.foundation - fast, high-throughput open-source smart contract platform for digital assets and dApps</a:t>
+            </a:r>
+          </a:p>
+          <a:p>
+            <a:pPr marL="285750" indent="-285750">
+              <a:buFont typeface="Arial" panose="020B0604020202020204" pitchFamily="34" charset="0"/>
+              <a:buChar char="•"/>
+            </a:pPr>
+            <a:r>
+              <a:rPr lang="en-US" sz="1400" b="1">
+                <a:solidFill>
+                  <a:srgbClr val="FF0000"/>
+                </a:solidFill>
+              </a:rPr>
+              <a:t>Vector</a:t>
+            </a:r>
+            <a:r>
+              <a:rPr lang="en-US" sz="1400"/>
+              <a:t> - https://vectorfinance.io/ - Deposit on Vector, the best yield booster on Avalanche</a:t>
+            </a:r>
+          </a:p>
+          <a:p>
+            <a:pPr marL="285750" indent="-285750">
+              <a:buFont typeface="Arial" panose="020B0604020202020204" pitchFamily="34" charset="0"/>
+              <a:buChar char="•"/>
+            </a:pPr>
+            <a:r>
+              <a:rPr lang="en-US" sz="1400" b="1">
+                <a:solidFill>
+                  <a:srgbClr val="FF0000"/>
+                </a:solidFill>
+              </a:rPr>
+              <a:t>Platypus finance</a:t>
+            </a:r>
+            <a:r>
+              <a:rPr lang="en-US" sz="1400"/>
+              <a:t> - https://platypus.finance – decentralized exchange, AMM for stableswap. Lower Slippage. Simpler UX.</a:t>
+            </a:r>
+          </a:p>
+          <a:p>
+            <a:pPr marL="285750" indent="-285750">
+              <a:buFont typeface="Arial" panose="020B0604020202020204" pitchFamily="34" charset="0"/>
+              <a:buChar char="•"/>
+            </a:pPr>
+            <a:r>
+              <a:rPr lang="en-US" sz="1400" b="1">
+                <a:solidFill>
+                  <a:srgbClr val="FF0000"/>
+                </a:solidFill>
+              </a:rPr>
+              <a:t>ACryptoS</a:t>
+            </a:r>
+            <a:r>
+              <a:rPr lang="en-US" sz="1400"/>
+              <a:t> - https://docs.acryptos.com - a yield farming optimizer on the Binance Smart Chain (BSC)</a:t>
+            </a:r>
+          </a:p>
+          <a:p>
+            <a:pPr marL="285750" indent="-285750">
+              <a:buFont typeface="Arial" panose="020B0604020202020204" pitchFamily="34" charset="0"/>
+              <a:buChar char="•"/>
+            </a:pPr>
+            <a:r>
+              <a:rPr lang="en-US" sz="1400" b="1">
+                <a:solidFill>
+                  <a:srgbClr val="FF0000"/>
+                </a:solidFill>
+              </a:rPr>
+              <a:t>Defi Llama</a:t>
+            </a:r>
+            <a:r>
+              <a:rPr lang="en-US" sz="1400"/>
+              <a:t> - https://defillama.com - a multi-chain TVL stats dashboard, where data connectors are contributed by a community</a:t>
+            </a:r>
+          </a:p>
+          <a:p>
+            <a:pPr marL="285750" indent="-285750">
+              <a:buFont typeface="Arial" panose="020B0604020202020204" pitchFamily="34" charset="0"/>
+              <a:buChar char="•"/>
+            </a:pPr>
+            <a:r>
+              <a:rPr lang="en-US" sz="1400" b="1">
+                <a:solidFill>
+                  <a:srgbClr val="FF0000"/>
+                </a:solidFill>
+              </a:rPr>
+              <a:t>Arrakis Finance</a:t>
+            </a:r>
+            <a:r>
+              <a:rPr lang="en-US" sz="1400"/>
+              <a:t> - https://www.arrakis.finance/ - web3 liquidity layer (automated community-owned protocol)</a:t>
+            </a:r>
+          </a:p>
+        </p:txBody>
+      </p:sp>
+      <p:sp>
+        <p:nvSpPr>
+          <p:cNvPr id="5" name="TextBox 4">
+            <a:extLst>
+              <a:ext uri="{FF2B5EF4-FFF2-40B4-BE49-F238E27FC236}">
+                <a16:creationId xmlns:a16="http://schemas.microsoft.com/office/drawing/2014/main" id="{6B9469CD-F847-CC08-33A0-C589F68CED74}"/>
+              </a:ext>
+            </a:extLst>
+          </p:cNvPr>
+          <p:cNvSpPr txBox="1"/>
+          <p:nvPr/>
+        </p:nvSpPr>
+        <p:spPr>
+          <a:xfrm>
+            <a:off x="0" y="0"/>
+            <a:ext cx="5393932" cy="523220"/>
+          </a:xfrm>
+          <a:prstGeom prst="rect">
+            <a:avLst/>
+          </a:prstGeom>
+          <a:noFill/>
+        </p:spPr>
+        <p:txBody>
+          <a:bodyPr wrap="square" rtlCol="0">
+            <a:spAutoFit/>
+          </a:bodyPr>
+          <a:lstStyle/>
+          <a:p>
+            <a:r>
+              <a:rPr lang="en-US" sz="2800" b="1"/>
+              <a:t>Decentralized finance (DeFi)</a:t>
+            </a:r>
+          </a:p>
+        </p:txBody>
+      </p:sp>
+      <p:sp>
+        <p:nvSpPr>
+          <p:cNvPr id="6" name="TextBox 5">
+            <a:extLst>
+              <a:ext uri="{FF2B5EF4-FFF2-40B4-BE49-F238E27FC236}">
+                <a16:creationId xmlns:a16="http://schemas.microsoft.com/office/drawing/2014/main" id="{2A631DBA-9ADF-E8AB-AE40-57957357B6DD}"/>
+              </a:ext>
+            </a:extLst>
+          </p:cNvPr>
+          <p:cNvSpPr txBox="1"/>
+          <p:nvPr/>
+        </p:nvSpPr>
+        <p:spPr>
+          <a:xfrm>
+            <a:off x="27338" y="603365"/>
+            <a:ext cx="7828908" cy="2031325"/>
+          </a:xfrm>
+          <a:prstGeom prst="rect">
+            <a:avLst/>
+          </a:prstGeom>
+          <a:noFill/>
+        </p:spPr>
+        <p:txBody>
+          <a:bodyPr wrap="square" rtlCol="0">
+            <a:spAutoFit/>
+          </a:bodyPr>
+          <a:lstStyle/>
+          <a:p>
+            <a:pPr marL="285750" indent="-285750">
+              <a:buFont typeface="Arial" panose="020B0604020202020204" pitchFamily="34" charset="0"/>
+              <a:buChar char="•"/>
+            </a:pPr>
+            <a:r>
+              <a:rPr lang="en-US" sz="1400" b="1">
+                <a:solidFill>
+                  <a:srgbClr val="FF0000"/>
+                </a:solidFill>
+              </a:rPr>
+              <a:t>DeFi</a:t>
+            </a:r>
+            <a:r>
+              <a:rPr lang="en-US" sz="1400"/>
+              <a:t> - allows you to </a:t>
+            </a:r>
+            <a:r>
+              <a:rPr lang="en-US" sz="1400" b="1">
+                <a:solidFill>
+                  <a:srgbClr val="00B050"/>
+                </a:solidFill>
+              </a:rPr>
+              <a:t>stake, lend, borrow and trade</a:t>
+            </a:r>
+            <a:r>
+              <a:rPr lang="en-US" sz="1400"/>
+              <a:t> cryptocurrencies (similar how banks do that)</a:t>
+            </a:r>
+          </a:p>
+          <a:p>
+            <a:pPr marL="285750" indent="-285750">
+              <a:buFont typeface="Arial" panose="020B0604020202020204" pitchFamily="34" charset="0"/>
+              <a:buChar char="•"/>
+            </a:pPr>
+            <a:r>
+              <a:rPr lang="en-US" sz="1400"/>
+              <a:t>You can </a:t>
+            </a:r>
+            <a:r>
+              <a:rPr lang="en-US" sz="1400" b="1">
+                <a:solidFill>
+                  <a:srgbClr val="00B050"/>
+                </a:solidFill>
+              </a:rPr>
+              <a:t>deposit</a:t>
+            </a:r>
+            <a:r>
+              <a:rPr lang="en-US" sz="1400"/>
+              <a:t> your cryptocurrency onto a </a:t>
+            </a:r>
+            <a:r>
+              <a:rPr lang="en-US" sz="1400" b="1">
+                <a:solidFill>
+                  <a:srgbClr val="00B050"/>
+                </a:solidFill>
+              </a:rPr>
+              <a:t>platform or protocol</a:t>
+            </a:r>
+            <a:r>
+              <a:rPr lang="en-US" sz="1400"/>
+              <a:t> that will pay you an APY (Annual Percentage Yield) for it. Most common deposits - Ethereum (ERC-20) token, or Ether (ETH), or a stablecoin like DAI or USDT</a:t>
+            </a:r>
+          </a:p>
+          <a:p>
+            <a:pPr marL="285750" indent="-285750">
+              <a:buFont typeface="Arial" panose="020B0604020202020204" pitchFamily="34" charset="0"/>
+              <a:buChar char="•"/>
+            </a:pPr>
+            <a:r>
+              <a:rPr lang="en-US" sz="1400"/>
+              <a:t>You can do</a:t>
+            </a:r>
+            <a:r>
+              <a:rPr lang="en-US" sz="1400" b="1">
+                <a:solidFill>
+                  <a:srgbClr val="00B050"/>
+                </a:solidFill>
+              </a:rPr>
+              <a:t> liquidity mining (yield farming)</a:t>
+            </a:r>
+            <a:r>
+              <a:rPr lang="en-US" sz="1400"/>
+              <a:t>. You can </a:t>
+            </a:r>
+            <a:r>
+              <a:rPr lang="en-US" sz="1400" b="1">
+                <a:solidFill>
+                  <a:srgbClr val="00B050"/>
+                </a:solidFill>
+              </a:rPr>
+              <a:t>stake or trade rewards</a:t>
+            </a:r>
+            <a:r>
+              <a:rPr lang="en-US" sz="1400"/>
+              <a:t> that you get for depositing your crypto. Typically you are paid in native tokens of protocols or platforms you use. You can re-invest them, or trade on exchanges (DEXs like Uniswap)</a:t>
+            </a:r>
+          </a:p>
+          <a:p>
+            <a:pPr marL="285750" indent="-285750">
+              <a:buFont typeface="Arial" panose="020B0604020202020204" pitchFamily="34" charset="0"/>
+              <a:buChar char="•"/>
+            </a:pPr>
+            <a:r>
+              <a:rPr lang="en-US" sz="1400"/>
+              <a:t>You can boost your returns with </a:t>
+            </a:r>
+            <a:r>
+              <a:rPr lang="en-US" sz="1400" b="1">
+                <a:solidFill>
+                  <a:srgbClr val="00B050"/>
+                </a:solidFill>
+              </a:rPr>
+              <a:t>borrowing and lending</a:t>
+            </a:r>
+            <a:r>
+              <a:rPr lang="en-US" sz="1400"/>
+              <a:t> (legal regulations apply !)</a:t>
+            </a:r>
+          </a:p>
+          <a:p>
+            <a:pPr marL="285750" indent="-285750">
+              <a:buFont typeface="Arial" panose="020B0604020202020204" pitchFamily="34" charset="0"/>
+              <a:buChar char="•"/>
+            </a:pPr>
+            <a:r>
+              <a:rPr lang="en-US" sz="1400"/>
+              <a:t>You can use</a:t>
+            </a:r>
+            <a:r>
+              <a:rPr lang="en-US" sz="1400" b="1">
+                <a:solidFill>
+                  <a:srgbClr val="00B050"/>
+                </a:solidFill>
+              </a:rPr>
+              <a:t> leverage/derivatives</a:t>
+            </a:r>
+            <a:r>
+              <a:rPr lang="en-US" sz="1400"/>
+              <a:t>, but this </a:t>
+            </a:r>
+            <a:r>
+              <a:rPr lang="en-US" sz="1400" b="1">
+                <a:solidFill>
+                  <a:srgbClr val="00B050"/>
+                </a:solidFill>
+              </a:rPr>
+              <a:t>multi-layered liquidity mining</a:t>
+            </a:r>
+            <a:r>
+              <a:rPr lang="en-US" sz="1400"/>
+              <a:t> increases the risk</a:t>
+            </a:r>
+          </a:p>
+        </p:txBody>
+      </p:sp>
+      <p:sp>
+        <p:nvSpPr>
+          <p:cNvPr id="4" name="TextBox 3">
+            <a:extLst>
+              <a:ext uri="{FF2B5EF4-FFF2-40B4-BE49-F238E27FC236}">
+                <a16:creationId xmlns:a16="http://schemas.microsoft.com/office/drawing/2014/main" id="{DDD382D3-306C-5323-6F4D-5BFD67207853}"/>
+              </a:ext>
+            </a:extLst>
+          </p:cNvPr>
+          <p:cNvSpPr txBox="1"/>
+          <p:nvPr/>
+        </p:nvSpPr>
+        <p:spPr>
+          <a:xfrm>
+            <a:off x="8501098" y="111280"/>
+            <a:ext cx="3599396" cy="3108543"/>
+          </a:xfrm>
+          <a:prstGeom prst="rect">
+            <a:avLst/>
+          </a:prstGeom>
+          <a:noFill/>
+          <a:ln>
+            <a:solidFill>
+              <a:schemeClr val="accent1"/>
+            </a:solidFill>
+          </a:ln>
+        </p:spPr>
+        <p:txBody>
+          <a:bodyPr wrap="square" rtlCol="0">
+            <a:spAutoFit/>
+          </a:bodyPr>
+          <a:lstStyle/>
+          <a:p>
+            <a:r>
+              <a:rPr lang="en-US" sz="1400"/>
+              <a:t>Traditional Exchanges - </a:t>
+            </a:r>
+            <a:r>
+              <a:rPr lang="en-US" sz="1400">
+                <a:solidFill>
+                  <a:srgbClr val="FF0000"/>
+                </a:solidFill>
+              </a:rPr>
+              <a:t>Order-Book model</a:t>
+            </a:r>
+            <a:r>
+              <a:rPr lang="en-US" sz="1400"/>
+              <a:t>:</a:t>
+            </a:r>
+          </a:p>
+          <a:p>
+            <a:pPr marL="285750" indent="-285750">
+              <a:buFont typeface="Arial" panose="020B0604020202020204" pitchFamily="34" charset="0"/>
+              <a:buChar char="•"/>
+            </a:pPr>
+            <a:r>
+              <a:rPr lang="en-US" sz="1400"/>
+              <a:t>Buyers &amp; Sellers</a:t>
+            </a:r>
+          </a:p>
+          <a:p>
+            <a:pPr marL="285750" indent="-285750">
+              <a:buFont typeface="Arial" panose="020B0604020202020204" pitchFamily="34" charset="0"/>
+              <a:buChar char="•"/>
+            </a:pPr>
+            <a:r>
+              <a:rPr lang="en-US" sz="1400"/>
+              <a:t>Market Makers (Dealers) provide liquidity</a:t>
+            </a:r>
+          </a:p>
+          <a:p>
+            <a:endParaRPr lang="en-US" sz="1400"/>
+          </a:p>
+          <a:p>
+            <a:r>
+              <a:rPr lang="en-US" sz="1400"/>
+              <a:t>DEFI – </a:t>
+            </a:r>
+            <a:r>
+              <a:rPr lang="en-US" sz="1400" b="1">
+                <a:solidFill>
+                  <a:srgbClr val="FF0000"/>
+                </a:solidFill>
+              </a:rPr>
+              <a:t>Liquidity Pools model</a:t>
+            </a:r>
+            <a:r>
+              <a:rPr lang="en-US" sz="1400"/>
+              <a:t> to facilitate swaps between coins</a:t>
+            </a:r>
+          </a:p>
+          <a:p>
+            <a:pPr marL="285750" indent="-285750">
+              <a:buFont typeface="Arial" panose="020B0604020202020204" pitchFamily="34" charset="0"/>
+              <a:buChar char="•"/>
+            </a:pPr>
+            <a:r>
+              <a:rPr lang="en-US" sz="1400" b="1">
+                <a:solidFill>
+                  <a:srgbClr val="FF0000"/>
+                </a:solidFill>
+              </a:rPr>
+              <a:t>LPs (Liquidity Providers)</a:t>
+            </a:r>
+            <a:r>
+              <a:rPr lang="en-US" sz="1400"/>
+              <a:t> are compensated</a:t>
+            </a:r>
+          </a:p>
+          <a:p>
+            <a:pPr marL="285750" indent="-285750">
+              <a:buFont typeface="Arial" panose="020B0604020202020204" pitchFamily="34" charset="0"/>
+              <a:buChar char="•"/>
+            </a:pPr>
+            <a:r>
+              <a:rPr lang="en-US" sz="1400" b="1">
+                <a:solidFill>
+                  <a:srgbClr val="FF0000"/>
+                </a:solidFill>
+              </a:rPr>
+              <a:t>Liquidity mining</a:t>
+            </a:r>
+            <a:r>
+              <a:rPr lang="en-US" sz="1400"/>
+              <a:t> - LPs are compensated more for providing liquidity where it is needed more</a:t>
+            </a:r>
+          </a:p>
+          <a:p>
+            <a:pPr marL="285750" indent="-285750">
+              <a:buFont typeface="Arial" panose="020B0604020202020204" pitchFamily="34" charset="0"/>
+              <a:buChar char="•"/>
+            </a:pPr>
+            <a:r>
+              <a:rPr lang="en-US" sz="1400"/>
+              <a:t>Prices are adjusted automatically (</a:t>
+            </a:r>
+            <a:r>
+              <a:rPr lang="en-US" sz="1400" b="1">
+                <a:solidFill>
+                  <a:srgbClr val="FF0000"/>
+                </a:solidFill>
+              </a:rPr>
+              <a:t>AMM = Automatic Market Maker</a:t>
+            </a:r>
+            <a:r>
+              <a:rPr lang="en-US" sz="1400"/>
+              <a:t> algorithms)</a:t>
+            </a:r>
+          </a:p>
+          <a:p>
+            <a:pPr marL="285750" indent="-285750">
+              <a:buFont typeface="Arial" panose="020B0604020202020204" pitchFamily="34" charset="0"/>
+              <a:buChar char="•"/>
+            </a:pPr>
+            <a:r>
+              <a:rPr lang="en-US" sz="1400"/>
+              <a:t>The larger the pool, the lesser </a:t>
+            </a:r>
+            <a:r>
+              <a:rPr lang="en-US" sz="1400" b="1">
+                <a:solidFill>
+                  <a:srgbClr val="FF0000"/>
+                </a:solidFill>
+              </a:rPr>
+              <a:t>slippage</a:t>
+            </a:r>
+            <a:r>
+              <a:rPr lang="en-US" sz="1400"/>
+              <a:t> (effect of a single trade on prices)</a:t>
+            </a:r>
+          </a:p>
+        </p:txBody>
+      </p:sp>
+    </p:spTree>
+    <p:extLst>
+      <p:ext uri="{BB962C8B-B14F-4D97-AF65-F5344CB8AC3E}">
+        <p14:creationId xmlns:p14="http://schemas.microsoft.com/office/powerpoint/2010/main" val="614671572"/>
       </p:ext>
     </p:extLst>
   </p:cSld>

--- a/crypto_09_defi.pptx
+++ b/crypto_09_defi.pptx
@@ -5,12 +5,13 @@
     <p:sldMasterId id="2147483834" r:id="rId1"/>
   </p:sldMasterIdLst>
   <p:notesMasterIdLst>
-    <p:notesMasterId r:id="rId5"/>
+    <p:notesMasterId r:id="rId6"/>
   </p:notesMasterIdLst>
   <p:sldIdLst>
     <p:sldId id="328" r:id="rId2"/>
-    <p:sldId id="327" r:id="rId3"/>
-    <p:sldId id="326" r:id="rId4"/>
+    <p:sldId id="329" r:id="rId3"/>
+    <p:sldId id="327" r:id="rId4"/>
+    <p:sldId id="326" r:id="rId5"/>
   </p:sldIdLst>
   <p:sldSz cx="12192000" cy="6858000"/>
   <p:notesSz cx="6858000" cy="9144000"/>
@@ -687,7 +688,7 @@
           <a:p>
             <a:fld id="{EB1FAE4C-5332-014D-8E1B-BB8DA73EF81D}" type="datetimeFigureOut">
               <a:rPr lang="en-US"/>
-              <a:t>5/5/22</a:t>
+              <a:t>5/6/22</a:t>
             </a:fld>
             <a:endParaRPr lang="en-US"/>
           </a:p>
@@ -857,7 +858,7 @@
           <a:p>
             <a:fld id="{EB1FAE4C-5332-014D-8E1B-BB8DA73EF81D}" type="datetimeFigureOut">
               <a:rPr lang="en-US"/>
-              <a:t>5/5/22</a:t>
+              <a:t>5/6/22</a:t>
             </a:fld>
             <a:endParaRPr lang="en-US"/>
           </a:p>
@@ -1037,7 +1038,7 @@
           <a:p>
             <a:fld id="{EB1FAE4C-5332-014D-8E1B-BB8DA73EF81D}" type="datetimeFigureOut">
               <a:rPr lang="en-US"/>
-              <a:t>5/5/22</a:t>
+              <a:t>5/6/22</a:t>
             </a:fld>
             <a:endParaRPr lang="en-US"/>
           </a:p>
@@ -1207,7 +1208,7 @@
           <a:p>
             <a:fld id="{EB1FAE4C-5332-014D-8E1B-BB8DA73EF81D}" type="datetimeFigureOut">
               <a:rPr lang="en-US"/>
-              <a:t>5/5/22</a:t>
+              <a:t>5/6/22</a:t>
             </a:fld>
             <a:endParaRPr lang="en-US"/>
           </a:p>
@@ -1454,7 +1455,7 @@
           <a:p>
             <a:fld id="{EB1FAE4C-5332-014D-8E1B-BB8DA73EF81D}" type="datetimeFigureOut">
               <a:rPr lang="en-US"/>
-              <a:t>5/5/22</a:t>
+              <a:t>5/6/22</a:t>
             </a:fld>
             <a:endParaRPr lang="en-US"/>
           </a:p>
@@ -1685,7 +1686,7 @@
           <a:p>
             <a:fld id="{EB1FAE4C-5332-014D-8E1B-BB8DA73EF81D}" type="datetimeFigureOut">
               <a:rPr lang="en-US"/>
-              <a:t>5/5/22</a:t>
+              <a:t>5/6/22</a:t>
             </a:fld>
             <a:endParaRPr lang="en-US"/>
           </a:p>
@@ -2051,7 +2052,7 @@
           <a:p>
             <a:fld id="{EB1FAE4C-5332-014D-8E1B-BB8DA73EF81D}" type="datetimeFigureOut">
               <a:rPr lang="en-US"/>
-              <a:t>5/5/22</a:t>
+              <a:t>5/6/22</a:t>
             </a:fld>
             <a:endParaRPr lang="en-US"/>
           </a:p>
@@ -2170,7 +2171,7 @@
           <a:p>
             <a:fld id="{EB1FAE4C-5332-014D-8E1B-BB8DA73EF81D}" type="datetimeFigureOut">
               <a:rPr lang="en-US"/>
-              <a:t>5/5/22</a:t>
+              <a:t>5/6/22</a:t>
             </a:fld>
             <a:endParaRPr lang="en-US"/>
           </a:p>
@@ -2267,7 +2268,7 @@
           <a:p>
             <a:fld id="{EB1FAE4C-5332-014D-8E1B-BB8DA73EF81D}" type="datetimeFigureOut">
               <a:rPr lang="en-US"/>
-              <a:t>5/5/22</a:t>
+              <a:t>5/6/22</a:t>
             </a:fld>
             <a:endParaRPr lang="en-US"/>
           </a:p>
@@ -2543,7 +2544,7 @@
           <a:p>
             <a:fld id="{EB1FAE4C-5332-014D-8E1B-BB8DA73EF81D}" type="datetimeFigureOut">
               <a:rPr lang="en-US"/>
-              <a:t>5/5/22</a:t>
+              <a:t>5/6/22</a:t>
             </a:fld>
             <a:endParaRPr lang="en-US"/>
           </a:p>
@@ -2800,7 +2801,7 @@
           <a:p>
             <a:fld id="{EB1FAE4C-5332-014D-8E1B-BB8DA73EF81D}" type="datetimeFigureOut">
               <a:rPr lang="en-US"/>
-              <a:t>5/5/22</a:t>
+              <a:t>5/6/22</a:t>
             </a:fld>
             <a:endParaRPr lang="en-US"/>
           </a:p>
@@ -3013,7 +3014,7 @@
           <a:p>
             <a:fld id="{EB1FAE4C-5332-014D-8E1B-BB8DA73EF81D}" type="datetimeFigureOut">
               <a:rPr lang="en-US"/>
-              <a:t>5/5/22</a:t>
+              <a:t>5/6/22</a:t>
             </a:fld>
             <a:endParaRPr lang="en-US"/>
           </a:p>
@@ -3427,10 +3428,10 @@
       </p:grpSpPr>
       <p:sp>
         <p:nvSpPr>
-          <p:cNvPr id="2" name="TextBox 1">
+          <p:cNvPr id="3" name="TextBox 2">
             <a:extLst>
               <a:ext uri="{FF2B5EF4-FFF2-40B4-BE49-F238E27FC236}">
-                <a16:creationId xmlns:a16="http://schemas.microsoft.com/office/drawing/2014/main" id="{CF10B7CF-96C3-8699-CB74-D7D680F1FCD2}"/>
+                <a16:creationId xmlns:a16="http://schemas.microsoft.com/office/drawing/2014/main" id="{453354CC-1C48-A5A6-1CAD-2EEC1862AA91}"/>
               </a:ext>
             </a:extLst>
           </p:cNvPr>
@@ -3439,8 +3440,8 @@
         </p:nvSpPr>
         <p:spPr>
           <a:xfrm>
-            <a:off x="2943225" y="1485900"/>
-            <a:ext cx="2314575" cy="646331"/>
+            <a:off x="1835247" y="97689"/>
+            <a:ext cx="7359454" cy="707886"/>
           </a:xfrm>
           <a:prstGeom prst="rect">
             <a:avLst/>
@@ -3453,19 +3454,546 @@
           </a:bodyPr>
           <a:lstStyle/>
           <a:p>
+            <a:pPr algn="ctr"/>
+            <a:r>
+              <a:rPr lang="en-US" sz="4000" b="1"/>
+              <a:t>Decentralized finance (DeFi)</a:t>
+            </a:r>
+          </a:p>
+        </p:txBody>
+      </p:sp>
+      <p:sp>
+        <p:nvSpPr>
+          <p:cNvPr id="5" name="TextBox 4">
+            <a:extLst>
+              <a:ext uri="{FF2B5EF4-FFF2-40B4-BE49-F238E27FC236}">
+                <a16:creationId xmlns:a16="http://schemas.microsoft.com/office/drawing/2014/main" id="{1F1A647A-65A2-1156-763B-18AB36AAAAA0}"/>
+              </a:ext>
+            </a:extLst>
+          </p:cNvPr>
+          <p:cNvSpPr txBox="1"/>
+          <p:nvPr/>
+        </p:nvSpPr>
+        <p:spPr>
+          <a:xfrm>
+            <a:off x="1674018" y="1031048"/>
+            <a:ext cx="8843963" cy="3139321"/>
+          </a:xfrm>
+          <a:prstGeom prst="rect">
+            <a:avLst/>
+          </a:prstGeom>
+          <a:noFill/>
+        </p:spPr>
+        <p:txBody>
+          <a:bodyPr wrap="square" rtlCol="0">
+            <a:spAutoFit/>
+          </a:bodyPr>
+          <a:lstStyle/>
+          <a:p>
+            <a:pPr marL="285750" indent="-285750">
+              <a:buFont typeface="Arial" panose="020B0604020202020204" pitchFamily="34" charset="0"/>
+              <a:buChar char="•"/>
+            </a:pPr>
+            <a:r>
+              <a:rPr lang="en-US" b="1">
+                <a:solidFill>
+                  <a:srgbClr val="FF0000"/>
+                </a:solidFill>
+              </a:rPr>
+              <a:t>DeFi</a:t>
+            </a:r>
             <a:r>
               <a:rPr lang="en-US"/>
-              <a:t>what is DeFi</a:t>
-            </a:r>
-          </a:p>
-          <a:p>
+              <a:t> is an emerging financial technology</a:t>
+            </a:r>
+          </a:p>
+          <a:p>
+            <a:pPr marL="285750" indent="-285750">
+              <a:buFont typeface="Arial" panose="020B0604020202020204" pitchFamily="34" charset="0"/>
+              <a:buChar char="•"/>
+            </a:pPr>
+            <a:r>
+              <a:rPr lang="en-US" b="1">
+                <a:solidFill>
+                  <a:srgbClr val="FF0000"/>
+                </a:solidFill>
+              </a:rPr>
+              <a:t>DeFi</a:t>
+            </a:r>
             <a:r>
               <a:rPr lang="en-US"/>
-              <a:t>History of DeFi</a:t>
-            </a:r>
-          </a:p>
-        </p:txBody>
-      </p:sp>
+              <a:t> is based on secure </a:t>
+            </a:r>
+            <a:r>
+              <a:rPr lang="en-US" b="1">
+                <a:solidFill>
+                  <a:srgbClr val="00B050"/>
+                </a:solidFill>
+              </a:rPr>
+              <a:t>distributed ledgers</a:t>
+            </a:r>
+            <a:r>
+              <a:rPr lang="en-US"/>
+              <a:t> similar to those used by cryptocurrencies</a:t>
+            </a:r>
+          </a:p>
+          <a:p>
+            <a:pPr marL="285750" indent="-285750">
+              <a:buFont typeface="Arial" panose="020B0604020202020204" pitchFamily="34" charset="0"/>
+              <a:buChar char="•"/>
+            </a:pPr>
+            <a:r>
+              <a:rPr lang="en-US" b="1">
+                <a:solidFill>
+                  <a:srgbClr val="FF0000"/>
+                </a:solidFill>
+              </a:rPr>
+              <a:t>DeFi</a:t>
+            </a:r>
+            <a:r>
+              <a:rPr lang="en-US"/>
+              <a:t> substitutes financial institutions (banks) by automatic smart contracts</a:t>
+            </a:r>
+          </a:p>
+          <a:p>
+            <a:pPr marL="285750" indent="-285750">
+              <a:buFont typeface="Arial" panose="020B0604020202020204" pitchFamily="34" charset="0"/>
+              <a:buChar char="•"/>
+            </a:pPr>
+            <a:r>
+              <a:rPr lang="en-US" b="1">
+                <a:solidFill>
+                  <a:srgbClr val="FF0000"/>
+                </a:solidFill>
+              </a:rPr>
+              <a:t>DeFi</a:t>
+            </a:r>
+            <a:r>
+              <a:rPr lang="en-US"/>
+              <a:t> allows you to to perform full range of financial operations and strategies:</a:t>
+            </a:r>
+            <a:br>
+              <a:rPr lang="en-US"/>
+            </a:br>
+            <a:r>
+              <a:rPr lang="en-US" b="1">
+                <a:solidFill>
+                  <a:srgbClr val="00B0F0"/>
+                </a:solidFill>
+              </a:rPr>
+              <a:t>.. keep (save), pay, transfer, convert, invest (stake), </a:t>
+            </a:r>
+            <a:br>
+              <a:rPr lang="en-US" b="1">
+                <a:solidFill>
+                  <a:srgbClr val="00B0F0"/>
+                </a:solidFill>
+              </a:rPr>
+            </a:br>
+            <a:r>
+              <a:rPr lang="en-US" b="1">
+                <a:solidFill>
+                  <a:srgbClr val="00B0F0"/>
+                </a:solidFill>
+              </a:rPr>
+              <a:t>.. fund, lend, borrow, trade, swap, use derivatives</a:t>
+            </a:r>
+            <a:br>
+              <a:rPr lang="en-US" b="1">
+                <a:solidFill>
+                  <a:srgbClr val="00B0F0"/>
+                </a:solidFill>
+              </a:rPr>
+            </a:br>
+            <a:r>
+              <a:rPr lang="en-US" b="1">
+                <a:solidFill>
+                  <a:srgbClr val="00B0F0"/>
+                </a:solidFill>
+              </a:rPr>
+              <a:t>.. use both convential and crypto-based financial instruments</a:t>
+            </a:r>
+            <a:br>
+              <a:rPr lang="en-US" b="1">
+                <a:solidFill>
+                  <a:srgbClr val="00B0F0"/>
+                </a:solidFill>
+              </a:rPr>
+            </a:br>
+            <a:r>
+              <a:rPr lang="en-US" b="1">
+                <a:solidFill>
+                  <a:srgbClr val="00B0F0"/>
+                </a:solidFill>
+              </a:rPr>
+              <a:t>.. manage volatility, manage interest rates</a:t>
+            </a:r>
+          </a:p>
+          <a:p>
+            <a:pPr marL="285750" indent="-285750">
+              <a:buFont typeface="Arial" panose="020B0604020202020204" pitchFamily="34" charset="0"/>
+              <a:buChar char="•"/>
+            </a:pPr>
+            <a:r>
+              <a:rPr lang="en-US" b="1">
+                <a:solidFill>
+                  <a:srgbClr val="FF0000"/>
+                </a:solidFill>
+              </a:rPr>
+              <a:t>DeFi</a:t>
+            </a:r>
+            <a:r>
+              <a:rPr lang="en-US"/>
+              <a:t> offers Immutability, interoperability, transparency, permissionless, self-custody</a:t>
+            </a:r>
+          </a:p>
+          <a:p>
+            <a:pPr marL="285750" indent="-285750">
+              <a:buFont typeface="Arial" panose="020B0604020202020204" pitchFamily="34" charset="0"/>
+              <a:buChar char="•"/>
+            </a:pPr>
+            <a:r>
+              <a:rPr lang="en-US" b="1">
+                <a:solidFill>
+                  <a:srgbClr val="FF0000"/>
+                </a:solidFill>
+              </a:rPr>
+              <a:t>DeFi</a:t>
+            </a:r>
+            <a:r>
+              <a:rPr lang="en-US"/>
+              <a:t> is mostly based on </a:t>
+            </a:r>
+            <a:r>
+              <a:rPr lang="en-US" b="1">
+                <a:solidFill>
+                  <a:srgbClr val="00B050"/>
+                </a:solidFill>
+              </a:rPr>
+              <a:t>open-source technologies</a:t>
+            </a:r>
+            <a:r>
+              <a:rPr lang="en-US"/>
+              <a:t>, thus it is well positioned to win in financial industry similar to how open-source has won in other IT driven industries</a:t>
+            </a:r>
+          </a:p>
+        </p:txBody>
+      </p:sp>
+      <p:sp>
+        <p:nvSpPr>
+          <p:cNvPr id="7" name="TextBox 6">
+            <a:extLst>
+              <a:ext uri="{FF2B5EF4-FFF2-40B4-BE49-F238E27FC236}">
+                <a16:creationId xmlns:a16="http://schemas.microsoft.com/office/drawing/2014/main" id="{8CCAE060-F0D3-A151-57DE-B0D2AF94EA0B}"/>
+              </a:ext>
+            </a:extLst>
+          </p:cNvPr>
+          <p:cNvSpPr txBox="1"/>
+          <p:nvPr/>
+        </p:nvSpPr>
+        <p:spPr>
+          <a:xfrm>
+            <a:off x="3436084" y="5286170"/>
+            <a:ext cx="885825" cy="369332"/>
+          </a:xfrm>
+          <a:prstGeom prst="rect">
+            <a:avLst/>
+          </a:prstGeom>
+          <a:solidFill>
+            <a:schemeClr val="accent4">
+              <a:lumMod val="20000"/>
+              <a:lumOff val="80000"/>
+            </a:schemeClr>
+          </a:solidFill>
+          <a:ln>
+            <a:solidFill>
+              <a:schemeClr val="accent1"/>
+            </a:solidFill>
+          </a:ln>
+        </p:spPr>
+        <p:txBody>
+          <a:bodyPr wrap="square" rtlCol="0">
+            <a:spAutoFit/>
+          </a:bodyPr>
+          <a:lstStyle/>
+          <a:p>
+            <a:r>
+              <a:rPr lang="en-US"/>
+              <a:t>Users</a:t>
+            </a:r>
+          </a:p>
+        </p:txBody>
+      </p:sp>
+      <p:sp>
+        <p:nvSpPr>
+          <p:cNvPr id="8" name="TextBox 7">
+            <a:extLst>
+              <a:ext uri="{FF2B5EF4-FFF2-40B4-BE49-F238E27FC236}">
+                <a16:creationId xmlns:a16="http://schemas.microsoft.com/office/drawing/2014/main" id="{0AA6032B-5B76-2C8D-810B-A47D8C33CC24}"/>
+              </a:ext>
+            </a:extLst>
+          </p:cNvPr>
+          <p:cNvSpPr txBox="1"/>
+          <p:nvPr/>
+        </p:nvSpPr>
+        <p:spPr>
+          <a:xfrm>
+            <a:off x="5365622" y="4653528"/>
+            <a:ext cx="885825" cy="369332"/>
+          </a:xfrm>
+          <a:prstGeom prst="rect">
+            <a:avLst/>
+          </a:prstGeom>
+          <a:solidFill>
+            <a:schemeClr val="accent4">
+              <a:lumMod val="20000"/>
+              <a:lumOff val="80000"/>
+            </a:schemeClr>
+          </a:solidFill>
+          <a:ln>
+            <a:solidFill>
+              <a:schemeClr val="accent1"/>
+            </a:solidFill>
+          </a:ln>
+        </p:spPr>
+        <p:txBody>
+          <a:bodyPr wrap="square" rtlCol="0">
+            <a:spAutoFit/>
+          </a:bodyPr>
+          <a:lstStyle/>
+          <a:p>
+            <a:r>
+              <a:rPr lang="en-US"/>
+              <a:t>Banks</a:t>
+            </a:r>
+          </a:p>
+        </p:txBody>
+      </p:sp>
+      <p:sp>
+        <p:nvSpPr>
+          <p:cNvPr id="9" name="TextBox 8">
+            <a:extLst>
+              <a:ext uri="{FF2B5EF4-FFF2-40B4-BE49-F238E27FC236}">
+                <a16:creationId xmlns:a16="http://schemas.microsoft.com/office/drawing/2014/main" id="{78DFD056-D8BE-11AB-A6E5-F31F3A934A17}"/>
+              </a:ext>
+            </a:extLst>
+          </p:cNvPr>
+          <p:cNvSpPr txBox="1"/>
+          <p:nvPr/>
+        </p:nvSpPr>
+        <p:spPr>
+          <a:xfrm>
+            <a:off x="5278536" y="5911454"/>
+            <a:ext cx="1710418" cy="369332"/>
+          </a:xfrm>
+          <a:prstGeom prst="rect">
+            <a:avLst/>
+          </a:prstGeom>
+          <a:solidFill>
+            <a:schemeClr val="accent4">
+              <a:lumMod val="20000"/>
+              <a:lumOff val="80000"/>
+            </a:schemeClr>
+          </a:solidFill>
+          <a:ln>
+            <a:solidFill>
+              <a:schemeClr val="accent1"/>
+            </a:solidFill>
+          </a:ln>
+        </p:spPr>
+        <p:txBody>
+          <a:bodyPr wrap="square" rtlCol="0">
+            <a:spAutoFit/>
+          </a:bodyPr>
+          <a:lstStyle/>
+          <a:p>
+            <a:r>
+              <a:rPr lang="en-US"/>
+              <a:t>DeFi platforms</a:t>
+            </a:r>
+          </a:p>
+        </p:txBody>
+      </p:sp>
+      <p:sp>
+        <p:nvSpPr>
+          <p:cNvPr id="10" name="Left-Right Arrow 9">
+            <a:extLst>
+              <a:ext uri="{FF2B5EF4-FFF2-40B4-BE49-F238E27FC236}">
+                <a16:creationId xmlns:a16="http://schemas.microsoft.com/office/drawing/2014/main" id="{60BE2CE7-7608-6AA0-9FFF-2CC03CC943CB}"/>
+              </a:ext>
+            </a:extLst>
+          </p:cNvPr>
+          <p:cNvSpPr/>
+          <p:nvPr/>
+        </p:nvSpPr>
+        <p:spPr>
+          <a:xfrm rot="20144982">
+            <a:off x="4429125" y="5022860"/>
+            <a:ext cx="742950" cy="237235"/>
+          </a:xfrm>
+          <a:prstGeom prst="leftRightArrow">
+            <a:avLst/>
+          </a:prstGeom>
+        </p:spPr>
+        <p:style>
+          <a:lnRef idx="2">
+            <a:schemeClr val="accent1">
+              <a:shade val="50000"/>
+            </a:schemeClr>
+          </a:lnRef>
+          <a:fillRef idx="1">
+            <a:schemeClr val="accent1"/>
+          </a:fillRef>
+          <a:effectRef idx="0">
+            <a:schemeClr val="accent1"/>
+          </a:effectRef>
+          <a:fontRef idx="minor">
+            <a:schemeClr val="lt1"/>
+          </a:fontRef>
+        </p:style>
+        <p:txBody>
+          <a:bodyPr rtlCol="0" anchor="ctr"/>
+          <a:lstStyle/>
+          <a:p>
+            <a:pPr algn="ctr"/>
+            <a:endParaRPr lang="en-US"/>
+          </a:p>
+        </p:txBody>
+      </p:sp>
+      <p:sp>
+        <p:nvSpPr>
+          <p:cNvPr id="11" name="Left-Right Arrow 10">
+            <a:extLst>
+              <a:ext uri="{FF2B5EF4-FFF2-40B4-BE49-F238E27FC236}">
+                <a16:creationId xmlns:a16="http://schemas.microsoft.com/office/drawing/2014/main" id="{E4AE2FA5-B197-6A02-B620-09C2E5B5CB91}"/>
+              </a:ext>
+            </a:extLst>
+          </p:cNvPr>
+          <p:cNvSpPr/>
+          <p:nvPr/>
+        </p:nvSpPr>
+        <p:spPr>
+          <a:xfrm rot="1509550">
+            <a:off x="4429124" y="5712211"/>
+            <a:ext cx="742950" cy="237235"/>
+          </a:xfrm>
+          <a:prstGeom prst="leftRightArrow">
+            <a:avLst/>
+          </a:prstGeom>
+        </p:spPr>
+        <p:style>
+          <a:lnRef idx="2">
+            <a:schemeClr val="accent1">
+              <a:shade val="50000"/>
+            </a:schemeClr>
+          </a:lnRef>
+          <a:fillRef idx="1">
+            <a:schemeClr val="accent1"/>
+          </a:fillRef>
+          <a:effectRef idx="0">
+            <a:schemeClr val="accent1"/>
+          </a:effectRef>
+          <a:fontRef idx="minor">
+            <a:schemeClr val="lt1"/>
+          </a:fontRef>
+        </p:style>
+        <p:txBody>
+          <a:bodyPr rtlCol="0" anchor="ctr"/>
+          <a:lstStyle/>
+          <a:p>
+            <a:pPr algn="ctr"/>
+            <a:endParaRPr lang="en-US"/>
+          </a:p>
+        </p:txBody>
+      </p:sp>
+      <p:cxnSp>
+        <p:nvCxnSpPr>
+          <p:cNvPr id="13" name="Straight Connector 12">
+            <a:extLst>
+              <a:ext uri="{FF2B5EF4-FFF2-40B4-BE49-F238E27FC236}">
+                <a16:creationId xmlns:a16="http://schemas.microsoft.com/office/drawing/2014/main" id="{72BBF818-DF5A-127C-1BE6-D86778B81923}"/>
+              </a:ext>
+            </a:extLst>
+          </p:cNvPr>
+          <p:cNvCxnSpPr/>
+          <p:nvPr/>
+        </p:nvCxnSpPr>
+        <p:spPr>
+          <a:xfrm flipH="1" flipV="1">
+            <a:off x="5308471" y="4350493"/>
+            <a:ext cx="1000125" cy="915927"/>
+          </a:xfrm>
+          <a:prstGeom prst="line">
+            <a:avLst/>
+          </a:prstGeom>
+          <a:ln w="38100" cap="rnd">
+            <a:solidFill>
+              <a:srgbClr val="FF0000">
+                <a:alpha val="19854"/>
+              </a:srgbClr>
+            </a:solidFill>
+          </a:ln>
+        </p:spPr>
+        <p:style>
+          <a:lnRef idx="1">
+            <a:schemeClr val="accent1"/>
+          </a:lnRef>
+          <a:fillRef idx="0">
+            <a:schemeClr val="accent1"/>
+          </a:fillRef>
+          <a:effectRef idx="0">
+            <a:schemeClr val="accent1"/>
+          </a:effectRef>
+          <a:fontRef idx="minor">
+            <a:schemeClr val="tx1"/>
+          </a:fontRef>
+        </p:style>
+      </p:cxnSp>
+      <p:cxnSp>
+        <p:nvCxnSpPr>
+          <p:cNvPr id="14" name="Straight Connector 13">
+            <a:extLst>
+              <a:ext uri="{FF2B5EF4-FFF2-40B4-BE49-F238E27FC236}">
+                <a16:creationId xmlns:a16="http://schemas.microsoft.com/office/drawing/2014/main" id="{4EEB76D9-A986-ACFA-28F8-E7F2843BD94B}"/>
+              </a:ext>
+            </a:extLst>
+          </p:cNvPr>
+          <p:cNvCxnSpPr>
+            <a:cxnSpLocks/>
+          </p:cNvCxnSpPr>
+          <p:nvPr/>
+        </p:nvCxnSpPr>
+        <p:spPr>
+          <a:xfrm flipH="1">
+            <a:off x="5365622" y="4429916"/>
+            <a:ext cx="1000125" cy="757080"/>
+          </a:xfrm>
+          <a:prstGeom prst="line">
+            <a:avLst/>
+          </a:prstGeom>
+          <a:ln w="38100" cap="rnd">
+            <a:solidFill>
+              <a:srgbClr val="FF0000">
+                <a:alpha val="20000"/>
+              </a:srgbClr>
+            </a:solidFill>
+          </a:ln>
+        </p:spPr>
+        <p:style>
+          <a:lnRef idx="1">
+            <a:schemeClr val="accent1"/>
+          </a:lnRef>
+          <a:fillRef idx="0">
+            <a:schemeClr val="accent1"/>
+          </a:fillRef>
+          <a:effectRef idx="0">
+            <a:schemeClr val="accent1"/>
+          </a:effectRef>
+          <a:fontRef idx="minor">
+            <a:schemeClr val="tx1"/>
+          </a:fontRef>
+        </p:style>
+      </p:cxnSp>
     </p:spTree>
     <p:extLst>
       <p:ext uri="{BB962C8B-B14F-4D97-AF65-F5344CB8AC3E}">
@@ -3498,6 +4026,630 @@
       </p:grpSpPr>
       <p:sp>
         <p:nvSpPr>
+          <p:cNvPr id="3" name="TextBox 2">
+            <a:extLst>
+              <a:ext uri="{FF2B5EF4-FFF2-40B4-BE49-F238E27FC236}">
+                <a16:creationId xmlns:a16="http://schemas.microsoft.com/office/drawing/2014/main" id="{453354CC-1C48-A5A6-1CAD-2EEC1862AA91}"/>
+              </a:ext>
+            </a:extLst>
+          </p:cNvPr>
+          <p:cNvSpPr txBox="1"/>
+          <p:nvPr/>
+        </p:nvSpPr>
+        <p:spPr>
+          <a:xfrm>
+            <a:off x="59826" y="0"/>
+            <a:ext cx="6678416" cy="523220"/>
+          </a:xfrm>
+          <a:prstGeom prst="rect">
+            <a:avLst/>
+          </a:prstGeom>
+          <a:noFill/>
+        </p:spPr>
+        <p:txBody>
+          <a:bodyPr wrap="square" rtlCol="0">
+            <a:spAutoFit/>
+          </a:bodyPr>
+          <a:lstStyle/>
+          <a:p>
+            <a:r>
+              <a:rPr lang="en-US" sz="2800" b="1"/>
+              <a:t>History of Decentralized finance (DeFi) </a:t>
+            </a:r>
+          </a:p>
+        </p:txBody>
+      </p:sp>
+      <p:sp>
+        <p:nvSpPr>
+          <p:cNvPr id="4" name="TextBox 3">
+            <a:extLst>
+              <a:ext uri="{FF2B5EF4-FFF2-40B4-BE49-F238E27FC236}">
+                <a16:creationId xmlns:a16="http://schemas.microsoft.com/office/drawing/2014/main" id="{E1D09B3F-81EF-DD22-63BD-C0DEAB35E41A}"/>
+              </a:ext>
+            </a:extLst>
+          </p:cNvPr>
+          <p:cNvSpPr txBox="1"/>
+          <p:nvPr/>
+        </p:nvSpPr>
+        <p:spPr>
+          <a:xfrm>
+            <a:off x="123423" y="985838"/>
+            <a:ext cx="6551222" cy="5693866"/>
+          </a:xfrm>
+          <a:prstGeom prst="rect">
+            <a:avLst/>
+          </a:prstGeom>
+          <a:solidFill>
+            <a:schemeClr val="accent4">
+              <a:lumMod val="20000"/>
+              <a:lumOff val="80000"/>
+            </a:schemeClr>
+          </a:solidFill>
+          <a:ln>
+            <a:solidFill>
+              <a:srgbClr val="FF0000"/>
+            </a:solidFill>
+          </a:ln>
+        </p:spPr>
+        <p:txBody>
+          <a:bodyPr wrap="square" rtlCol="0">
+            <a:spAutoFit/>
+          </a:bodyPr>
+          <a:lstStyle/>
+          <a:p>
+            <a:pPr marL="457200" indent="-457200">
+              <a:buFont typeface="Arial" panose="020B0604020202020204" pitchFamily="34" charset="0"/>
+              <a:buChar char="•"/>
+            </a:pPr>
+            <a:r>
+              <a:rPr lang="en-US" sz="1400"/>
+              <a:t>2009 - </a:t>
+            </a:r>
+            <a:r>
+              <a:rPr lang="en-US" sz="1400" b="1">
+                <a:solidFill>
+                  <a:srgbClr val="FF0000"/>
+                </a:solidFill>
+              </a:rPr>
+              <a:t>Bitcoin</a:t>
+            </a:r>
+            <a:r>
+              <a:rPr lang="en-US" sz="1400"/>
+              <a:t>, Bitcoin script</a:t>
+            </a:r>
+          </a:p>
+          <a:p>
+            <a:pPr marL="457200" indent="-457200">
+              <a:buFont typeface="Arial" panose="020B0604020202020204" pitchFamily="34" charset="0"/>
+              <a:buChar char="•"/>
+            </a:pPr>
+            <a:r>
+              <a:rPr lang="en-US" sz="1400"/>
+              <a:t>2015 - </a:t>
+            </a:r>
+            <a:r>
+              <a:rPr lang="en-US" sz="1400" b="1">
+                <a:solidFill>
+                  <a:srgbClr val="FF0000"/>
+                </a:solidFill>
+              </a:rPr>
+              <a:t>Ethereum</a:t>
+            </a:r>
+            <a:r>
+              <a:rPr lang="en-US" sz="1400"/>
+              <a:t>, smart contracts, Decentralized Apps and protocols</a:t>
+            </a:r>
+          </a:p>
+          <a:p>
+            <a:pPr marL="457200" indent="-457200">
+              <a:buFont typeface="Arial" panose="020B0604020202020204" pitchFamily="34" charset="0"/>
+              <a:buChar char="•"/>
+            </a:pPr>
+            <a:r>
+              <a:rPr lang="en-US" sz="1400"/>
+              <a:t>2015 - </a:t>
+            </a:r>
+            <a:r>
+              <a:rPr lang="en-US" sz="1400" b="1">
+                <a:solidFill>
+                  <a:srgbClr val="FF0000"/>
+                </a:solidFill>
+              </a:rPr>
+              <a:t>ERC20</a:t>
+            </a:r>
+            <a:r>
+              <a:rPr lang="en-US" sz="1400"/>
+              <a:t> token (</a:t>
+            </a:r>
+            <a:r>
+              <a:rPr lang="en-US" sz="1400" b="1">
+                <a:solidFill>
+                  <a:srgbClr val="00B050"/>
+                </a:solidFill>
+              </a:rPr>
+              <a:t>Ethereum Request for Comment</a:t>
+            </a:r>
+            <a:r>
+              <a:rPr lang="en-US" sz="1400"/>
+              <a:t>) is a standard used for creating and issuing smart contracts on the Ethereum blockchain. Smart contracts can then be used to create smart property or tokenized assets that people can invest in. </a:t>
+            </a:r>
+          </a:p>
+          <a:p>
+            <a:pPr marL="457200" indent="-457200">
+              <a:buFont typeface="Arial" panose="020B0604020202020204" pitchFamily="34" charset="0"/>
+              <a:buChar char="•"/>
+            </a:pPr>
+            <a:r>
+              <a:rPr lang="en-US" sz="1400"/>
+              <a:t>2017 – </a:t>
+            </a:r>
+            <a:r>
+              <a:rPr lang="en-US" sz="1400" b="1">
+                <a:solidFill>
+                  <a:srgbClr val="FF0000"/>
+                </a:solidFill>
+              </a:rPr>
+              <a:t>DAI</a:t>
+            </a:r>
+            <a:r>
+              <a:rPr lang="en-US" sz="1400"/>
+              <a:t> - Decentralized stable coin (2014 – Maker, 2015 – single, 2019 – multiple collaterals)</a:t>
+            </a:r>
+          </a:p>
+          <a:p>
+            <a:pPr marL="457200" indent="-457200">
+              <a:buFont typeface="Arial" panose="020B0604020202020204" pitchFamily="34" charset="0"/>
+              <a:buChar char="•"/>
+            </a:pPr>
+            <a:r>
+              <a:rPr lang="en-US" sz="1400"/>
+              <a:t>2017 – </a:t>
+            </a:r>
+            <a:r>
+              <a:rPr lang="en-US" sz="1400" b="1">
+                <a:solidFill>
+                  <a:srgbClr val="FF0000"/>
+                </a:solidFill>
+              </a:rPr>
+              <a:t>EtherDelta</a:t>
+            </a:r>
+            <a:r>
+              <a:rPr lang="en-US" sz="1400"/>
+              <a:t> = DEX (Decentralized EXchange) using order book trading ERC20, was hacked in 2017</a:t>
+            </a:r>
+          </a:p>
+          <a:p>
+            <a:pPr marL="457200" indent="-457200">
+              <a:buFont typeface="Arial" panose="020B0604020202020204" pitchFamily="34" charset="0"/>
+              <a:buChar char="•"/>
+            </a:pPr>
+            <a:r>
+              <a:rPr lang="en-US" sz="1400"/>
+              <a:t>2017-2020 – multiple </a:t>
+            </a:r>
+            <a:r>
+              <a:rPr lang="en-US" sz="1400" b="1">
+                <a:solidFill>
+                  <a:srgbClr val="FF0000"/>
+                </a:solidFill>
+              </a:rPr>
+              <a:t>ICO-s</a:t>
+            </a:r>
+            <a:r>
+              <a:rPr lang="en-US" sz="1400"/>
+              <a:t> (Initial Coin Offering) over Ethereum platform</a:t>
+            </a:r>
+            <a:br>
+              <a:rPr lang="en-US" sz="1400"/>
+            </a:br>
+            <a:r>
+              <a:rPr lang="en-US" sz="1400">
+                <a:solidFill>
+                  <a:srgbClr val="00B0F0"/>
+                </a:solidFill>
+              </a:rPr>
+              <a:t>.. AAVE – lending and borrowing</a:t>
+            </a:r>
+            <a:br>
+              <a:rPr lang="en-US" sz="1400">
+                <a:solidFill>
+                  <a:srgbClr val="00B0F0"/>
+                </a:solidFill>
+              </a:rPr>
+            </a:br>
+            <a:r>
+              <a:rPr lang="en-US" sz="1400">
+                <a:solidFill>
+                  <a:srgbClr val="00B0F0"/>
+                </a:solidFill>
+              </a:rPr>
+              <a:t>.. Synthetix - liquidity protocol for derivatives</a:t>
+            </a:r>
+            <a:br>
+              <a:rPr lang="en-US" sz="1400">
+                <a:solidFill>
+                  <a:srgbClr val="00B0F0"/>
+                </a:solidFill>
+              </a:rPr>
+            </a:br>
+            <a:r>
+              <a:rPr lang="en-US" sz="1400">
+                <a:solidFill>
+                  <a:srgbClr val="00B0F0"/>
+                </a:solidFill>
+              </a:rPr>
+              <a:t>.. Ren (Republic) – protocol for inter-chain liquidity</a:t>
+            </a:r>
+            <a:br>
+              <a:rPr lang="en-US" sz="1400">
+                <a:solidFill>
+                  <a:srgbClr val="00B0F0"/>
+                </a:solidFill>
+              </a:rPr>
+            </a:br>
+            <a:r>
+              <a:rPr lang="en-US" sz="1400">
+                <a:solidFill>
+                  <a:srgbClr val="00B0F0"/>
+                </a:solidFill>
+              </a:rPr>
+              <a:t>.. kyber network – liquidity protocol</a:t>
+            </a:r>
+            <a:br>
+              <a:rPr lang="en-US" sz="1400">
+                <a:solidFill>
+                  <a:srgbClr val="00B0F0"/>
+                </a:solidFill>
+              </a:rPr>
+            </a:br>
+            <a:r>
+              <a:rPr lang="en-US" sz="1400">
+                <a:solidFill>
+                  <a:srgbClr val="00B0F0"/>
+                </a:solidFill>
+              </a:rPr>
+              <a:t>.. O - Zero X– open peer to peer exchange protocol</a:t>
+            </a:r>
+            <a:br>
+              <a:rPr lang="en-US" sz="1400">
+                <a:solidFill>
+                  <a:srgbClr val="00B0F0"/>
+                </a:solidFill>
+              </a:rPr>
+            </a:br>
+            <a:r>
+              <a:rPr lang="en-US" sz="1400">
+                <a:solidFill>
+                  <a:srgbClr val="00B0F0"/>
+                </a:solidFill>
+              </a:rPr>
+              <a:t>.. Bancor - – liquidity protocol</a:t>
+            </a:r>
+          </a:p>
+          <a:p>
+            <a:pPr marL="457200" indent="-457200">
+              <a:buFont typeface="Arial" panose="020B0604020202020204" pitchFamily="34" charset="0"/>
+              <a:buChar char="•"/>
+            </a:pPr>
+            <a:r>
+              <a:rPr lang="en-US" sz="1400"/>
+              <a:t>2018 – </a:t>
+            </a:r>
+            <a:r>
+              <a:rPr lang="en-US" sz="1400" b="1">
+                <a:solidFill>
+                  <a:srgbClr val="FF0000"/>
+                </a:solidFill>
+              </a:rPr>
+              <a:t>Uniswap</a:t>
+            </a:r>
+            <a:r>
+              <a:rPr lang="en-US" sz="1400"/>
+              <a:t> – </a:t>
+            </a:r>
+            <a:r>
+              <a:rPr lang="en-US" sz="1400" b="1">
+                <a:solidFill>
+                  <a:srgbClr val="FF0000"/>
+                </a:solidFill>
+              </a:rPr>
+              <a:t>LP</a:t>
+            </a:r>
+            <a:r>
+              <a:rPr lang="en-US" sz="1400"/>
+              <a:t> (liquidity pools) and </a:t>
+            </a:r>
+            <a:r>
+              <a:rPr lang="en-US" sz="1400" b="1">
+                <a:solidFill>
+                  <a:srgbClr val="FF0000"/>
+                </a:solidFill>
+              </a:rPr>
+              <a:t>AMM</a:t>
+            </a:r>
+            <a:r>
+              <a:rPr lang="en-US" sz="1400"/>
+              <a:t> (Automated Market Makers)</a:t>
+            </a:r>
+          </a:p>
+          <a:p>
+            <a:pPr marL="457200" indent="-457200">
+              <a:buFont typeface="Arial" panose="020B0604020202020204" pitchFamily="34" charset="0"/>
+              <a:buChar char="•"/>
+            </a:pPr>
+            <a:r>
+              <a:rPr lang="en-US" sz="1400"/>
+              <a:t>2019 - </a:t>
+            </a:r>
+            <a:r>
+              <a:rPr lang="en-US" sz="1400" b="1">
+                <a:solidFill>
+                  <a:srgbClr val="FF0000"/>
+                </a:solidFill>
+              </a:rPr>
+              <a:t>Synthetix</a:t>
+            </a:r>
+            <a:r>
+              <a:rPr lang="en-US" sz="1400"/>
+              <a:t> – first liquidity incentive program </a:t>
+            </a:r>
+          </a:p>
+          <a:p>
+            <a:pPr marL="457200" indent="-457200">
+              <a:buFont typeface="Arial" panose="020B0604020202020204" pitchFamily="34" charset="0"/>
+              <a:buChar char="•"/>
+            </a:pPr>
+            <a:endParaRPr lang="en-US" sz="1400"/>
+          </a:p>
+          <a:p>
+            <a:pPr marL="457200" indent="-457200">
+              <a:buFont typeface="Arial" panose="020B0604020202020204" pitchFamily="34" charset="0"/>
+              <a:buChar char="•"/>
+            </a:pPr>
+            <a:r>
+              <a:rPr lang="en-US" sz="1400"/>
+              <a:t>March 2020 – Ether price dropped 50% in one day because of COVID pandemic</a:t>
+            </a:r>
+          </a:p>
+          <a:p>
+            <a:pPr marL="457200" indent="-457200">
+              <a:buFont typeface="Arial" panose="020B0604020202020204" pitchFamily="34" charset="0"/>
+              <a:buChar char="•"/>
+            </a:pPr>
+            <a:r>
+              <a:rPr lang="en-US" sz="1400"/>
+              <a:t>2020 Summer – </a:t>
+            </a:r>
+            <a:r>
+              <a:rPr lang="en-US" sz="1400" b="1">
+                <a:solidFill>
+                  <a:srgbClr val="FF0000"/>
+                </a:solidFill>
+              </a:rPr>
+              <a:t>Compound</a:t>
+            </a:r>
+            <a:r>
+              <a:rPr lang="en-US" sz="1400"/>
+              <a:t> launched reward program for lending/borrowing</a:t>
+            </a:r>
+            <a:br>
+              <a:rPr lang="en-US" sz="1400"/>
+            </a:br>
+            <a:r>
+              <a:rPr lang="en-US" sz="1400"/>
+              <a:t>(supply APY, borrow APY) =&gt; liquidity mining, yild farming. </a:t>
+            </a:r>
+            <a:br>
+              <a:rPr lang="en-US" sz="1400"/>
+            </a:br>
+            <a:r>
+              <a:rPr lang="en-US" sz="1400" b="1">
+                <a:solidFill>
+                  <a:srgbClr val="FF0000"/>
+                </a:solidFill>
+              </a:rPr>
+              <a:t>Compound Governance</a:t>
+            </a:r>
+            <a:r>
+              <a:rPr lang="en-US" sz="1400"/>
+              <a:t> – users can vote on changes in protocol</a:t>
+            </a:r>
+          </a:p>
+          <a:p>
+            <a:pPr marL="457200" indent="-457200">
+              <a:buFont typeface="Arial" panose="020B0604020202020204" pitchFamily="34" charset="0"/>
+              <a:buChar char="•"/>
+            </a:pPr>
+            <a:r>
+              <a:rPr lang="en-US" sz="1400"/>
+              <a:t>2020 - </a:t>
+            </a:r>
+            <a:r>
+              <a:rPr lang="en-US" sz="1400" b="1">
+                <a:solidFill>
+                  <a:srgbClr val="FF0000"/>
+                </a:solidFill>
+              </a:rPr>
+              <a:t>Yearn Finance</a:t>
+            </a:r>
+            <a:r>
+              <a:rPr lang="en-US" sz="1400"/>
+              <a:t> – yield optimizer auto switching between different lending protocols (Andre Cronje), token YFi – grew to $30K in 2 months</a:t>
+            </a:r>
+          </a:p>
+        </p:txBody>
+      </p:sp>
+      <p:sp>
+        <p:nvSpPr>
+          <p:cNvPr id="5" name="TextBox 4">
+            <a:extLst>
+              <a:ext uri="{FF2B5EF4-FFF2-40B4-BE49-F238E27FC236}">
+                <a16:creationId xmlns:a16="http://schemas.microsoft.com/office/drawing/2014/main" id="{2DBFD9BB-D4A5-FA13-9ABF-77D725CD695B}"/>
+              </a:ext>
+            </a:extLst>
+          </p:cNvPr>
+          <p:cNvSpPr txBox="1"/>
+          <p:nvPr/>
+        </p:nvSpPr>
+        <p:spPr>
+          <a:xfrm>
+            <a:off x="7304392" y="153888"/>
+            <a:ext cx="3971925" cy="523220"/>
+          </a:xfrm>
+          <a:prstGeom prst="rect">
+            <a:avLst/>
+          </a:prstGeom>
+          <a:noFill/>
+        </p:spPr>
+        <p:txBody>
+          <a:bodyPr wrap="square" rtlCol="0">
+            <a:spAutoFit/>
+          </a:bodyPr>
+          <a:lstStyle/>
+          <a:p>
+            <a:r>
+              <a:rPr lang="en-US" sz="1400"/>
+              <a:t>Evolution from user-to-user ( peer to peer ) to user to contract platform with liquidity pools </a:t>
+            </a:r>
+          </a:p>
+        </p:txBody>
+      </p:sp>
+      <p:sp>
+        <p:nvSpPr>
+          <p:cNvPr id="6" name="TextBox 5">
+            <a:extLst>
+              <a:ext uri="{FF2B5EF4-FFF2-40B4-BE49-F238E27FC236}">
+                <a16:creationId xmlns:a16="http://schemas.microsoft.com/office/drawing/2014/main" id="{6C3C4F43-27EB-31DD-FD72-ACD9D357C032}"/>
+              </a:ext>
+            </a:extLst>
+          </p:cNvPr>
+          <p:cNvSpPr txBox="1"/>
+          <p:nvPr/>
+        </p:nvSpPr>
+        <p:spPr>
+          <a:xfrm>
+            <a:off x="7186613" y="985838"/>
+            <a:ext cx="4343400" cy="738664"/>
+          </a:xfrm>
+          <a:prstGeom prst="rect">
+            <a:avLst/>
+          </a:prstGeom>
+          <a:solidFill>
+            <a:schemeClr val="accent4">
+              <a:lumMod val="20000"/>
+              <a:lumOff val="80000"/>
+            </a:schemeClr>
+          </a:solidFill>
+          <a:ln>
+            <a:solidFill>
+              <a:srgbClr val="FF0000"/>
+            </a:solidFill>
+          </a:ln>
+        </p:spPr>
+        <p:txBody>
+          <a:bodyPr wrap="square" rtlCol="0">
+            <a:spAutoFit/>
+          </a:bodyPr>
+          <a:lstStyle/>
+          <a:p>
+            <a:pPr marL="285750" indent="-285750">
+              <a:buFont typeface="Arial" panose="020B0604020202020204" pitchFamily="34" charset="0"/>
+              <a:buChar char="•"/>
+            </a:pPr>
+            <a:r>
+              <a:rPr lang="en-US" sz="1400"/>
+              <a:t>2020 - Ampleforth</a:t>
+            </a:r>
+          </a:p>
+          <a:p>
+            <a:pPr marL="285750" indent="-285750">
+              <a:buFont typeface="Arial" panose="020B0604020202020204" pitchFamily="34" charset="0"/>
+              <a:buChar char="•"/>
+            </a:pPr>
+            <a:r>
+              <a:rPr lang="en-US" sz="1400"/>
+              <a:t>2020 – YAM protocol – rewarding for staking, bug</a:t>
+            </a:r>
+          </a:p>
+          <a:p>
+            <a:pPr marL="285750" indent="-285750">
+              <a:buFont typeface="Arial" panose="020B0604020202020204" pitchFamily="34" charset="0"/>
+              <a:buChar char="•"/>
+            </a:pPr>
+            <a:r>
+              <a:rPr lang="en-US" sz="1400"/>
+              <a:t>2020 – Sushi swap, vampire attack, $1 Bln</a:t>
+            </a:r>
+          </a:p>
+        </p:txBody>
+      </p:sp>
+      <p:sp>
+        <p:nvSpPr>
+          <p:cNvPr id="7" name="TextBox 6">
+            <a:extLst>
+              <a:ext uri="{FF2B5EF4-FFF2-40B4-BE49-F238E27FC236}">
+                <a16:creationId xmlns:a16="http://schemas.microsoft.com/office/drawing/2014/main" id="{19D671E8-D864-0CD6-14D0-F4F1824D4369}"/>
+              </a:ext>
+            </a:extLst>
+          </p:cNvPr>
+          <p:cNvSpPr txBox="1"/>
+          <p:nvPr/>
+        </p:nvSpPr>
+        <p:spPr>
+          <a:xfrm>
+            <a:off x="242888" y="523220"/>
+            <a:ext cx="3014662" cy="369332"/>
+          </a:xfrm>
+          <a:prstGeom prst="rect">
+            <a:avLst/>
+          </a:prstGeom>
+          <a:noFill/>
+        </p:spPr>
+        <p:txBody>
+          <a:bodyPr wrap="square" rtlCol="0">
+            <a:spAutoFit/>
+          </a:bodyPr>
+          <a:lstStyle/>
+          <a:p>
+            <a:r>
+              <a:rPr lang="en-US"/>
+              <a:t>youtube Finematics video </a:t>
+            </a:r>
+          </a:p>
+        </p:txBody>
+      </p:sp>
+    </p:spTree>
+    <p:extLst>
+      <p:ext uri="{BB962C8B-B14F-4D97-AF65-F5344CB8AC3E}">
+        <p14:creationId xmlns:p14="http://schemas.microsoft.com/office/powerpoint/2010/main" val="718216612"/>
+      </p:ext>
+    </p:extLst>
+  </p:cSld>
+  <p:clrMapOvr>
+    <a:masterClrMapping/>
+  </p:clrMapOvr>
+</p:sld>
+</file>
+
+<file path=ppt/slides/slide3.xml><?xml version="1.0" encoding="utf-8"?>
+<p:sld xmlns:a="http://schemas.openxmlformats.org/drawingml/2006/main" xmlns:r="http://schemas.openxmlformats.org/officeDocument/2006/relationships" xmlns:p="http://schemas.openxmlformats.org/presentationml/2006/main">
+  <p:cSld>
+    <p:spTree>
+      <p:nvGrpSpPr>
+        <p:cNvPr id="1" name=""/>
+        <p:cNvGrpSpPr/>
+        <p:nvPr/>
+      </p:nvGrpSpPr>
+      <p:grpSpPr>
+        <a:xfrm>
+          <a:off x="0" y="0"/>
+          <a:ext cx="0" cy="0"/>
+          <a:chOff x="0" y="0"/>
+          <a:chExt cx="0" cy="0"/>
+        </a:xfrm>
+      </p:grpSpPr>
+      <p:sp>
+        <p:nvSpPr>
           <p:cNvPr id="2" name="TextBox 1">
             <a:extLst>
               <a:ext uri="{FF2B5EF4-FFF2-40B4-BE49-F238E27FC236}">
@@ -3760,7 +4912,7 @@
 </p:sld>
 </file>
 
-<file path=ppt/slides/slide3.xml><?xml version="1.0" encoding="utf-8"?>
+<file path=ppt/slides/slide4.xml><?xml version="1.0" encoding="utf-8"?>
 <p:sld xmlns:a="http://schemas.openxmlformats.org/drawingml/2006/main" xmlns:r="http://schemas.openxmlformats.org/officeDocument/2006/relationships" xmlns:p="http://schemas.openxmlformats.org/presentationml/2006/main">
   <p:cSld>
     <p:spTree>

--- a/crypto_09_defi.pptx
+++ b/crypto_09_defi.pptx
@@ -5,13 +5,14 @@
     <p:sldMasterId id="2147483834" r:id="rId1"/>
   </p:sldMasterIdLst>
   <p:notesMasterIdLst>
-    <p:notesMasterId r:id="rId6"/>
+    <p:notesMasterId r:id="rId7"/>
   </p:notesMasterIdLst>
   <p:sldIdLst>
     <p:sldId id="328" r:id="rId2"/>
     <p:sldId id="329" r:id="rId3"/>
     <p:sldId id="327" r:id="rId4"/>
-    <p:sldId id="326" r:id="rId5"/>
+    <p:sldId id="330" r:id="rId5"/>
+    <p:sldId id="326" r:id="rId6"/>
   </p:sldIdLst>
   <p:sldSz cx="12192000" cy="6858000"/>
   <p:notesSz cx="6858000" cy="9144000"/>
@@ -688,7 +689,7 @@
           <a:p>
             <a:fld id="{EB1FAE4C-5332-014D-8E1B-BB8DA73EF81D}" type="datetimeFigureOut">
               <a:rPr lang="en-US"/>
-              <a:t>5/6/22</a:t>
+              <a:t>5/8/22</a:t>
             </a:fld>
             <a:endParaRPr lang="en-US"/>
           </a:p>
@@ -858,7 +859,7 @@
           <a:p>
             <a:fld id="{EB1FAE4C-5332-014D-8E1B-BB8DA73EF81D}" type="datetimeFigureOut">
               <a:rPr lang="en-US"/>
-              <a:t>5/6/22</a:t>
+              <a:t>5/8/22</a:t>
             </a:fld>
             <a:endParaRPr lang="en-US"/>
           </a:p>
@@ -1038,7 +1039,7 @@
           <a:p>
             <a:fld id="{EB1FAE4C-5332-014D-8E1B-BB8DA73EF81D}" type="datetimeFigureOut">
               <a:rPr lang="en-US"/>
-              <a:t>5/6/22</a:t>
+              <a:t>5/8/22</a:t>
             </a:fld>
             <a:endParaRPr lang="en-US"/>
           </a:p>
@@ -1208,7 +1209,7 @@
           <a:p>
             <a:fld id="{EB1FAE4C-5332-014D-8E1B-BB8DA73EF81D}" type="datetimeFigureOut">
               <a:rPr lang="en-US"/>
-              <a:t>5/6/22</a:t>
+              <a:t>5/8/22</a:t>
             </a:fld>
             <a:endParaRPr lang="en-US"/>
           </a:p>
@@ -1455,7 +1456,7 @@
           <a:p>
             <a:fld id="{EB1FAE4C-5332-014D-8E1B-BB8DA73EF81D}" type="datetimeFigureOut">
               <a:rPr lang="en-US"/>
-              <a:t>5/6/22</a:t>
+              <a:t>5/8/22</a:t>
             </a:fld>
             <a:endParaRPr lang="en-US"/>
           </a:p>
@@ -1686,7 +1687,7 @@
           <a:p>
             <a:fld id="{EB1FAE4C-5332-014D-8E1B-BB8DA73EF81D}" type="datetimeFigureOut">
               <a:rPr lang="en-US"/>
-              <a:t>5/6/22</a:t>
+              <a:t>5/8/22</a:t>
             </a:fld>
             <a:endParaRPr lang="en-US"/>
           </a:p>
@@ -2052,7 +2053,7 @@
           <a:p>
             <a:fld id="{EB1FAE4C-5332-014D-8E1B-BB8DA73EF81D}" type="datetimeFigureOut">
               <a:rPr lang="en-US"/>
-              <a:t>5/6/22</a:t>
+              <a:t>5/8/22</a:t>
             </a:fld>
             <a:endParaRPr lang="en-US"/>
           </a:p>
@@ -2171,7 +2172,7 @@
           <a:p>
             <a:fld id="{EB1FAE4C-5332-014D-8E1B-BB8DA73EF81D}" type="datetimeFigureOut">
               <a:rPr lang="en-US"/>
-              <a:t>5/6/22</a:t>
+              <a:t>5/8/22</a:t>
             </a:fld>
             <a:endParaRPr lang="en-US"/>
           </a:p>
@@ -2268,7 +2269,7 @@
           <a:p>
             <a:fld id="{EB1FAE4C-5332-014D-8E1B-BB8DA73EF81D}" type="datetimeFigureOut">
               <a:rPr lang="en-US"/>
-              <a:t>5/6/22</a:t>
+              <a:t>5/8/22</a:t>
             </a:fld>
             <a:endParaRPr lang="en-US"/>
           </a:p>
@@ -2544,7 +2545,7 @@
           <a:p>
             <a:fld id="{EB1FAE4C-5332-014D-8E1B-BB8DA73EF81D}" type="datetimeFigureOut">
               <a:rPr lang="en-US"/>
-              <a:t>5/6/22</a:t>
+              <a:t>5/8/22</a:t>
             </a:fld>
             <a:endParaRPr lang="en-US"/>
           </a:p>
@@ -2801,7 +2802,7 @@
           <a:p>
             <a:fld id="{EB1FAE4C-5332-014D-8E1B-BB8DA73EF81D}" type="datetimeFigureOut">
               <a:rPr lang="en-US"/>
-              <a:t>5/6/22</a:t>
+              <a:t>5/8/22</a:t>
             </a:fld>
             <a:endParaRPr lang="en-US"/>
           </a:p>
@@ -3014,7 +3015,7 @@
           <a:p>
             <a:fld id="{EB1FAE4C-5332-014D-8E1B-BB8DA73EF81D}" type="datetimeFigureOut">
               <a:rPr lang="en-US"/>
-              <a:t>5/6/22</a:t>
+              <a:t>5/8/22</a:t>
             </a:fld>
             <a:endParaRPr lang="en-US"/>
           </a:p>
@@ -4913,6 +4914,485 @@
 </file>
 
 <file path=ppt/slides/slide4.xml><?xml version="1.0" encoding="utf-8"?>
+<p:sld xmlns:a="http://schemas.openxmlformats.org/drawingml/2006/main" xmlns:r="http://schemas.openxmlformats.org/officeDocument/2006/relationships" xmlns:p="http://schemas.openxmlformats.org/presentationml/2006/main">
+  <p:cSld>
+    <p:spTree>
+      <p:nvGrpSpPr>
+        <p:cNvPr id="1" name=""/>
+        <p:cNvGrpSpPr/>
+        <p:nvPr/>
+      </p:nvGrpSpPr>
+      <p:grpSpPr>
+        <a:xfrm>
+          <a:off x="0" y="0"/>
+          <a:ext cx="0" cy="0"/>
+          <a:chOff x="0" y="0"/>
+          <a:chExt cx="0" cy="0"/>
+        </a:xfrm>
+      </p:grpSpPr>
+      <p:sp>
+        <p:nvSpPr>
+          <p:cNvPr id="2" name="TextBox 1">
+            <a:extLst>
+              <a:ext uri="{FF2B5EF4-FFF2-40B4-BE49-F238E27FC236}">
+                <a16:creationId xmlns:a16="http://schemas.microsoft.com/office/drawing/2014/main" id="{B006292A-9C00-EC73-B54D-AFBA82B0C2E7}"/>
+              </a:ext>
+            </a:extLst>
+          </p:cNvPr>
+          <p:cNvSpPr txBox="1"/>
+          <p:nvPr/>
+        </p:nvSpPr>
+        <p:spPr>
+          <a:xfrm>
+            <a:off x="0" y="0"/>
+            <a:ext cx="3882189" cy="523220"/>
+          </a:xfrm>
+          <a:prstGeom prst="rect">
+            <a:avLst/>
+          </a:prstGeom>
+          <a:noFill/>
+        </p:spPr>
+        <p:txBody>
+          <a:bodyPr wrap="square" rtlCol="0">
+            <a:spAutoFit/>
+          </a:bodyPr>
+          <a:lstStyle/>
+          <a:p>
+            <a:r>
+              <a:rPr lang="en-US" sz="2800" b="1"/>
+              <a:t>Finance Before Crypto</a:t>
+            </a:r>
+          </a:p>
+        </p:txBody>
+      </p:sp>
+      <p:sp>
+        <p:nvSpPr>
+          <p:cNvPr id="3" name="TextBox 2">
+            <a:extLst>
+              <a:ext uri="{FF2B5EF4-FFF2-40B4-BE49-F238E27FC236}">
+                <a16:creationId xmlns:a16="http://schemas.microsoft.com/office/drawing/2014/main" id="{830D76CD-226F-E20D-B4C4-AF03A067A36E}"/>
+              </a:ext>
+            </a:extLst>
+          </p:cNvPr>
+          <p:cNvSpPr txBox="1"/>
+          <p:nvPr/>
+        </p:nvSpPr>
+        <p:spPr>
+          <a:xfrm>
+            <a:off x="232610" y="652436"/>
+            <a:ext cx="5358063" cy="2954655"/>
+          </a:xfrm>
+          <a:prstGeom prst="rect">
+            <a:avLst/>
+          </a:prstGeom>
+          <a:solidFill>
+            <a:schemeClr val="accent4">
+              <a:lumMod val="20000"/>
+              <a:lumOff val="80000"/>
+            </a:schemeClr>
+          </a:solidFill>
+        </p:spPr>
+        <p:txBody>
+          <a:bodyPr wrap="square" rtlCol="0">
+            <a:spAutoFit/>
+          </a:bodyPr>
+          <a:lstStyle/>
+          <a:p>
+            <a:r>
+              <a:rPr lang="en-US" b="1">
+                <a:solidFill>
+                  <a:srgbClr val="FF0000"/>
+                </a:solidFill>
+              </a:rPr>
+              <a:t>Protect customers and markets</a:t>
+            </a:r>
+          </a:p>
+          <a:p>
+            <a:pPr marL="285750" indent="-285750">
+              <a:buFont typeface="Arial" panose="020B0604020202020204" pitchFamily="34" charset="0"/>
+              <a:buChar char="•"/>
+            </a:pPr>
+            <a:r>
+              <a:rPr lang="en-US" sz="1400" b="1">
+                <a:solidFill>
+                  <a:srgbClr val="FF0000"/>
+                </a:solidFill>
+              </a:rPr>
+              <a:t>1929 crash</a:t>
+            </a:r>
+            <a:r>
+              <a:rPr lang="en-US" sz="1400"/>
+              <a:t> on Wall Street was a result of a long period of speculation that preceded it, during which millions of people invested their savings or borrowed money to buy stocks, pushing prices to unsustainable levels.</a:t>
+            </a:r>
+          </a:p>
+          <a:p>
+            <a:pPr marL="285750" indent="-285750">
+              <a:buFont typeface="Arial" panose="020B0604020202020204" pitchFamily="34" charset="0"/>
+              <a:buChar char="•"/>
+            </a:pPr>
+            <a:r>
+              <a:rPr lang="en-US" sz="1400"/>
+              <a:t>1934 - The U.S. Congress created the U.S. Securities and Exchange Commission (SEC) to protect investors from fraud and unfair sales practices.</a:t>
+            </a:r>
+          </a:p>
+          <a:p>
+            <a:pPr marL="285750" indent="-285750">
+              <a:buFont typeface="Arial" panose="020B0604020202020204" pitchFamily="34" charset="0"/>
+              <a:buChar char="•"/>
+            </a:pPr>
+            <a:r>
+              <a:rPr lang="en-US" sz="1400"/>
+              <a:t>Nowadays you need to pass a series of exams (like "Series 7") to be allowed to work in Finance, and you can get into prison for violating SEC rules. </a:t>
+            </a:r>
+          </a:p>
+          <a:p>
+            <a:pPr marL="285750" indent="-285750">
+              <a:buFont typeface="Arial" panose="020B0604020202020204" pitchFamily="34" charset="0"/>
+              <a:buChar char="•"/>
+            </a:pPr>
+            <a:r>
+              <a:rPr lang="en-US" sz="1400"/>
+              <a:t>IPO (Initial Public Offering) – the legal process to permit a company to issue its stock on a public market</a:t>
+            </a:r>
+          </a:p>
+        </p:txBody>
+      </p:sp>
+      <p:sp>
+        <p:nvSpPr>
+          <p:cNvPr id="4" name="TextBox 3">
+            <a:extLst>
+              <a:ext uri="{FF2B5EF4-FFF2-40B4-BE49-F238E27FC236}">
+                <a16:creationId xmlns:a16="http://schemas.microsoft.com/office/drawing/2014/main" id="{30BE14C6-FD69-CB80-56AD-9AFA2E06CFF6}"/>
+              </a:ext>
+            </a:extLst>
+          </p:cNvPr>
+          <p:cNvSpPr txBox="1"/>
+          <p:nvPr/>
+        </p:nvSpPr>
+        <p:spPr>
+          <a:xfrm>
+            <a:off x="6096000" y="3130037"/>
+            <a:ext cx="5724524" cy="1569660"/>
+          </a:xfrm>
+          <a:prstGeom prst="rect">
+            <a:avLst/>
+          </a:prstGeom>
+          <a:solidFill>
+            <a:schemeClr val="accent4">
+              <a:lumMod val="20000"/>
+              <a:lumOff val="80000"/>
+            </a:schemeClr>
+          </a:solidFill>
+        </p:spPr>
+        <p:txBody>
+          <a:bodyPr wrap="square" rtlCol="0">
+            <a:spAutoFit/>
+          </a:bodyPr>
+          <a:lstStyle/>
+          <a:p>
+            <a:pPr marL="285750" indent="-285750">
+              <a:buFont typeface="Arial" panose="020B0604020202020204" pitchFamily="34" charset="0"/>
+              <a:buChar char="•"/>
+            </a:pPr>
+            <a:r>
+              <a:rPr lang="en-US" sz="1200">
+                <a:hlinkClick r:id="rId2"/>
+              </a:rPr>
+              <a:t>https://en.wikipedia.org/wiki/Security_(finance)</a:t>
+            </a:r>
+            <a:endParaRPr lang="en-US" sz="1200"/>
+          </a:p>
+          <a:p>
+            <a:pPr marL="285750" indent="-285750">
+              <a:buFont typeface="Arial" panose="020B0604020202020204" pitchFamily="34" charset="0"/>
+              <a:buChar char="•"/>
+            </a:pPr>
+            <a:r>
+              <a:rPr lang="en-US" sz="1200">
+                <a:hlinkClick r:id="rId3"/>
+              </a:rPr>
+              <a:t>https://en.wikipedia.org/wiki/U.S._Securities_and_Exchange_Commission</a:t>
+            </a:r>
+            <a:endParaRPr lang="en-US" sz="1200"/>
+          </a:p>
+          <a:p>
+            <a:pPr marL="285750" indent="-285750">
+              <a:buFont typeface="Arial" panose="020B0604020202020204" pitchFamily="34" charset="0"/>
+              <a:buChar char="•"/>
+            </a:pPr>
+            <a:r>
+              <a:rPr lang="en-US" sz="1200">
+                <a:hlinkClick r:id="rId4"/>
+              </a:rPr>
+              <a:t>https://en.wikipedia.org/wiki/Series_7_exam</a:t>
+            </a:r>
+            <a:endParaRPr lang="en-US" sz="1200"/>
+          </a:p>
+          <a:p>
+            <a:pPr marL="285750" indent="-285750">
+              <a:buFont typeface="Arial" panose="020B0604020202020204" pitchFamily="34" charset="0"/>
+              <a:buChar char="•"/>
+            </a:pPr>
+            <a:r>
+              <a:rPr lang="en-US" sz="1200">
+                <a:hlinkClick r:id="rId5"/>
+              </a:rPr>
+              <a:t>https://en.wikipedia.org/wiki/Derivative_(finance)</a:t>
+            </a:r>
+            <a:endParaRPr lang="en-US" sz="1200"/>
+          </a:p>
+          <a:p>
+            <a:pPr marL="285750" indent="-285750">
+              <a:buFont typeface="Arial" panose="020B0604020202020204" pitchFamily="34" charset="0"/>
+              <a:buChar char="•"/>
+            </a:pPr>
+            <a:r>
+              <a:rPr lang="en-US" sz="1200">
+                <a:hlinkClick r:id="rId6"/>
+              </a:rPr>
+              <a:t>https://en.wikipedia.org/wiki/Algorithmic_trading</a:t>
+            </a:r>
+            <a:endParaRPr lang="en-US" sz="1200"/>
+          </a:p>
+          <a:p>
+            <a:pPr marL="285750" indent="-285750">
+              <a:buFont typeface="Arial" panose="020B0604020202020204" pitchFamily="34" charset="0"/>
+              <a:buChar char="•"/>
+            </a:pPr>
+            <a:r>
+              <a:rPr lang="en-US" sz="1200">
+                <a:hlinkClick r:id="rId7"/>
+              </a:rPr>
+              <a:t>https://en.wikipedia.org/wiki/Mutual_fund</a:t>
+            </a:r>
+            <a:endParaRPr lang="en-US" sz="1200"/>
+          </a:p>
+          <a:p>
+            <a:pPr marL="285750" indent="-285750">
+              <a:buFont typeface="Arial" panose="020B0604020202020204" pitchFamily="34" charset="0"/>
+              <a:buChar char="•"/>
+            </a:pPr>
+            <a:r>
+              <a:rPr lang="en-US" sz="1200">
+                <a:hlinkClick r:id="rId8"/>
+              </a:rPr>
+              <a:t>https://en.wikipedia.org/wiki/Hedge_fund</a:t>
+            </a:r>
+            <a:endParaRPr lang="en-US" sz="1200"/>
+          </a:p>
+          <a:p>
+            <a:pPr marL="285750" indent="-285750">
+              <a:buFont typeface="Arial" panose="020B0604020202020204" pitchFamily="34" charset="0"/>
+              <a:buChar char="•"/>
+            </a:pPr>
+            <a:r>
+              <a:rPr lang="en-US" sz="1200">
+                <a:hlinkClick r:id="rId9"/>
+              </a:rPr>
+              <a:t>https://en.wikipedia.org/wiki/Mortgage-backed_security</a:t>
+            </a:r>
+            <a:endParaRPr lang="en-US" sz="1200"/>
+          </a:p>
+        </p:txBody>
+      </p:sp>
+      <p:sp>
+        <p:nvSpPr>
+          <p:cNvPr id="5" name="TextBox 4">
+            <a:extLst>
+              <a:ext uri="{FF2B5EF4-FFF2-40B4-BE49-F238E27FC236}">
+                <a16:creationId xmlns:a16="http://schemas.microsoft.com/office/drawing/2014/main" id="{F9C43966-48F2-922C-554B-225DEECC7BCA}"/>
+              </a:ext>
+            </a:extLst>
+          </p:cNvPr>
+          <p:cNvSpPr txBox="1"/>
+          <p:nvPr/>
+        </p:nvSpPr>
+        <p:spPr>
+          <a:xfrm>
+            <a:off x="232610" y="3736307"/>
+            <a:ext cx="5358062" cy="2954655"/>
+          </a:xfrm>
+          <a:prstGeom prst="rect">
+            <a:avLst/>
+          </a:prstGeom>
+          <a:solidFill>
+            <a:schemeClr val="accent4">
+              <a:lumMod val="20000"/>
+              <a:lumOff val="80000"/>
+            </a:schemeClr>
+          </a:solidFill>
+        </p:spPr>
+        <p:txBody>
+          <a:bodyPr wrap="square" rtlCol="0">
+            <a:spAutoFit/>
+          </a:bodyPr>
+          <a:lstStyle/>
+          <a:p>
+            <a:r>
+              <a:rPr lang="en-US" b="1">
+                <a:solidFill>
+                  <a:srgbClr val="FF0000"/>
+                </a:solidFill>
+              </a:rPr>
+              <a:t>Derivatives, packaging, crash 2008</a:t>
+            </a:r>
+          </a:p>
+          <a:p>
+            <a:pPr marL="285750" indent="-285750">
+              <a:buFont typeface="Arial" panose="020B0604020202020204" pitchFamily="34" charset="0"/>
+              <a:buChar char="•"/>
+            </a:pPr>
+            <a:r>
+              <a:rPr lang="en-US" sz="1400"/>
+              <a:t>A security is a tradable financial asset. Three basic types:</a:t>
+            </a:r>
+            <a:br>
+              <a:rPr lang="en-US" sz="1400"/>
+            </a:br>
+            <a:r>
+              <a:rPr lang="en-US" sz="1400"/>
+              <a:t>.. bonds (debt securities)</a:t>
+            </a:r>
+            <a:br>
+              <a:rPr lang="en-US" sz="1400"/>
+            </a:br>
+            <a:r>
+              <a:rPr lang="en-US" sz="1400"/>
+              <a:t>.. equities (common stocks)</a:t>
+            </a:r>
+            <a:br>
+              <a:rPr lang="en-US" sz="1400"/>
+            </a:br>
+            <a:r>
+              <a:rPr lang="en-US" sz="1400"/>
+              <a:t>.. derivatives (forward conracts, futures, options, swaps, repos,</a:t>
+            </a:r>
+            <a:br>
+              <a:rPr lang="en-US" sz="1400"/>
+            </a:br>
+            <a:r>
+              <a:rPr lang="en-US" sz="1400"/>
+              <a:t>    MBS (Mortage Backed Securities), etc.)</a:t>
+            </a:r>
+          </a:p>
+          <a:p>
+            <a:pPr marL="285750" indent="-285750">
+              <a:buFont typeface="Arial" panose="020B0604020202020204" pitchFamily="34" charset="0"/>
+              <a:buChar char="•"/>
+            </a:pPr>
+            <a:r>
+              <a:rPr lang="en-US" sz="1400"/>
+              <a:t>Funds – proffessionally manage baskets of investments using money from many investors who buy funds' shares.</a:t>
+            </a:r>
+          </a:p>
+          <a:p>
+            <a:pPr marL="285750" indent="-285750">
+              <a:buFont typeface="Arial" panose="020B0604020202020204" pitchFamily="34" charset="0"/>
+              <a:buChar char="•"/>
+            </a:pPr>
+            <a:r>
+              <a:rPr lang="en-US" sz="1400" b="1">
+                <a:solidFill>
+                  <a:srgbClr val="FF0000"/>
+                </a:solidFill>
+              </a:rPr>
+              <a:t>2008 crash</a:t>
+            </a:r>
+            <a:r>
+              <a:rPr lang="en-US" sz="1400"/>
+              <a:t> – low interest rates + low loan approval standards caused active borrowing and Real estate building. These sub-prime mortages were packaged (often fraudulently) into derivatives securities (MBS) with high credit rating, which were then sold around the globe. </a:t>
+            </a:r>
+          </a:p>
+        </p:txBody>
+      </p:sp>
+      <p:sp>
+        <p:nvSpPr>
+          <p:cNvPr id="6" name="TextBox 5">
+            <a:extLst>
+              <a:ext uri="{FF2B5EF4-FFF2-40B4-BE49-F238E27FC236}">
+                <a16:creationId xmlns:a16="http://schemas.microsoft.com/office/drawing/2014/main" id="{33E54FB7-F902-2057-FF25-5F4B9FAFEE8F}"/>
+              </a:ext>
+            </a:extLst>
+          </p:cNvPr>
+          <p:cNvSpPr txBox="1"/>
+          <p:nvPr/>
+        </p:nvSpPr>
+        <p:spPr>
+          <a:xfrm>
+            <a:off x="6096000" y="657172"/>
+            <a:ext cx="5724525" cy="1446550"/>
+          </a:xfrm>
+          <a:prstGeom prst="rect">
+            <a:avLst/>
+          </a:prstGeom>
+          <a:solidFill>
+            <a:schemeClr val="accent4">
+              <a:lumMod val="20000"/>
+              <a:lumOff val="80000"/>
+            </a:schemeClr>
+          </a:solidFill>
+        </p:spPr>
+        <p:txBody>
+          <a:bodyPr wrap="square" rtlCol="0">
+            <a:spAutoFit/>
+          </a:bodyPr>
+          <a:lstStyle/>
+          <a:p>
+            <a:r>
+              <a:rPr lang="en-US" b="1">
+                <a:solidFill>
+                  <a:srgbClr val="FF0000"/>
+                </a:solidFill>
+              </a:rPr>
+              <a:t>Lesson learned:</a:t>
+            </a:r>
+          </a:p>
+          <a:p>
+            <a:pPr marL="285750" indent="-285750">
+              <a:buFont typeface="Arial" panose="020B0604020202020204" pitchFamily="34" charset="0"/>
+              <a:buChar char="•"/>
+            </a:pPr>
+            <a:r>
+              <a:rPr lang="en-US" sz="1400"/>
+              <a:t>There is a lot of fraud out there. Ponzi schemes, lies about credibility of securities, lies about collaterals, etc.</a:t>
+            </a:r>
+          </a:p>
+          <a:p>
+            <a:pPr marL="285750" indent="-285750">
+              <a:buFont typeface="Arial" panose="020B0604020202020204" pitchFamily="34" charset="0"/>
+              <a:buChar char="•"/>
+            </a:pPr>
+            <a:r>
+              <a:rPr lang="en-US" sz="1400"/>
+              <a:t>If something is being sold on the market – it doesn't mean it has real value. Even if it is represented by big Wall-Street companies</a:t>
+            </a:r>
+          </a:p>
+          <a:p>
+            <a:pPr marL="285750" indent="-285750">
+              <a:buFont typeface="Arial" panose="020B0604020202020204" pitchFamily="34" charset="0"/>
+              <a:buChar char="•"/>
+            </a:pPr>
+            <a:r>
+              <a:rPr lang="en-US" sz="1400"/>
+              <a:t>Regulations and credit checks help</a:t>
+            </a:r>
+          </a:p>
+        </p:txBody>
+      </p:sp>
+    </p:spTree>
+    <p:extLst>
+      <p:ext uri="{BB962C8B-B14F-4D97-AF65-F5344CB8AC3E}">
+        <p14:creationId xmlns:p14="http://schemas.microsoft.com/office/powerpoint/2010/main" val="2804565089"/>
+      </p:ext>
+    </p:extLst>
+  </p:cSld>
+  <p:clrMapOvr>
+    <a:masterClrMapping/>
+  </p:clrMapOvr>
+</p:sld>
+</file>
+
+<file path=ppt/slides/slide5.xml><?xml version="1.0" encoding="utf-8"?>
 <p:sld xmlns:a="http://schemas.openxmlformats.org/drawingml/2006/main" xmlns:r="http://schemas.openxmlformats.org/officeDocument/2006/relationships" xmlns:p="http://schemas.openxmlformats.org/presentationml/2006/main">
   <p:cSld>
     <p:spTree>

--- a/crypto_09_defi.pptx
+++ b/crypto_09_defi.pptx
@@ -5071,7 +5071,7 @@
         </p:nvSpPr>
         <p:spPr>
           <a:xfrm>
-            <a:off x="6096000" y="3130037"/>
+            <a:off x="6096001" y="2644170"/>
             <a:ext cx="5724524" cy="1569660"/>
           </a:xfrm>
           <a:prstGeom prst="rect">
@@ -5375,6 +5375,135 @@
             <a:r>
               <a:rPr lang="en-US" sz="1400"/>
               <a:t>Regulations and credit checks help</a:t>
+            </a:r>
+          </a:p>
+        </p:txBody>
+      </p:sp>
+      <p:sp>
+        <p:nvSpPr>
+          <p:cNvPr id="7" name="TextBox 6">
+            <a:extLst>
+              <a:ext uri="{FF2B5EF4-FFF2-40B4-BE49-F238E27FC236}">
+                <a16:creationId xmlns:a16="http://schemas.microsoft.com/office/drawing/2014/main" id="{972B31F8-8BEC-470D-05F9-352E1DD2EEB6}"/>
+              </a:ext>
+            </a:extLst>
+          </p:cNvPr>
+          <p:cNvSpPr txBox="1"/>
+          <p:nvPr/>
+        </p:nvSpPr>
+        <p:spPr>
+          <a:xfrm>
+            <a:off x="6096000" y="4964201"/>
+            <a:ext cx="3457575" cy="707886"/>
+          </a:xfrm>
+          <a:prstGeom prst="rect">
+            <a:avLst/>
+          </a:prstGeom>
+          <a:noFill/>
+        </p:spPr>
+        <p:txBody>
+          <a:bodyPr wrap="square" rtlCol="0">
+            <a:spAutoFit/>
+          </a:bodyPr>
+          <a:lstStyle/>
+          <a:p>
+            <a:r>
+              <a:rPr lang="en-US" sz="1400"/>
+              <a:t>Hillarious explanation of 2008 market crash</a:t>
+            </a:r>
+          </a:p>
+          <a:p>
+            <a:r>
+              <a:rPr lang="en-US" sz="1400" b="1">
+                <a:solidFill>
+                  <a:srgbClr val="FF0000"/>
+                </a:solidFill>
+              </a:rPr>
+              <a:t>"Bird and Fortune - Subprime Crisis"</a:t>
+            </a:r>
+          </a:p>
+          <a:p>
+            <a:r>
+              <a:rPr lang="en-US" sz="1200">
+                <a:hlinkClick r:id="rId10"/>
+              </a:rPr>
+              <a:t>https://www.youtube.com/watch?v=mzJmTCYmo9g</a:t>
+            </a:r>
+            <a:endParaRPr lang="en-US" sz="1200"/>
+          </a:p>
+        </p:txBody>
+      </p:sp>
+      <p:pic>
+        <p:nvPicPr>
+          <p:cNvPr id="8" name="Picture 7">
+            <a:extLst>
+              <a:ext uri="{FF2B5EF4-FFF2-40B4-BE49-F238E27FC236}">
+                <a16:creationId xmlns:a16="http://schemas.microsoft.com/office/drawing/2014/main" id="{2D7F9922-6BF4-F1B1-ABE9-EF96448BF483}"/>
+              </a:ext>
+            </a:extLst>
+          </p:cNvPr>
+          <p:cNvPicPr>
+            <a:picLocks noChangeAspect="1"/>
+          </p:cNvPicPr>
+          <p:nvPr/>
+        </p:nvPicPr>
+        <p:blipFill>
+          <a:blip r:embed="rId11" cstate="email">
+            <a:extLst>
+              <a:ext uri="{28A0092B-C50C-407E-A947-70E740481C1C}">
+                <a14:useLocalDpi xmlns:a14="http://schemas.microsoft.com/office/drawing/2010/main"/>
+              </a:ext>
+            </a:extLst>
+          </a:blip>
+          <a:stretch>
+            <a:fillRect/>
+          </a:stretch>
+        </p:blipFill>
+        <p:spPr>
+          <a:xfrm>
+            <a:off x="9648675" y="4786332"/>
+            <a:ext cx="1924200" cy="1527334"/>
+          </a:xfrm>
+          <a:prstGeom prst="rect">
+            <a:avLst/>
+          </a:prstGeom>
+        </p:spPr>
+      </p:pic>
+      <p:sp>
+        <p:nvSpPr>
+          <p:cNvPr id="9" name="TextBox 8">
+            <a:extLst>
+              <a:ext uri="{FF2B5EF4-FFF2-40B4-BE49-F238E27FC236}">
+                <a16:creationId xmlns:a16="http://schemas.microsoft.com/office/drawing/2014/main" id="{F629A584-0CF0-7BA5-8743-12E0F7FB2411}"/>
+              </a:ext>
+            </a:extLst>
+          </p:cNvPr>
+          <p:cNvSpPr txBox="1"/>
+          <p:nvPr/>
+        </p:nvSpPr>
+        <p:spPr>
+          <a:xfrm>
+            <a:off x="6205536" y="5797519"/>
+            <a:ext cx="3457575" cy="523220"/>
+          </a:xfrm>
+          <a:prstGeom prst="rect">
+            <a:avLst/>
+          </a:prstGeom>
+          <a:noFill/>
+        </p:spPr>
+        <p:txBody>
+          <a:bodyPr wrap="square" rtlCol="0">
+            <a:spAutoFit/>
+          </a:bodyPr>
+          <a:lstStyle/>
+          <a:p>
+            <a:r>
+              <a:rPr lang="en-US" sz="1400">
+                <a:solidFill>
+                  <a:srgbClr val="00B050"/>
+                </a:solidFill>
+              </a:rPr>
+              <a:t>"Imagine unemployed ... sitting on his crumbling porch somewhere in Alabama ..."</a:t>
             </a:r>
           </a:p>
         </p:txBody>

--- a/crypto_09_defi.pptx
+++ b/crypto_09_defi.pptx
@@ -5,7 +5,7 @@
     <p:sldMasterId id="2147483834" r:id="rId1"/>
   </p:sldMasterIdLst>
   <p:notesMasterIdLst>
-    <p:notesMasterId r:id="rId7"/>
+    <p:notesMasterId r:id="rId9"/>
   </p:notesMasterIdLst>
   <p:sldIdLst>
     <p:sldId id="328" r:id="rId2"/>
@@ -13,6 +13,8 @@
     <p:sldId id="327" r:id="rId4"/>
     <p:sldId id="330" r:id="rId5"/>
     <p:sldId id="326" r:id="rId6"/>
+    <p:sldId id="306" r:id="rId7"/>
+    <p:sldId id="331" r:id="rId8"/>
   </p:sldIdLst>
   <p:sldSz cx="12192000" cy="6858000"/>
   <p:notesSz cx="6858000" cy="9144000"/>
@@ -689,7 +691,7 @@
           <a:p>
             <a:fld id="{EB1FAE4C-5332-014D-8E1B-BB8DA73EF81D}" type="datetimeFigureOut">
               <a:rPr lang="en-US"/>
-              <a:t>5/8/22</a:t>
+              <a:t>5/9/22</a:t>
             </a:fld>
             <a:endParaRPr lang="en-US"/>
           </a:p>
@@ -859,7 +861,7 @@
           <a:p>
             <a:fld id="{EB1FAE4C-5332-014D-8E1B-BB8DA73EF81D}" type="datetimeFigureOut">
               <a:rPr lang="en-US"/>
-              <a:t>5/8/22</a:t>
+              <a:t>5/9/22</a:t>
             </a:fld>
             <a:endParaRPr lang="en-US"/>
           </a:p>
@@ -1039,7 +1041,7 @@
           <a:p>
             <a:fld id="{EB1FAE4C-5332-014D-8E1B-BB8DA73EF81D}" type="datetimeFigureOut">
               <a:rPr lang="en-US"/>
-              <a:t>5/8/22</a:t>
+              <a:t>5/9/22</a:t>
             </a:fld>
             <a:endParaRPr lang="en-US"/>
           </a:p>
@@ -1209,7 +1211,7 @@
           <a:p>
             <a:fld id="{EB1FAE4C-5332-014D-8E1B-BB8DA73EF81D}" type="datetimeFigureOut">
               <a:rPr lang="en-US"/>
-              <a:t>5/8/22</a:t>
+              <a:t>5/9/22</a:t>
             </a:fld>
             <a:endParaRPr lang="en-US"/>
           </a:p>
@@ -1456,7 +1458,7 @@
           <a:p>
             <a:fld id="{EB1FAE4C-5332-014D-8E1B-BB8DA73EF81D}" type="datetimeFigureOut">
               <a:rPr lang="en-US"/>
-              <a:t>5/8/22</a:t>
+              <a:t>5/9/22</a:t>
             </a:fld>
             <a:endParaRPr lang="en-US"/>
           </a:p>
@@ -1687,7 +1689,7 @@
           <a:p>
             <a:fld id="{EB1FAE4C-5332-014D-8E1B-BB8DA73EF81D}" type="datetimeFigureOut">
               <a:rPr lang="en-US"/>
-              <a:t>5/8/22</a:t>
+              <a:t>5/9/22</a:t>
             </a:fld>
             <a:endParaRPr lang="en-US"/>
           </a:p>
@@ -2053,7 +2055,7 @@
           <a:p>
             <a:fld id="{EB1FAE4C-5332-014D-8E1B-BB8DA73EF81D}" type="datetimeFigureOut">
               <a:rPr lang="en-US"/>
-              <a:t>5/8/22</a:t>
+              <a:t>5/9/22</a:t>
             </a:fld>
             <a:endParaRPr lang="en-US"/>
           </a:p>
@@ -2172,7 +2174,7 @@
           <a:p>
             <a:fld id="{EB1FAE4C-5332-014D-8E1B-BB8DA73EF81D}" type="datetimeFigureOut">
               <a:rPr lang="en-US"/>
-              <a:t>5/8/22</a:t>
+              <a:t>5/9/22</a:t>
             </a:fld>
             <a:endParaRPr lang="en-US"/>
           </a:p>
@@ -2269,7 +2271,7 @@
           <a:p>
             <a:fld id="{EB1FAE4C-5332-014D-8E1B-BB8DA73EF81D}" type="datetimeFigureOut">
               <a:rPr lang="en-US"/>
-              <a:t>5/8/22</a:t>
+              <a:t>5/9/22</a:t>
             </a:fld>
             <a:endParaRPr lang="en-US"/>
           </a:p>
@@ -2545,7 +2547,7 @@
           <a:p>
             <a:fld id="{EB1FAE4C-5332-014D-8E1B-BB8DA73EF81D}" type="datetimeFigureOut">
               <a:rPr lang="en-US"/>
-              <a:t>5/8/22</a:t>
+              <a:t>5/9/22</a:t>
             </a:fld>
             <a:endParaRPr lang="en-US"/>
           </a:p>
@@ -2802,7 +2804,7 @@
           <a:p>
             <a:fld id="{EB1FAE4C-5332-014D-8E1B-BB8DA73EF81D}" type="datetimeFigureOut">
               <a:rPr lang="en-US"/>
-              <a:t>5/8/22</a:t>
+              <a:t>5/9/22</a:t>
             </a:fld>
             <a:endParaRPr lang="en-US"/>
           </a:p>
@@ -3015,7 +3017,7 @@
           <a:p>
             <a:fld id="{EB1FAE4C-5332-014D-8E1B-BB8DA73EF81D}" type="datetimeFigureOut">
               <a:rPr lang="en-US"/>
-              <a:t>5/8/22</a:t>
+              <a:t>5/9/22</a:t>
             </a:fld>
             <a:endParaRPr lang="en-US"/>
           </a:p>
@@ -5540,6 +5542,596 @@
       </p:grpSpPr>
       <p:sp>
         <p:nvSpPr>
+          <p:cNvPr id="5" name="TextBox 4">
+            <a:extLst>
+              <a:ext uri="{FF2B5EF4-FFF2-40B4-BE49-F238E27FC236}">
+                <a16:creationId xmlns:a16="http://schemas.microsoft.com/office/drawing/2014/main" id="{6B9469CD-F847-CC08-33A0-C589F68CED74}"/>
+              </a:ext>
+            </a:extLst>
+          </p:cNvPr>
+          <p:cNvSpPr txBox="1"/>
+          <p:nvPr/>
+        </p:nvSpPr>
+        <p:spPr>
+          <a:xfrm>
+            <a:off x="0" y="0"/>
+            <a:ext cx="4695825" cy="523220"/>
+          </a:xfrm>
+          <a:prstGeom prst="rect">
+            <a:avLst/>
+          </a:prstGeom>
+          <a:noFill/>
+        </p:spPr>
+        <p:txBody>
+          <a:bodyPr wrap="square" rtlCol="0">
+            <a:spAutoFit/>
+          </a:bodyPr>
+          <a:lstStyle/>
+          <a:p>
+            <a:r>
+              <a:rPr lang="en-US" sz="2800" b="1"/>
+              <a:t>Making Money with DeFi</a:t>
+            </a:r>
+          </a:p>
+        </p:txBody>
+      </p:sp>
+      <p:sp>
+        <p:nvSpPr>
+          <p:cNvPr id="6" name="TextBox 5">
+            <a:extLst>
+              <a:ext uri="{FF2B5EF4-FFF2-40B4-BE49-F238E27FC236}">
+                <a16:creationId xmlns:a16="http://schemas.microsoft.com/office/drawing/2014/main" id="{2A631DBA-9ADF-E8AB-AE40-57957357B6DD}"/>
+              </a:ext>
+            </a:extLst>
+          </p:cNvPr>
+          <p:cNvSpPr txBox="1"/>
+          <p:nvPr/>
+        </p:nvSpPr>
+        <p:spPr>
+          <a:xfrm>
+            <a:off x="208313" y="870065"/>
+            <a:ext cx="7828908" cy="3754874"/>
+          </a:xfrm>
+          <a:prstGeom prst="rect">
+            <a:avLst/>
+          </a:prstGeom>
+          <a:solidFill>
+            <a:schemeClr val="accent4">
+              <a:lumMod val="20000"/>
+              <a:lumOff val="80000"/>
+            </a:schemeClr>
+          </a:solidFill>
+        </p:spPr>
+        <p:txBody>
+          <a:bodyPr wrap="square" rtlCol="0">
+            <a:spAutoFit/>
+          </a:bodyPr>
+          <a:lstStyle/>
+          <a:p>
+            <a:r>
+              <a:rPr lang="en-US" sz="1400" b="1">
+                <a:solidFill>
+                  <a:srgbClr val="FF0000"/>
+                </a:solidFill>
+              </a:rPr>
+              <a:t>DeFi</a:t>
+            </a:r>
+            <a:r>
+              <a:rPr lang="en-US" sz="1400"/>
+              <a:t> allows you to </a:t>
+            </a:r>
+            <a:r>
+              <a:rPr lang="en-US" sz="1400" b="1">
+                <a:solidFill>
+                  <a:srgbClr val="00B050"/>
+                </a:solidFill>
+              </a:rPr>
+              <a:t>stake, lend, borrow and trade</a:t>
+            </a:r>
+            <a:r>
+              <a:rPr lang="en-US" sz="1400"/>
+              <a:t> cryptocurrencies (similar how banks do that)</a:t>
+            </a:r>
+          </a:p>
+          <a:p>
+            <a:endParaRPr lang="en-US" sz="1400"/>
+          </a:p>
+          <a:p>
+            <a:endParaRPr lang="en-US" sz="1400"/>
+          </a:p>
+          <a:p>
+            <a:endParaRPr lang="en-US" sz="1400"/>
+          </a:p>
+          <a:p>
+            <a:r>
+              <a:rPr lang="en-US" sz="1400"/>
+              <a:t>There are many ways to make money with DeFi </a:t>
+            </a:r>
+          </a:p>
+          <a:p>
+            <a:endParaRPr lang="en-US" sz="1400"/>
+          </a:p>
+          <a:p>
+            <a:pPr marL="285750" indent="-285750">
+              <a:buFont typeface="Arial" panose="020B0604020202020204" pitchFamily="34" charset="0"/>
+              <a:buChar char="•"/>
+            </a:pPr>
+            <a:r>
+              <a:rPr lang="en-US" sz="1400"/>
+              <a:t>You can </a:t>
+            </a:r>
+            <a:r>
+              <a:rPr lang="en-US" sz="1400" b="1">
+                <a:solidFill>
+                  <a:srgbClr val="00B050"/>
+                </a:solidFill>
+              </a:rPr>
+              <a:t>deposit</a:t>
+            </a:r>
+            <a:r>
+              <a:rPr lang="en-US" sz="1400"/>
+              <a:t> your cryptocurrency onto a </a:t>
+            </a:r>
+            <a:r>
+              <a:rPr lang="en-US" sz="1400" b="1">
+                <a:solidFill>
+                  <a:srgbClr val="00B050"/>
+                </a:solidFill>
+              </a:rPr>
+              <a:t>platform or protocol</a:t>
+            </a:r>
+            <a:r>
+              <a:rPr lang="en-US" sz="1400"/>
+              <a:t> that will pay you an APY (Annual Percentage Yield) for it. Most common deposits - Ethereum (ERC-20) token, or Ether (ETH), or a stablecoin like DAI or USDT</a:t>
+            </a:r>
+          </a:p>
+          <a:p>
+            <a:pPr marL="285750" indent="-285750">
+              <a:buFont typeface="Arial" panose="020B0604020202020204" pitchFamily="34" charset="0"/>
+              <a:buChar char="•"/>
+            </a:pPr>
+            <a:endParaRPr lang="en-US" sz="1400"/>
+          </a:p>
+          <a:p>
+            <a:pPr marL="285750" indent="-285750">
+              <a:buFont typeface="Arial" panose="020B0604020202020204" pitchFamily="34" charset="0"/>
+              <a:buChar char="•"/>
+            </a:pPr>
+            <a:r>
+              <a:rPr lang="en-US" sz="1400"/>
+              <a:t>You can do</a:t>
+            </a:r>
+            <a:r>
+              <a:rPr lang="en-US" sz="1400" b="1">
+                <a:solidFill>
+                  <a:srgbClr val="00B050"/>
+                </a:solidFill>
+              </a:rPr>
+              <a:t> liquidity mining (yield farming)</a:t>
+            </a:r>
+            <a:r>
+              <a:rPr lang="en-US" sz="1400"/>
+              <a:t>. You can </a:t>
+            </a:r>
+            <a:r>
+              <a:rPr lang="en-US" sz="1400" b="1">
+                <a:solidFill>
+                  <a:srgbClr val="00B050"/>
+                </a:solidFill>
+              </a:rPr>
+              <a:t>stake or trade rewards</a:t>
+            </a:r>
+            <a:r>
+              <a:rPr lang="en-US" sz="1400"/>
+              <a:t> that you get for depositing your crypto. Typically you are paid in native tokens of protocols or platforms you use. You can re-invest them, or trade on exchanges (DEXs like Uniswap)</a:t>
+            </a:r>
+          </a:p>
+          <a:p>
+            <a:pPr marL="285750" indent="-285750">
+              <a:buFont typeface="Arial" panose="020B0604020202020204" pitchFamily="34" charset="0"/>
+              <a:buChar char="•"/>
+            </a:pPr>
+            <a:endParaRPr lang="en-US" sz="1400"/>
+          </a:p>
+          <a:p>
+            <a:pPr marL="285750" indent="-285750">
+              <a:buFont typeface="Arial" panose="020B0604020202020204" pitchFamily="34" charset="0"/>
+              <a:buChar char="•"/>
+            </a:pPr>
+            <a:r>
+              <a:rPr lang="en-US" sz="1400"/>
+              <a:t>You can boost your returns with </a:t>
+            </a:r>
+            <a:r>
+              <a:rPr lang="en-US" sz="1400" b="1">
+                <a:solidFill>
+                  <a:srgbClr val="00B050"/>
+                </a:solidFill>
+              </a:rPr>
+              <a:t>borrowing and lending</a:t>
+            </a:r>
+            <a:r>
+              <a:rPr lang="en-US" sz="1400"/>
+              <a:t> (legal regulations apply !)</a:t>
+            </a:r>
+          </a:p>
+          <a:p>
+            <a:pPr marL="285750" indent="-285750">
+              <a:buFont typeface="Arial" panose="020B0604020202020204" pitchFamily="34" charset="0"/>
+              <a:buChar char="•"/>
+            </a:pPr>
+            <a:endParaRPr lang="en-US" sz="1400"/>
+          </a:p>
+          <a:p>
+            <a:pPr marL="285750" indent="-285750">
+              <a:buFont typeface="Arial" panose="020B0604020202020204" pitchFamily="34" charset="0"/>
+              <a:buChar char="•"/>
+            </a:pPr>
+            <a:r>
+              <a:rPr lang="en-US" sz="1400"/>
+              <a:t>You can use</a:t>
+            </a:r>
+            <a:r>
+              <a:rPr lang="en-US" sz="1400" b="1">
+                <a:solidFill>
+                  <a:srgbClr val="00B050"/>
+                </a:solidFill>
+              </a:rPr>
+              <a:t> leverage/derivatives</a:t>
+            </a:r>
+            <a:r>
+              <a:rPr lang="en-US" sz="1400"/>
+              <a:t>, but this </a:t>
+            </a:r>
+            <a:r>
+              <a:rPr lang="en-US" sz="1400" b="1">
+                <a:solidFill>
+                  <a:srgbClr val="00B050"/>
+                </a:solidFill>
+              </a:rPr>
+              <a:t>multi-layered liquidity mining</a:t>
+            </a:r>
+            <a:r>
+              <a:rPr lang="en-US" sz="1400"/>
+              <a:t> increases the risk</a:t>
+            </a:r>
+          </a:p>
+        </p:txBody>
+      </p:sp>
+      <p:sp>
+        <p:nvSpPr>
+          <p:cNvPr id="4" name="TextBox 3">
+            <a:extLst>
+              <a:ext uri="{FF2B5EF4-FFF2-40B4-BE49-F238E27FC236}">
+                <a16:creationId xmlns:a16="http://schemas.microsoft.com/office/drawing/2014/main" id="{DDD382D3-306C-5323-6F4D-5BFD67207853}"/>
+              </a:ext>
+            </a:extLst>
+          </p:cNvPr>
+          <p:cNvSpPr txBox="1"/>
+          <p:nvPr/>
+        </p:nvSpPr>
+        <p:spPr>
+          <a:xfrm>
+            <a:off x="8489067" y="870065"/>
+            <a:ext cx="3599396" cy="3970318"/>
+          </a:xfrm>
+          <a:prstGeom prst="rect">
+            <a:avLst/>
+          </a:prstGeom>
+          <a:solidFill>
+            <a:schemeClr val="accent4">
+              <a:lumMod val="20000"/>
+              <a:lumOff val="80000"/>
+            </a:schemeClr>
+          </a:solidFill>
+          <a:ln>
+            <a:solidFill>
+              <a:schemeClr val="accent1"/>
+            </a:solidFill>
+          </a:ln>
+        </p:spPr>
+        <p:txBody>
+          <a:bodyPr wrap="square" rtlCol="0">
+            <a:spAutoFit/>
+          </a:bodyPr>
+          <a:lstStyle/>
+          <a:p>
+            <a:r>
+              <a:rPr lang="en-US" sz="1400"/>
+              <a:t>Traditional Exchanges - </a:t>
+            </a:r>
+            <a:r>
+              <a:rPr lang="en-US" sz="1400">
+                <a:solidFill>
+                  <a:srgbClr val="FF0000"/>
+                </a:solidFill>
+              </a:rPr>
+              <a:t>Order-Book model</a:t>
+            </a:r>
+            <a:r>
+              <a:rPr lang="en-US" sz="1400"/>
+              <a:t>:</a:t>
+            </a:r>
+          </a:p>
+          <a:p>
+            <a:pPr marL="285750" indent="-285750">
+              <a:buFont typeface="Arial" panose="020B0604020202020204" pitchFamily="34" charset="0"/>
+              <a:buChar char="•"/>
+            </a:pPr>
+            <a:r>
+              <a:rPr lang="en-US" sz="1400"/>
+              <a:t>Buyers &amp; Sellers</a:t>
+            </a:r>
+          </a:p>
+          <a:p>
+            <a:pPr marL="285750" indent="-285750">
+              <a:buFont typeface="Arial" panose="020B0604020202020204" pitchFamily="34" charset="0"/>
+              <a:buChar char="•"/>
+            </a:pPr>
+            <a:r>
+              <a:rPr lang="en-US" sz="1400"/>
+              <a:t>Market Makers (Dealers) provide liquidity</a:t>
+            </a:r>
+          </a:p>
+          <a:p>
+            <a:endParaRPr lang="en-US" sz="1400"/>
+          </a:p>
+          <a:p>
+            <a:r>
+              <a:rPr lang="en-US" sz="1400"/>
+              <a:t>DEFI – </a:t>
+            </a:r>
+            <a:r>
+              <a:rPr lang="en-US" sz="1400" b="1">
+                <a:solidFill>
+                  <a:srgbClr val="FF0000"/>
+                </a:solidFill>
+              </a:rPr>
+              <a:t>Liquidity Pools model</a:t>
+            </a:r>
+            <a:r>
+              <a:rPr lang="en-US" sz="1400"/>
+              <a:t> to facilitate swaps between coins</a:t>
+            </a:r>
+          </a:p>
+          <a:p>
+            <a:endParaRPr lang="en-US" sz="1400"/>
+          </a:p>
+          <a:p>
+            <a:pPr marL="285750" indent="-285750">
+              <a:buFont typeface="Arial" panose="020B0604020202020204" pitchFamily="34" charset="0"/>
+              <a:buChar char="•"/>
+            </a:pPr>
+            <a:r>
+              <a:rPr lang="en-US" sz="1400" b="1">
+                <a:solidFill>
+                  <a:srgbClr val="FF0000"/>
+                </a:solidFill>
+              </a:rPr>
+              <a:t>LPs (Liquidity Providers)</a:t>
+            </a:r>
+            <a:r>
+              <a:rPr lang="en-US" sz="1400"/>
+              <a:t> are compensated</a:t>
+            </a:r>
+          </a:p>
+          <a:p>
+            <a:endParaRPr lang="en-US" sz="1400"/>
+          </a:p>
+          <a:p>
+            <a:pPr marL="285750" indent="-285750">
+              <a:buFont typeface="Arial" panose="020B0604020202020204" pitchFamily="34" charset="0"/>
+              <a:buChar char="•"/>
+            </a:pPr>
+            <a:r>
+              <a:rPr lang="en-US" sz="1400" b="1">
+                <a:solidFill>
+                  <a:srgbClr val="FF0000"/>
+                </a:solidFill>
+              </a:rPr>
+              <a:t>Liquidity mining</a:t>
+            </a:r>
+            <a:r>
+              <a:rPr lang="en-US" sz="1400"/>
+              <a:t> - LPs are compensated more for providing liquidity where it is needed more</a:t>
+            </a:r>
+          </a:p>
+          <a:p>
+            <a:pPr marL="285750" indent="-285750">
+              <a:buFont typeface="Arial" panose="020B0604020202020204" pitchFamily="34" charset="0"/>
+              <a:buChar char="•"/>
+            </a:pPr>
+            <a:endParaRPr lang="en-US" sz="1400"/>
+          </a:p>
+          <a:p>
+            <a:pPr marL="285750" indent="-285750">
+              <a:buFont typeface="Arial" panose="020B0604020202020204" pitchFamily="34" charset="0"/>
+              <a:buChar char="•"/>
+            </a:pPr>
+            <a:r>
+              <a:rPr lang="en-US" sz="1400"/>
+              <a:t>Prices are adjusted automatically (</a:t>
+            </a:r>
+            <a:r>
+              <a:rPr lang="en-US" sz="1400" b="1">
+                <a:solidFill>
+                  <a:srgbClr val="FF0000"/>
+                </a:solidFill>
+              </a:rPr>
+              <a:t>AMM = Automatic Market Maker</a:t>
+            </a:r>
+            <a:r>
+              <a:rPr lang="en-US" sz="1400"/>
+              <a:t> algorithms)</a:t>
+            </a:r>
+          </a:p>
+          <a:p>
+            <a:pPr marL="285750" indent="-285750">
+              <a:buFont typeface="Arial" panose="020B0604020202020204" pitchFamily="34" charset="0"/>
+              <a:buChar char="•"/>
+            </a:pPr>
+            <a:endParaRPr lang="en-US" sz="1400"/>
+          </a:p>
+          <a:p>
+            <a:pPr marL="285750" indent="-285750">
+              <a:buFont typeface="Arial" panose="020B0604020202020204" pitchFamily="34" charset="0"/>
+              <a:buChar char="•"/>
+            </a:pPr>
+            <a:r>
+              <a:rPr lang="en-US" sz="1400"/>
+              <a:t>The larger the pool, the lesser </a:t>
+            </a:r>
+            <a:r>
+              <a:rPr lang="en-US" sz="1400" b="1">
+                <a:solidFill>
+                  <a:srgbClr val="FF0000"/>
+                </a:solidFill>
+              </a:rPr>
+              <a:t>slippage</a:t>
+            </a:r>
+            <a:r>
+              <a:rPr lang="en-US" sz="1400"/>
+              <a:t> (effect of a single trade on prices)</a:t>
+            </a:r>
+          </a:p>
+        </p:txBody>
+      </p:sp>
+    </p:spTree>
+    <p:extLst>
+      <p:ext uri="{BB962C8B-B14F-4D97-AF65-F5344CB8AC3E}">
+        <p14:creationId xmlns:p14="http://schemas.microsoft.com/office/powerpoint/2010/main" val="614671572"/>
+      </p:ext>
+    </p:extLst>
+  </p:cSld>
+  <p:clrMapOvr>
+    <a:masterClrMapping/>
+  </p:clrMapOvr>
+</p:sld>
+</file>
+
+<file path=ppt/slides/slide6.xml><?xml version="1.0" encoding="utf-8"?>
+<p:sld xmlns:a="http://schemas.openxmlformats.org/drawingml/2006/main" xmlns:r="http://schemas.openxmlformats.org/officeDocument/2006/relationships" xmlns:p="http://schemas.openxmlformats.org/presentationml/2006/main">
+  <p:cSld>
+    <p:spTree>
+      <p:nvGrpSpPr>
+        <p:cNvPr id="1" name=""/>
+        <p:cNvGrpSpPr/>
+        <p:nvPr/>
+      </p:nvGrpSpPr>
+      <p:grpSpPr>
+        <a:xfrm>
+          <a:off x="0" y="0"/>
+          <a:ext cx="0" cy="0"/>
+          <a:chOff x="0" y="0"/>
+          <a:chExt cx="0" cy="0"/>
+        </a:xfrm>
+      </p:grpSpPr>
+      <p:sp>
+        <p:nvSpPr>
+          <p:cNvPr id="2" name="TextBox 1">
+            <a:extLst>
+              <a:ext uri="{FF2B5EF4-FFF2-40B4-BE49-F238E27FC236}">
+                <a16:creationId xmlns:a16="http://schemas.microsoft.com/office/drawing/2014/main" id="{67B42EF9-89A4-194B-BB40-DE4CA1888206}"/>
+              </a:ext>
+            </a:extLst>
+          </p:cNvPr>
+          <p:cNvSpPr txBox="1"/>
+          <p:nvPr/>
+        </p:nvSpPr>
+        <p:spPr>
+          <a:xfrm>
+            <a:off x="0" y="11344"/>
+            <a:ext cx="2764465" cy="523220"/>
+          </a:xfrm>
+          <a:prstGeom prst="rect">
+            <a:avLst/>
+          </a:prstGeom>
+          <a:noFill/>
+        </p:spPr>
+        <p:txBody>
+          <a:bodyPr wrap="square" rtlCol="0">
+            <a:spAutoFit/>
+          </a:bodyPr>
+          <a:lstStyle/>
+          <a:p>
+            <a:r>
+              <a:rPr lang="en-US" sz="2800" b="1"/>
+              <a:t>Crypto Lending</a:t>
+            </a:r>
+          </a:p>
+        </p:txBody>
+      </p:sp>
+      <p:sp>
+        <p:nvSpPr>
+          <p:cNvPr id="3" name="TextBox 2">
+            <a:extLst>
+              <a:ext uri="{FF2B5EF4-FFF2-40B4-BE49-F238E27FC236}">
+                <a16:creationId xmlns:a16="http://schemas.microsoft.com/office/drawing/2014/main" id="{E6FDE75F-9BCD-2A42-B045-8BADB6652072}"/>
+              </a:ext>
+            </a:extLst>
+          </p:cNvPr>
+          <p:cNvSpPr txBox="1"/>
+          <p:nvPr/>
+        </p:nvSpPr>
+        <p:spPr>
+          <a:xfrm>
+            <a:off x="6940062" y="181232"/>
+            <a:ext cx="3751385" cy="307777"/>
+          </a:xfrm>
+          <a:prstGeom prst="rect">
+            <a:avLst/>
+          </a:prstGeom>
+          <a:noFill/>
+        </p:spPr>
+        <p:txBody>
+          <a:bodyPr wrap="square" rtlCol="0">
+            <a:spAutoFit/>
+          </a:bodyPr>
+          <a:lstStyle/>
+          <a:p>
+            <a:r>
+              <a:rPr lang="en-US" sz="1400" b="1">
+                <a:solidFill>
+                  <a:srgbClr val="FF0000"/>
+                </a:solidFill>
+              </a:rPr>
+              <a:t>Page Under Construction</a:t>
+            </a:r>
+          </a:p>
+        </p:txBody>
+      </p:sp>
+    </p:spTree>
+    <p:extLst>
+      <p:ext uri="{BB962C8B-B14F-4D97-AF65-F5344CB8AC3E}">
+        <p14:creationId xmlns:p14="http://schemas.microsoft.com/office/powerpoint/2010/main" val="664642926"/>
+      </p:ext>
+    </p:extLst>
+  </p:cSld>
+  <p:clrMapOvr>
+    <a:masterClrMapping/>
+  </p:clrMapOvr>
+</p:sld>
+</file>
+
+<file path=ppt/slides/slide7.xml><?xml version="1.0" encoding="utf-8"?>
+<p:sld xmlns:a="http://schemas.openxmlformats.org/drawingml/2006/main" xmlns:r="http://schemas.openxmlformats.org/officeDocument/2006/relationships" xmlns:p="http://schemas.openxmlformats.org/presentationml/2006/main">
+  <p:cSld>
+    <p:spTree>
+      <p:nvGrpSpPr>
+        <p:cNvPr id="1" name=""/>
+        <p:cNvGrpSpPr/>
+        <p:nvPr/>
+      </p:nvGrpSpPr>
+      <p:grpSpPr>
+        <a:xfrm>
+          <a:off x="0" y="0"/>
+          <a:ext cx="0" cy="0"/>
+          <a:chOff x="0" y="0"/>
+          <a:chExt cx="0" cy="0"/>
+        </a:xfrm>
+      </p:grpSpPr>
+      <p:sp>
+        <p:nvSpPr>
           <p:cNvPr id="2" name="TextBox 1">
             <a:extLst>
               <a:ext uri="{FF2B5EF4-FFF2-40B4-BE49-F238E27FC236}">
@@ -5552,13 +6144,18 @@
         </p:nvSpPr>
         <p:spPr>
           <a:xfrm>
-            <a:off x="71942" y="3040025"/>
-            <a:ext cx="9830341" cy="3754874"/>
+            <a:off x="589299" y="1379667"/>
+            <a:ext cx="10455690" cy="4185761"/>
           </a:xfrm>
           <a:prstGeom prst="rect">
             <a:avLst/>
           </a:prstGeom>
-          <a:noFill/>
+          <a:solidFill>
+            <a:schemeClr val="accent4">
+              <a:lumMod val="20000"/>
+              <a:lumOff val="80000"/>
+            </a:schemeClr>
+          </a:solidFill>
         </p:spPr>
         <p:txBody>
           <a:bodyPr wrap="square" rtlCol="0">
@@ -5580,31 +6177,7 @@
             </a:r>
             <a:r>
               <a:rPr lang="en-US" sz="1400"/>
-              <a:t> – Liquidity Providers; </a:t>
-            </a:r>
-            <a:r>
-              <a:rPr lang="en-US" sz="1400" b="1">
-                <a:solidFill>
-                  <a:srgbClr val="FF0000"/>
-                </a:solidFill>
-              </a:rPr>
-              <a:t>AMM</a:t>
-            </a:r>
-            <a:r>
-              <a:rPr lang="en-US" sz="1400"/>
-              <a:t> (Automatic Market maker); </a:t>
-            </a:r>
-            <a:r>
-              <a:rPr lang="en-US" sz="1400" b="1">
-                <a:solidFill>
-                  <a:srgbClr val="FF0000"/>
-                </a:solidFill>
-              </a:rPr>
-              <a:t>TVL</a:t>
-            </a:r>
-            <a:r>
-              <a:rPr lang="en-US" sz="1400"/>
-              <a:t> – Total Value Locked</a:t>
+              <a:t> – Liquidity Providers </a:t>
             </a:r>
           </a:p>
           <a:p>
@@ -5618,11 +6191,11 @@
                   <a:srgbClr val="FF0000"/>
                 </a:solidFill>
               </a:rPr>
-              <a:t>IOTA</a:t>
-            </a:r>
-            <a:r>
-              <a:rPr lang="en-US" sz="1400"/>
-              <a:t> - open-source distributed ledger and cryptocurrency designed for the Internet of things (IoT)</a:t>
+              <a:t>AMM</a:t>
+            </a:r>
+            <a:r>
+              <a:rPr lang="en-US" sz="1400"/>
+              <a:t> (Automatic Market maker) </a:t>
             </a:r>
           </a:p>
           <a:p>
@@ -5636,11 +6209,60 @@
                   <a:srgbClr val="FF0000"/>
                 </a:solidFill>
               </a:rPr>
+              <a:t>TVL</a:t>
+            </a:r>
+            <a:r>
+              <a:rPr lang="en-US" sz="1400"/>
+              <a:t> – Total Value Locked</a:t>
+            </a:r>
+          </a:p>
+          <a:p>
+            <a:pPr marL="285750" indent="-285750">
+              <a:buFont typeface="Arial" panose="020B0604020202020204" pitchFamily="34" charset="0"/>
+              <a:buChar char="•"/>
+            </a:pPr>
+            <a:r>
+              <a:rPr lang="en-US" sz="1400" b="1">
+                <a:solidFill>
+                  <a:srgbClr val="FF0000"/>
+                </a:solidFill>
+              </a:rPr>
+              <a:t>IOTA</a:t>
+            </a:r>
+            <a:r>
+              <a:rPr lang="en-US" sz="1400"/>
+              <a:t> - open-source distributed ledger and cryptocurrency designed for the Internet of things (IoT)</a:t>
+            </a:r>
+          </a:p>
+          <a:p>
+            <a:endParaRPr lang="en-US" sz="1400"/>
+          </a:p>
+          <a:p>
+            <a:pPr marL="285750" indent="-285750">
+              <a:buFont typeface="Arial" panose="020B0604020202020204" pitchFamily="34" charset="0"/>
+              <a:buChar char="•"/>
+            </a:pPr>
+            <a:r>
+              <a:rPr lang="en-US" sz="1400" b="1">
+                <a:solidFill>
+                  <a:srgbClr val="FF0000"/>
+                </a:solidFill>
+              </a:rPr>
               <a:t>MoonPay</a:t>
             </a:r>
             <a:r>
               <a:rPr lang="en-US" sz="1400"/>
-              <a:t> - https://www.moonpay.com - fast and simple way to buy and sell crypto</a:t>
+              <a:t> - </a:t>
+            </a:r>
+            <a:r>
+              <a:rPr lang="en-US" sz="1400">
+                <a:hlinkClick r:id="rId2"/>
+              </a:rPr>
+              <a:t>https://www.moonpay.com</a:t>
+            </a:r>
+            <a:r>
+              <a:rPr lang="en-US" sz="1400"/>
+              <a:t> - fast and simple way to buy and sell crypto</a:t>
             </a:r>
             <a:endParaRPr lang="en-US" sz="1400" b="1">
               <a:solidFill>
@@ -5663,7 +6285,17 @@
             </a:r>
             <a:r>
               <a:rPr lang="en-US" sz="1400"/>
-              <a:t> - https://yetifinance.co - Borrow against your entire Avalanche portfolio interest-free</a:t>
+              <a:t> - </a:t>
+            </a:r>
+            <a:r>
+              <a:rPr lang="en-US" sz="1400">
+                <a:hlinkClick r:id="rId3"/>
+              </a:rPr>
+              <a:t>https://yetifinance.co</a:t>
+            </a:r>
+            <a:r>
+              <a:rPr lang="en-US" sz="1400"/>
+              <a:t> - Borrow against your entire Avalanche portfolio interest-free</a:t>
             </a:r>
           </a:p>
           <a:p>
@@ -5681,7 +6313,17 @@
             </a:r>
             <a:r>
               <a:rPr lang="en-US" sz="1400"/>
-              <a:t> - https://stargate.finance/ - A fully composable native asset bridge with unified liquidity and instant guaranteed finality built on top of LayerZero</a:t>
+              <a:t> - </a:t>
+            </a:r>
+            <a:r>
+              <a:rPr lang="en-US" sz="1400">
+                <a:hlinkClick r:id="rId4"/>
+              </a:rPr>
+              <a:t>https://stargate.finance</a:t>
+            </a:r>
+            <a:r>
+              <a:rPr lang="en-US" sz="1400"/>
+              <a:t> - A fully composable native asset bridge with unified liquidity and instant guaranteed finality built on top of LayerZero</a:t>
             </a:r>
           </a:p>
           <a:p>
@@ -5699,7 +6341,17 @@
             </a:r>
             <a:r>
               <a:rPr lang="en-US" sz="1400"/>
-              <a:t> - https://www.convexfinance.com – deposit liquidity, earn boosted CRV and rewards</a:t>
+              <a:t> - </a:t>
+            </a:r>
+            <a:r>
+              <a:rPr lang="en-US" sz="1400">
+                <a:hlinkClick r:id="rId5"/>
+              </a:rPr>
+              <a:t>https://www.convexfinance.com</a:t>
+            </a:r>
+            <a:r>
+              <a:rPr lang="en-US" sz="1400"/>
+              <a:t> – deposit liquidity, earn boosted CRV and rewards</a:t>
             </a:r>
           </a:p>
           <a:p>
@@ -5717,7 +6369,17 @@
             </a:r>
             <a:r>
               <a:rPr lang="en-US" sz="1400"/>
-              <a:t> - https://resources.curve.fi – crypto swapping platform</a:t>
+              <a:t> - </a:t>
+            </a:r>
+            <a:r>
+              <a:rPr lang="en-US" sz="1400">
+                <a:hlinkClick r:id="rId6"/>
+              </a:rPr>
+              <a:t>https://resources.curve.fi</a:t>
+            </a:r>
+            <a:r>
+              <a:rPr lang="en-US" sz="1400"/>
+              <a:t> – crypto swapping platform</a:t>
             </a:r>
           </a:p>
           <a:p>
@@ -5735,7 +6397,17 @@
             </a:r>
             <a:r>
               <a:rPr lang="en-US" sz="1400"/>
-              <a:t> - - https://uniswap.org - cryptocurrency exchange which uses a decentralized network protocol</a:t>
+              <a:t> - </a:t>
+            </a:r>
+            <a:r>
+              <a:rPr lang="en-US" sz="1400">
+                <a:hlinkClick r:id="rId7"/>
+              </a:rPr>
+              <a:t>https://uniswap.org</a:t>
+            </a:r>
+            <a:r>
+              <a:rPr lang="en-US" sz="1400"/>
+              <a:t> - cryptocurrency exchange which uses a decentralized network protocol</a:t>
             </a:r>
           </a:p>
           <a:p>
@@ -5753,7 +6425,17 @@
             </a:r>
             <a:r>
               <a:rPr lang="en-US" sz="1400"/>
-              <a:t> - https://balancer.fi - Automated portfolio manager and trading platform</a:t>
+              <a:t> - </a:t>
+            </a:r>
+            <a:r>
+              <a:rPr lang="en-US" sz="1400">
+                <a:hlinkClick r:id="rId8"/>
+              </a:rPr>
+              <a:t>https://balancer.fi</a:t>
+            </a:r>
+            <a:r>
+              <a:rPr lang="en-US" sz="1400"/>
+              <a:t> - Automated portfolio manager and trading platform</a:t>
             </a:r>
             <a:endParaRPr lang="en-US" sz="1400" b="1">
               <a:solidFill>
@@ -5776,7 +6458,17 @@
             </a:r>
             <a:r>
               <a:rPr lang="en-US" sz="1400"/>
-              <a:t> - https://fantom.foundation - fast, high-throughput open-source smart contract platform for digital assets and dApps</a:t>
+              <a:t> - </a:t>
+            </a:r>
+            <a:r>
+              <a:rPr lang="en-US" sz="1400">
+                <a:hlinkClick r:id="rId9"/>
+              </a:rPr>
+              <a:t>https://fantom.foundation</a:t>
+            </a:r>
+            <a:r>
+              <a:rPr lang="en-US" sz="1400"/>
+              <a:t> - fast, high-throughput open-source smart contract platform for digital assets and dApps</a:t>
             </a:r>
           </a:p>
           <a:p>
@@ -5794,7 +6486,17 @@
             </a:r>
             <a:r>
               <a:rPr lang="en-US" sz="1400"/>
-              <a:t> - https://vectorfinance.io/ - Deposit on Vector, the best yield booster on Avalanche</a:t>
+              <a:t> - </a:t>
+            </a:r>
+            <a:r>
+              <a:rPr lang="en-US" sz="1400">
+                <a:hlinkClick r:id="rId10"/>
+              </a:rPr>
+              <a:t>https://vectorfinance.io</a:t>
+            </a:r>
+            <a:r>
+              <a:rPr lang="en-US" sz="1400"/>
+              <a:t> - Deposit on Vector, the best yield booster on Avalanche</a:t>
             </a:r>
           </a:p>
           <a:p>
@@ -5812,7 +6514,17 @@
             </a:r>
             <a:r>
               <a:rPr lang="en-US" sz="1400"/>
-              <a:t> - https://platypus.finance – decentralized exchange, AMM for stableswap. Lower Slippage. Simpler UX.</a:t>
+              <a:t> - </a:t>
+            </a:r>
+            <a:r>
+              <a:rPr lang="en-US" sz="1400">
+                <a:hlinkClick r:id="rId11"/>
+              </a:rPr>
+              <a:t>https://platypus.finance</a:t>
+            </a:r>
+            <a:r>
+              <a:rPr lang="en-US" sz="1400"/>
+              <a:t> – decentralized exchange, AMM for stableswap. Lower Slippage. Simpler UX.</a:t>
             </a:r>
           </a:p>
           <a:p>
@@ -5830,7 +6542,17 @@
             </a:r>
             <a:r>
               <a:rPr lang="en-US" sz="1400"/>
-              <a:t> - https://docs.acryptos.com - a yield farming optimizer on the Binance Smart Chain (BSC)</a:t>
+              <a:t> - </a:t>
+            </a:r>
+            <a:r>
+              <a:rPr lang="en-US" sz="1400">
+                <a:hlinkClick r:id="rId12"/>
+              </a:rPr>
+              <a:t>https://docs.acryptos.com</a:t>
+            </a:r>
+            <a:r>
+              <a:rPr lang="en-US" sz="1400"/>
+              <a:t> - a yield farming optimizer on the Binance Smart Chain (BSC)</a:t>
             </a:r>
           </a:p>
           <a:p>
@@ -5848,7 +6570,17 @@
             </a:r>
             <a:r>
               <a:rPr lang="en-US" sz="1400"/>
-              <a:t> - https://defillama.com - a multi-chain TVL stats dashboard, where data connectors are contributed by a community</a:t>
+              <a:t> - </a:t>
+            </a:r>
+            <a:r>
+              <a:rPr lang="en-US" sz="1400">
+                <a:hlinkClick r:id="rId13"/>
+              </a:rPr>
+              <a:t>https://defillama.com</a:t>
+            </a:r>
+            <a:r>
+              <a:rPr lang="en-US" sz="1400"/>
+              <a:t> - a multi-chain TVL stats dashboard, where data connectors are contributed by a community</a:t>
             </a:r>
           </a:p>
           <a:p>
@@ -5866,7 +6598,17 @@
             </a:r>
             <a:r>
               <a:rPr lang="en-US" sz="1400"/>
-              <a:t> - https://www.arrakis.finance/ - web3 liquidity layer (automated community-owned protocol)</a:t>
+              <a:t> - </a:t>
+            </a:r>
+            <a:r>
+              <a:rPr lang="en-US" sz="1400">
+                <a:hlinkClick r:id="rId14"/>
+              </a:rPr>
+              <a:t>https://www.arrakis.finance</a:t>
+            </a:r>
+            <a:r>
+              <a:rPr lang="en-US" sz="1400"/>
+              <a:t> - web3 liquidity layer (automated community-owned protocol)</a:t>
             </a:r>
           </a:p>
         </p:txBody>
@@ -5885,8 +6627,8 @@
         </p:nvSpPr>
         <p:spPr>
           <a:xfrm>
-            <a:off x="0" y="0"/>
-            <a:ext cx="5393932" cy="523220"/>
+            <a:off x="1" y="0"/>
+            <a:ext cx="6352674" cy="523220"/>
           </a:xfrm>
           <a:prstGeom prst="rect">
             <a:avLst/>
@@ -5901,363 +6643,7 @@
           <a:p>
             <a:r>
               <a:rPr lang="en-US" sz="2800" b="1"/>
-              <a:t>Decentralized finance (DeFi)</a:t>
-            </a:r>
-          </a:p>
-        </p:txBody>
-      </p:sp>
-      <p:sp>
-        <p:nvSpPr>
-          <p:cNvPr id="6" name="TextBox 5">
-            <a:extLst>
-              <a:ext uri="{FF2B5EF4-FFF2-40B4-BE49-F238E27FC236}">
-                <a16:creationId xmlns:a16="http://schemas.microsoft.com/office/drawing/2014/main" id="{2A631DBA-9ADF-E8AB-AE40-57957357B6DD}"/>
-              </a:ext>
-            </a:extLst>
-          </p:cNvPr>
-          <p:cNvSpPr txBox="1"/>
-          <p:nvPr/>
-        </p:nvSpPr>
-        <p:spPr>
-          <a:xfrm>
-            <a:off x="27338" y="603365"/>
-            <a:ext cx="7828908" cy="2031325"/>
-          </a:xfrm>
-          <a:prstGeom prst="rect">
-            <a:avLst/>
-          </a:prstGeom>
-          <a:noFill/>
-        </p:spPr>
-        <p:txBody>
-          <a:bodyPr wrap="square" rtlCol="0">
-            <a:spAutoFit/>
-          </a:bodyPr>
-          <a:lstStyle/>
-          <a:p>
-            <a:pPr marL="285750" indent="-285750">
-              <a:buFont typeface="Arial" panose="020B0604020202020204" pitchFamily="34" charset="0"/>
-              <a:buChar char="•"/>
-            </a:pPr>
-            <a:r>
-              <a:rPr lang="en-US" sz="1400" b="1">
-                <a:solidFill>
-                  <a:srgbClr val="FF0000"/>
-                </a:solidFill>
-              </a:rPr>
-              <a:t>DeFi</a:t>
-            </a:r>
-            <a:r>
-              <a:rPr lang="en-US" sz="1400"/>
-              <a:t> - allows you to </a:t>
-            </a:r>
-            <a:r>
-              <a:rPr lang="en-US" sz="1400" b="1">
-                <a:solidFill>
-                  <a:srgbClr val="00B050"/>
-                </a:solidFill>
-              </a:rPr>
-              <a:t>stake, lend, borrow and trade</a:t>
-            </a:r>
-            <a:r>
-              <a:rPr lang="en-US" sz="1400"/>
-              <a:t> cryptocurrencies (similar how banks do that)</a:t>
-            </a:r>
-          </a:p>
-          <a:p>
-            <a:pPr marL="285750" indent="-285750">
-              <a:buFont typeface="Arial" panose="020B0604020202020204" pitchFamily="34" charset="0"/>
-              <a:buChar char="•"/>
-            </a:pPr>
-            <a:r>
-              <a:rPr lang="en-US" sz="1400"/>
-              <a:t>You can </a:t>
-            </a:r>
-            <a:r>
-              <a:rPr lang="en-US" sz="1400" b="1">
-                <a:solidFill>
-                  <a:srgbClr val="00B050"/>
-                </a:solidFill>
-              </a:rPr>
-              <a:t>deposit</a:t>
-            </a:r>
-            <a:r>
-              <a:rPr lang="en-US" sz="1400"/>
-              <a:t> your cryptocurrency onto a </a:t>
-            </a:r>
-            <a:r>
-              <a:rPr lang="en-US" sz="1400" b="1">
-                <a:solidFill>
-                  <a:srgbClr val="00B050"/>
-                </a:solidFill>
-              </a:rPr>
-              <a:t>platform or protocol</a:t>
-            </a:r>
-            <a:r>
-              <a:rPr lang="en-US" sz="1400"/>
-              <a:t> that will pay you an APY (Annual Percentage Yield) for it. Most common deposits - Ethereum (ERC-20) token, or Ether (ETH), or a stablecoin like DAI or USDT</a:t>
-            </a:r>
-          </a:p>
-          <a:p>
-            <a:pPr marL="285750" indent="-285750">
-              <a:buFont typeface="Arial" panose="020B0604020202020204" pitchFamily="34" charset="0"/>
-              <a:buChar char="•"/>
-            </a:pPr>
-            <a:r>
-              <a:rPr lang="en-US" sz="1400"/>
-              <a:t>You can do</a:t>
-            </a:r>
-            <a:r>
-              <a:rPr lang="en-US" sz="1400" b="1">
-                <a:solidFill>
-                  <a:srgbClr val="00B050"/>
-                </a:solidFill>
-              </a:rPr>
-              <a:t> liquidity mining (yield farming)</a:t>
-            </a:r>
-            <a:r>
-              <a:rPr lang="en-US" sz="1400"/>
-              <a:t>. You can </a:t>
-            </a:r>
-            <a:r>
-              <a:rPr lang="en-US" sz="1400" b="1">
-                <a:solidFill>
-                  <a:srgbClr val="00B050"/>
-                </a:solidFill>
-              </a:rPr>
-              <a:t>stake or trade rewards</a:t>
-            </a:r>
-            <a:r>
-              <a:rPr lang="en-US" sz="1400"/>
-              <a:t> that you get for depositing your crypto. Typically you are paid in native tokens of protocols or platforms you use. You can re-invest them, or trade on exchanges (DEXs like Uniswap)</a:t>
-            </a:r>
-          </a:p>
-          <a:p>
-            <a:pPr marL="285750" indent="-285750">
-              <a:buFont typeface="Arial" panose="020B0604020202020204" pitchFamily="34" charset="0"/>
-              <a:buChar char="•"/>
-            </a:pPr>
-            <a:r>
-              <a:rPr lang="en-US" sz="1400"/>
-              <a:t>You can boost your returns with </a:t>
-            </a:r>
-            <a:r>
-              <a:rPr lang="en-US" sz="1400" b="1">
-                <a:solidFill>
-                  <a:srgbClr val="00B050"/>
-                </a:solidFill>
-              </a:rPr>
-              <a:t>borrowing and lending</a:t>
-            </a:r>
-            <a:r>
-              <a:rPr lang="en-US" sz="1400"/>
-              <a:t> (legal regulations apply !)</a:t>
-            </a:r>
-          </a:p>
-          <a:p>
-            <a:pPr marL="285750" indent="-285750">
-              <a:buFont typeface="Arial" panose="020B0604020202020204" pitchFamily="34" charset="0"/>
-              <a:buChar char="•"/>
-            </a:pPr>
-            <a:r>
-              <a:rPr lang="en-US" sz="1400"/>
-              <a:t>You can use</a:t>
-            </a:r>
-            <a:r>
-              <a:rPr lang="en-US" sz="1400" b="1">
-                <a:solidFill>
-                  <a:srgbClr val="00B050"/>
-                </a:solidFill>
-              </a:rPr>
-              <a:t> leverage/derivatives</a:t>
-            </a:r>
-            <a:r>
-              <a:rPr lang="en-US" sz="1400"/>
-              <a:t>, but this </a:t>
-            </a:r>
-            <a:r>
-              <a:rPr lang="en-US" sz="1400" b="1">
-                <a:solidFill>
-                  <a:srgbClr val="00B050"/>
-                </a:solidFill>
-              </a:rPr>
-              <a:t>multi-layered liquidity mining</a:t>
-            </a:r>
-            <a:r>
-              <a:rPr lang="en-US" sz="1400"/>
-              <a:t> increases the risk</a:t>
-            </a:r>
-          </a:p>
-        </p:txBody>
-      </p:sp>
-      <p:sp>
-        <p:nvSpPr>
-          <p:cNvPr id="4" name="TextBox 3">
-            <a:extLst>
-              <a:ext uri="{FF2B5EF4-FFF2-40B4-BE49-F238E27FC236}">
-                <a16:creationId xmlns:a16="http://schemas.microsoft.com/office/drawing/2014/main" id="{DDD382D3-306C-5323-6F4D-5BFD67207853}"/>
-              </a:ext>
-            </a:extLst>
-          </p:cNvPr>
-          <p:cNvSpPr txBox="1"/>
-          <p:nvPr/>
-        </p:nvSpPr>
-        <p:spPr>
-          <a:xfrm>
-            <a:off x="8501098" y="111280"/>
-            <a:ext cx="3599396" cy="3108543"/>
-          </a:xfrm>
-          <a:prstGeom prst="rect">
-            <a:avLst/>
-          </a:prstGeom>
-          <a:noFill/>
-          <a:ln>
-            <a:solidFill>
-              <a:schemeClr val="accent1"/>
-            </a:solidFill>
-          </a:ln>
-        </p:spPr>
-        <p:txBody>
-          <a:bodyPr wrap="square" rtlCol="0">
-            <a:spAutoFit/>
-          </a:bodyPr>
-          <a:lstStyle/>
-          <a:p>
-            <a:r>
-              <a:rPr lang="en-US" sz="1400"/>
-              <a:t>Traditional Exchanges - </a:t>
-            </a:r>
-            <a:r>
-              <a:rPr lang="en-US" sz="1400">
-                <a:solidFill>
-                  <a:srgbClr val="FF0000"/>
-                </a:solidFill>
-              </a:rPr>
-              <a:t>Order-Book model</a:t>
-            </a:r>
-            <a:r>
-              <a:rPr lang="en-US" sz="1400"/>
-              <a:t>:</a:t>
-            </a:r>
-          </a:p>
-          <a:p>
-            <a:pPr marL="285750" indent="-285750">
-              <a:buFont typeface="Arial" panose="020B0604020202020204" pitchFamily="34" charset="0"/>
-              <a:buChar char="•"/>
-            </a:pPr>
-            <a:r>
-              <a:rPr lang="en-US" sz="1400"/>
-              <a:t>Buyers &amp; Sellers</a:t>
-            </a:r>
-          </a:p>
-          <a:p>
-            <a:pPr marL="285750" indent="-285750">
-              <a:buFont typeface="Arial" panose="020B0604020202020204" pitchFamily="34" charset="0"/>
-              <a:buChar char="•"/>
-            </a:pPr>
-            <a:r>
-              <a:rPr lang="en-US" sz="1400"/>
-              <a:t>Market Makers (Dealers) provide liquidity</a:t>
-            </a:r>
-          </a:p>
-          <a:p>
-            <a:endParaRPr lang="en-US" sz="1400"/>
-          </a:p>
-          <a:p>
-            <a:r>
-              <a:rPr lang="en-US" sz="1400"/>
-              <a:t>DEFI – </a:t>
-            </a:r>
-            <a:r>
-              <a:rPr lang="en-US" sz="1400" b="1">
-                <a:solidFill>
-                  <a:srgbClr val="FF0000"/>
-                </a:solidFill>
-              </a:rPr>
-              <a:t>Liquidity Pools model</a:t>
-            </a:r>
-            <a:r>
-              <a:rPr lang="en-US" sz="1400"/>
-              <a:t> to facilitate swaps between coins</a:t>
-            </a:r>
-          </a:p>
-          <a:p>
-            <a:pPr marL="285750" indent="-285750">
-              <a:buFont typeface="Arial" panose="020B0604020202020204" pitchFamily="34" charset="0"/>
-              <a:buChar char="•"/>
-            </a:pPr>
-            <a:r>
-              <a:rPr lang="en-US" sz="1400" b="1">
-                <a:solidFill>
-                  <a:srgbClr val="FF0000"/>
-                </a:solidFill>
-              </a:rPr>
-              <a:t>LPs (Liquidity Providers)</a:t>
-            </a:r>
-            <a:r>
-              <a:rPr lang="en-US" sz="1400"/>
-              <a:t> are compensated</a:t>
-            </a:r>
-          </a:p>
-          <a:p>
-            <a:pPr marL="285750" indent="-285750">
-              <a:buFont typeface="Arial" panose="020B0604020202020204" pitchFamily="34" charset="0"/>
-              <a:buChar char="•"/>
-            </a:pPr>
-            <a:r>
-              <a:rPr lang="en-US" sz="1400" b="1">
-                <a:solidFill>
-                  <a:srgbClr val="FF0000"/>
-                </a:solidFill>
-              </a:rPr>
-              <a:t>Liquidity mining</a:t>
-            </a:r>
-            <a:r>
-              <a:rPr lang="en-US" sz="1400"/>
-              <a:t> - LPs are compensated more for providing liquidity where it is needed more</a:t>
-            </a:r>
-          </a:p>
-          <a:p>
-            <a:pPr marL="285750" indent="-285750">
-              <a:buFont typeface="Arial" panose="020B0604020202020204" pitchFamily="34" charset="0"/>
-              <a:buChar char="•"/>
-            </a:pPr>
-            <a:r>
-              <a:rPr lang="en-US" sz="1400"/>
-              <a:t>Prices are adjusted automatically (</a:t>
-            </a:r>
-            <a:r>
-              <a:rPr lang="en-US" sz="1400" b="1">
-                <a:solidFill>
-                  <a:srgbClr val="FF0000"/>
-                </a:solidFill>
-              </a:rPr>
-              <a:t>AMM = Automatic Market Maker</a:t>
-            </a:r>
-            <a:r>
-              <a:rPr lang="en-US" sz="1400"/>
-              <a:t> algorithms)</a:t>
-            </a:r>
-          </a:p>
-          <a:p>
-            <a:pPr marL="285750" indent="-285750">
-              <a:buFont typeface="Arial" panose="020B0604020202020204" pitchFamily="34" charset="0"/>
-              <a:buChar char="•"/>
-            </a:pPr>
-            <a:r>
-              <a:rPr lang="en-US" sz="1400"/>
-              <a:t>The larger the pool, the lesser </a:t>
-            </a:r>
-            <a:r>
-              <a:rPr lang="en-US" sz="1400" b="1">
-                <a:solidFill>
-                  <a:srgbClr val="FF0000"/>
-                </a:solidFill>
-              </a:rPr>
-              <a:t>slippage</a:t>
-            </a:r>
-            <a:r>
-              <a:rPr lang="en-US" sz="1400"/>
-              <a:t> (effect of a single trade on prices)</a:t>
+              <a:t>Making Money with DeFi – continued ...</a:t>
             </a:r>
           </a:p>
         </p:txBody>
@@ -6265,7 +6651,7 @@
     </p:spTree>
     <p:extLst>
       <p:ext uri="{BB962C8B-B14F-4D97-AF65-F5344CB8AC3E}">
-        <p14:creationId xmlns:p14="http://schemas.microsoft.com/office/powerpoint/2010/main" val="614671572"/>
+        <p14:creationId xmlns:p14="http://schemas.microsoft.com/office/powerpoint/2010/main" val="3183453214"/>
       </p:ext>
     </p:extLst>
   </p:cSld>

--- a/crypto_09_defi.pptx
+++ b/crypto_09_defi.pptx
@@ -5,7 +5,7 @@
     <p:sldMasterId id="2147483834" r:id="rId1"/>
   </p:sldMasterIdLst>
   <p:notesMasterIdLst>
-    <p:notesMasterId r:id="rId9"/>
+    <p:notesMasterId r:id="rId10"/>
   </p:notesMasterIdLst>
   <p:sldIdLst>
     <p:sldId id="328" r:id="rId2"/>
@@ -15,6 +15,7 @@
     <p:sldId id="326" r:id="rId6"/>
     <p:sldId id="306" r:id="rId7"/>
     <p:sldId id="331" r:id="rId8"/>
+    <p:sldId id="332" r:id="rId9"/>
   </p:sldIdLst>
   <p:sldSz cx="12192000" cy="6858000"/>
   <p:notesSz cx="6858000" cy="9144000"/>
@@ -691,7 +692,7 @@
           <a:p>
             <a:fld id="{EB1FAE4C-5332-014D-8E1B-BB8DA73EF81D}" type="datetimeFigureOut">
               <a:rPr lang="en-US"/>
-              <a:t>5/9/22</a:t>
+              <a:t>5/13/22</a:t>
             </a:fld>
             <a:endParaRPr lang="en-US"/>
           </a:p>
@@ -861,7 +862,7 @@
           <a:p>
             <a:fld id="{EB1FAE4C-5332-014D-8E1B-BB8DA73EF81D}" type="datetimeFigureOut">
               <a:rPr lang="en-US"/>
-              <a:t>5/9/22</a:t>
+              <a:t>5/13/22</a:t>
             </a:fld>
             <a:endParaRPr lang="en-US"/>
           </a:p>
@@ -1041,7 +1042,7 @@
           <a:p>
             <a:fld id="{EB1FAE4C-5332-014D-8E1B-BB8DA73EF81D}" type="datetimeFigureOut">
               <a:rPr lang="en-US"/>
-              <a:t>5/9/22</a:t>
+              <a:t>5/13/22</a:t>
             </a:fld>
             <a:endParaRPr lang="en-US"/>
           </a:p>
@@ -1211,7 +1212,7 @@
           <a:p>
             <a:fld id="{EB1FAE4C-5332-014D-8E1B-BB8DA73EF81D}" type="datetimeFigureOut">
               <a:rPr lang="en-US"/>
-              <a:t>5/9/22</a:t>
+              <a:t>5/13/22</a:t>
             </a:fld>
             <a:endParaRPr lang="en-US"/>
           </a:p>
@@ -1458,7 +1459,7 @@
           <a:p>
             <a:fld id="{EB1FAE4C-5332-014D-8E1B-BB8DA73EF81D}" type="datetimeFigureOut">
               <a:rPr lang="en-US"/>
-              <a:t>5/9/22</a:t>
+              <a:t>5/13/22</a:t>
             </a:fld>
             <a:endParaRPr lang="en-US"/>
           </a:p>
@@ -1689,7 +1690,7 @@
           <a:p>
             <a:fld id="{EB1FAE4C-5332-014D-8E1B-BB8DA73EF81D}" type="datetimeFigureOut">
               <a:rPr lang="en-US"/>
-              <a:t>5/9/22</a:t>
+              <a:t>5/13/22</a:t>
             </a:fld>
             <a:endParaRPr lang="en-US"/>
           </a:p>
@@ -2055,7 +2056,7 @@
           <a:p>
             <a:fld id="{EB1FAE4C-5332-014D-8E1B-BB8DA73EF81D}" type="datetimeFigureOut">
               <a:rPr lang="en-US"/>
-              <a:t>5/9/22</a:t>
+              <a:t>5/13/22</a:t>
             </a:fld>
             <a:endParaRPr lang="en-US"/>
           </a:p>
@@ -2174,7 +2175,7 @@
           <a:p>
             <a:fld id="{EB1FAE4C-5332-014D-8E1B-BB8DA73EF81D}" type="datetimeFigureOut">
               <a:rPr lang="en-US"/>
-              <a:t>5/9/22</a:t>
+              <a:t>5/13/22</a:t>
             </a:fld>
             <a:endParaRPr lang="en-US"/>
           </a:p>
@@ -2271,7 +2272,7 @@
           <a:p>
             <a:fld id="{EB1FAE4C-5332-014D-8E1B-BB8DA73EF81D}" type="datetimeFigureOut">
               <a:rPr lang="en-US"/>
-              <a:t>5/9/22</a:t>
+              <a:t>5/13/22</a:t>
             </a:fld>
             <a:endParaRPr lang="en-US"/>
           </a:p>
@@ -2547,7 +2548,7 @@
           <a:p>
             <a:fld id="{EB1FAE4C-5332-014D-8E1B-BB8DA73EF81D}" type="datetimeFigureOut">
               <a:rPr lang="en-US"/>
-              <a:t>5/9/22</a:t>
+              <a:t>5/13/22</a:t>
             </a:fld>
             <a:endParaRPr lang="en-US"/>
           </a:p>
@@ -2804,7 +2805,7 @@
           <a:p>
             <a:fld id="{EB1FAE4C-5332-014D-8E1B-BB8DA73EF81D}" type="datetimeFigureOut">
               <a:rPr lang="en-US"/>
-              <a:t>5/9/22</a:t>
+              <a:t>5/13/22</a:t>
             </a:fld>
             <a:endParaRPr lang="en-US"/>
           </a:p>
@@ -3017,7 +3018,7 @@
           <a:p>
             <a:fld id="{EB1FAE4C-5332-014D-8E1B-BB8DA73EF81D}" type="datetimeFigureOut">
               <a:rPr lang="en-US"/>
-              <a:t>5/9/22</a:t>
+              <a:t>5/13/22</a:t>
             </a:fld>
             <a:endParaRPr lang="en-US"/>
           </a:p>
@@ -6652,6 +6653,80 @@
     <p:extLst>
       <p:ext uri="{BB962C8B-B14F-4D97-AF65-F5344CB8AC3E}">
         <p14:creationId xmlns:p14="http://schemas.microsoft.com/office/powerpoint/2010/main" val="3183453214"/>
+      </p:ext>
+    </p:extLst>
+  </p:cSld>
+  <p:clrMapOvr>
+    <a:masterClrMapping/>
+  </p:clrMapOvr>
+</p:sld>
+</file>
+
+<file path=ppt/slides/slide8.xml><?xml version="1.0" encoding="utf-8"?>
+<p:sld xmlns:a="http://schemas.openxmlformats.org/drawingml/2006/main" xmlns:r="http://schemas.openxmlformats.org/officeDocument/2006/relationships" xmlns:p="http://schemas.openxmlformats.org/presentationml/2006/main">
+  <p:cSld>
+    <p:spTree>
+      <p:nvGrpSpPr>
+        <p:cNvPr id="1" name=""/>
+        <p:cNvGrpSpPr/>
+        <p:nvPr/>
+      </p:nvGrpSpPr>
+      <p:grpSpPr>
+        <a:xfrm>
+          <a:off x="0" y="0"/>
+          <a:ext cx="0" cy="0"/>
+          <a:chOff x="0" y="0"/>
+          <a:chExt cx="0" cy="0"/>
+        </a:xfrm>
+      </p:grpSpPr>
+      <p:sp>
+        <p:nvSpPr>
+          <p:cNvPr id="2" name="TextBox 1">
+            <a:extLst>
+              <a:ext uri="{FF2B5EF4-FFF2-40B4-BE49-F238E27FC236}">
+                <a16:creationId xmlns:a16="http://schemas.microsoft.com/office/drawing/2014/main" id="{1F2F9838-EFA9-D227-CC3F-763076159501}"/>
+              </a:ext>
+            </a:extLst>
+          </p:cNvPr>
+          <p:cNvSpPr txBox="1"/>
+          <p:nvPr/>
+        </p:nvSpPr>
+        <p:spPr>
+          <a:xfrm>
+            <a:off x="1460500" y="1193800"/>
+            <a:ext cx="6388100" cy="923330"/>
+          </a:xfrm>
+          <a:prstGeom prst="rect">
+            <a:avLst/>
+          </a:prstGeom>
+          <a:noFill/>
+        </p:spPr>
+        <p:txBody>
+          <a:bodyPr wrap="square" rtlCol="0">
+            <a:spAutoFit/>
+          </a:bodyPr>
+          <a:lstStyle/>
+          <a:p>
+            <a:r>
+              <a:rPr lang="en-US"/>
+              <a:t>DeFi List</a:t>
+            </a:r>
+          </a:p>
+          <a:p>
+            <a:endParaRPr lang="en-US"/>
+          </a:p>
+          <a:p>
+            <a:r>
+              <a:rPr lang="en-US"/>
+              <a:t>https://www.defipulse.com/defi-list</a:t>
+            </a:r>
+          </a:p>
+        </p:txBody>
+      </p:sp>
+    </p:spTree>
+    <p:extLst>
+      <p:ext uri="{BB962C8B-B14F-4D97-AF65-F5344CB8AC3E}">
+        <p14:creationId xmlns:p14="http://schemas.microsoft.com/office/powerpoint/2010/main" val="1005611158"/>
       </p:ext>
     </p:extLst>
   </p:cSld>

--- a/crypto_09_defi.pptx
+++ b/crypto_09_defi.pptx
@@ -692,7 +692,7 @@
           <a:p>
             <a:fld id="{EB1FAE4C-5332-014D-8E1B-BB8DA73EF81D}" type="datetimeFigureOut">
               <a:rPr lang="en-US"/>
-              <a:t>5/13/22</a:t>
+              <a:t>5/20/22</a:t>
             </a:fld>
             <a:endParaRPr lang="en-US"/>
           </a:p>
@@ -862,7 +862,7 @@
           <a:p>
             <a:fld id="{EB1FAE4C-5332-014D-8E1B-BB8DA73EF81D}" type="datetimeFigureOut">
               <a:rPr lang="en-US"/>
-              <a:t>5/13/22</a:t>
+              <a:t>5/20/22</a:t>
             </a:fld>
             <a:endParaRPr lang="en-US"/>
           </a:p>
@@ -1042,7 +1042,7 @@
           <a:p>
             <a:fld id="{EB1FAE4C-5332-014D-8E1B-BB8DA73EF81D}" type="datetimeFigureOut">
               <a:rPr lang="en-US"/>
-              <a:t>5/13/22</a:t>
+              <a:t>5/20/22</a:t>
             </a:fld>
             <a:endParaRPr lang="en-US"/>
           </a:p>
@@ -1212,7 +1212,7 @@
           <a:p>
             <a:fld id="{EB1FAE4C-5332-014D-8E1B-BB8DA73EF81D}" type="datetimeFigureOut">
               <a:rPr lang="en-US"/>
-              <a:t>5/13/22</a:t>
+              <a:t>5/20/22</a:t>
             </a:fld>
             <a:endParaRPr lang="en-US"/>
           </a:p>
@@ -1459,7 +1459,7 @@
           <a:p>
             <a:fld id="{EB1FAE4C-5332-014D-8E1B-BB8DA73EF81D}" type="datetimeFigureOut">
               <a:rPr lang="en-US"/>
-              <a:t>5/13/22</a:t>
+              <a:t>5/20/22</a:t>
             </a:fld>
             <a:endParaRPr lang="en-US"/>
           </a:p>
@@ -1690,7 +1690,7 @@
           <a:p>
             <a:fld id="{EB1FAE4C-5332-014D-8E1B-BB8DA73EF81D}" type="datetimeFigureOut">
               <a:rPr lang="en-US"/>
-              <a:t>5/13/22</a:t>
+              <a:t>5/20/22</a:t>
             </a:fld>
             <a:endParaRPr lang="en-US"/>
           </a:p>
@@ -2056,7 +2056,7 @@
           <a:p>
             <a:fld id="{EB1FAE4C-5332-014D-8E1B-BB8DA73EF81D}" type="datetimeFigureOut">
               <a:rPr lang="en-US"/>
-              <a:t>5/13/22</a:t>
+              <a:t>5/20/22</a:t>
             </a:fld>
             <a:endParaRPr lang="en-US"/>
           </a:p>
@@ -2175,7 +2175,7 @@
           <a:p>
             <a:fld id="{EB1FAE4C-5332-014D-8E1B-BB8DA73EF81D}" type="datetimeFigureOut">
               <a:rPr lang="en-US"/>
-              <a:t>5/13/22</a:t>
+              <a:t>5/20/22</a:t>
             </a:fld>
             <a:endParaRPr lang="en-US"/>
           </a:p>
@@ -2272,7 +2272,7 @@
           <a:p>
             <a:fld id="{EB1FAE4C-5332-014D-8E1B-BB8DA73EF81D}" type="datetimeFigureOut">
               <a:rPr lang="en-US"/>
-              <a:t>5/13/22</a:t>
+              <a:t>5/20/22</a:t>
             </a:fld>
             <a:endParaRPr lang="en-US"/>
           </a:p>
@@ -2548,7 +2548,7 @@
           <a:p>
             <a:fld id="{EB1FAE4C-5332-014D-8E1B-BB8DA73EF81D}" type="datetimeFigureOut">
               <a:rPr lang="en-US"/>
-              <a:t>5/13/22</a:t>
+              <a:t>5/20/22</a:t>
             </a:fld>
             <a:endParaRPr lang="en-US"/>
           </a:p>
@@ -2805,7 +2805,7 @@
           <a:p>
             <a:fld id="{EB1FAE4C-5332-014D-8E1B-BB8DA73EF81D}" type="datetimeFigureOut">
               <a:rPr lang="en-US"/>
-              <a:t>5/13/22</a:t>
+              <a:t>5/20/22</a:t>
             </a:fld>
             <a:endParaRPr lang="en-US"/>
           </a:p>
@@ -3018,7 +3018,7 @@
           <a:p>
             <a:fld id="{EB1FAE4C-5332-014D-8E1B-BB8DA73EF81D}" type="datetimeFigureOut">
               <a:rPr lang="en-US"/>
-              <a:t>5/13/22</a:t>
+              <a:t>5/20/22</a:t>
             </a:fld>
             <a:endParaRPr lang="en-US"/>
           </a:p>
@@ -6097,6 +6097,41 @@
                 </a:solidFill>
               </a:rPr>
               <a:t>Page Under Construction</a:t>
+            </a:r>
+          </a:p>
+        </p:txBody>
+      </p:sp>
+      <p:sp>
+        <p:nvSpPr>
+          <p:cNvPr id="4" name="TextBox 3">
+            <a:extLst>
+              <a:ext uri="{FF2B5EF4-FFF2-40B4-BE49-F238E27FC236}">
+                <a16:creationId xmlns:a16="http://schemas.microsoft.com/office/drawing/2014/main" id="{39548DFB-53F7-69B7-7FEF-3AB5018DCF99}"/>
+              </a:ext>
+            </a:extLst>
+          </p:cNvPr>
+          <p:cNvSpPr txBox="1"/>
+          <p:nvPr/>
+        </p:nvSpPr>
+        <p:spPr>
+          <a:xfrm>
+            <a:off x="2982686" y="1905000"/>
+            <a:ext cx="3864428" cy="369332"/>
+          </a:xfrm>
+          <a:prstGeom prst="rect">
+            <a:avLst/>
+          </a:prstGeom>
+          <a:noFill/>
+        </p:spPr>
+        <p:txBody>
+          <a:bodyPr wrap="square" rtlCol="0">
+            <a:spAutoFit/>
+          </a:bodyPr>
+          <a:lstStyle/>
+          <a:p>
+            <a:r>
+              <a:rPr lang="en-US"/>
+              <a:t>Flash Loans ?</a:t>
             </a:r>
           </a:p>
         </p:txBody>
